--- a/Week-3/Day-1/Agentic_AI_Foundations_Data_Engineers.pptx
+++ b/Week-3/Day-1/Agentic_AI_Foundations_Data_Engineers.pptx
@@ -17,30 +17,32 @@
     <p:sldId id="283" r:id="rId11"/>
     <p:sldId id="284" r:id="rId12"/>
     <p:sldId id="285" r:id="rId13"/>
-    <p:sldId id="286" r:id="rId14"/>
-    <p:sldId id="262" r:id="rId15"/>
-    <p:sldId id="287" r:id="rId16"/>
-    <p:sldId id="263" r:id="rId17"/>
-    <p:sldId id="264" r:id="rId18"/>
-    <p:sldId id="288" r:id="rId19"/>
-    <p:sldId id="289" r:id="rId20"/>
-    <p:sldId id="265" r:id="rId21"/>
-    <p:sldId id="290" r:id="rId22"/>
-    <p:sldId id="266" r:id="rId23"/>
-    <p:sldId id="267" r:id="rId24"/>
-    <p:sldId id="268" r:id="rId25"/>
-    <p:sldId id="291" r:id="rId26"/>
-    <p:sldId id="269" r:id="rId27"/>
-    <p:sldId id="270" r:id="rId28"/>
-    <p:sldId id="271" r:id="rId29"/>
-    <p:sldId id="292" r:id="rId30"/>
-    <p:sldId id="272" r:id="rId31"/>
-    <p:sldId id="273" r:id="rId32"/>
-    <p:sldId id="274" r:id="rId33"/>
-    <p:sldId id="275" r:id="rId34"/>
-    <p:sldId id="276" r:id="rId35"/>
-    <p:sldId id="277" r:id="rId36"/>
-    <p:sldId id="278" r:id="rId37"/>
+    <p:sldId id="294" r:id="rId14"/>
+    <p:sldId id="286" r:id="rId15"/>
+    <p:sldId id="262" r:id="rId16"/>
+    <p:sldId id="293" r:id="rId17"/>
+    <p:sldId id="287" r:id="rId18"/>
+    <p:sldId id="263" r:id="rId19"/>
+    <p:sldId id="264" r:id="rId20"/>
+    <p:sldId id="288" r:id="rId21"/>
+    <p:sldId id="289" r:id="rId22"/>
+    <p:sldId id="265" r:id="rId23"/>
+    <p:sldId id="290" r:id="rId24"/>
+    <p:sldId id="266" r:id="rId25"/>
+    <p:sldId id="267" r:id="rId26"/>
+    <p:sldId id="268" r:id="rId27"/>
+    <p:sldId id="291" r:id="rId28"/>
+    <p:sldId id="269" r:id="rId29"/>
+    <p:sldId id="270" r:id="rId30"/>
+    <p:sldId id="271" r:id="rId31"/>
+    <p:sldId id="292" r:id="rId32"/>
+    <p:sldId id="272" r:id="rId33"/>
+    <p:sldId id="273" r:id="rId34"/>
+    <p:sldId id="274" r:id="rId35"/>
+    <p:sldId id="275" r:id="rId36"/>
+    <p:sldId id="276" r:id="rId37"/>
+    <p:sldId id="277" r:id="rId38"/>
+    <p:sldId id="278" r:id="rId39"/>
   </p:sldIdLst>
   <p:sldSz cx="9144000" cy="6858000" type="screen4x3"/>
   <p:notesSz cx="6858000" cy="9144000"/>
@@ -16877,6 +16879,1216 @@
           <p:cNvPr id="2" name="Title 1">
             <a:extLst>
               <a:ext uri="{FF2B5EF4-FFF2-40B4-BE49-F238E27FC236}">
+                <a16:creationId xmlns:a16="http://schemas.microsoft.com/office/drawing/2014/main" id="{558400F0-32B5-093B-6585-6279A2EB8823}"/>
+              </a:ext>
+            </a:extLst>
+          </p:cNvPr>
+          <p:cNvSpPr>
+            <a:spLocks noGrp="1"/>
+          </p:cNvSpPr>
+          <p:nvPr>
+            <p:ph type="title"/>
+          </p:nvPr>
+        </p:nvSpPr>
+        <p:spPr/>
+        <p:txBody>
+          <a:bodyPr/>
+          <a:lstStyle/>
+          <a:p>
+            <a:r>
+              <a:rPr lang="en-US" dirty="0"/>
+              <a:t>Differences</a:t>
+            </a:r>
+            <a:endParaRPr lang="en-IN" dirty="0"/>
+          </a:p>
+        </p:txBody>
+      </p:sp>
+      <p:graphicFrame>
+        <p:nvGraphicFramePr>
+          <p:cNvPr id="4" name="Content Placeholder 3">
+            <a:extLst>
+              <a:ext uri="{FF2B5EF4-FFF2-40B4-BE49-F238E27FC236}">
+                <a16:creationId xmlns:a16="http://schemas.microsoft.com/office/drawing/2014/main" id="{87EEC7D3-DD2C-E48F-C373-8C345C12A11B}"/>
+              </a:ext>
+            </a:extLst>
+          </p:cNvPr>
+          <p:cNvGraphicFramePr>
+            <a:graphicFrameLocks noGrp="1"/>
+          </p:cNvGraphicFramePr>
+          <p:nvPr>
+            <p:ph idx="1"/>
+            <p:extLst>
+              <p:ext uri="{D42A27DB-BD31-4B8C-83A1-F6EECF244321}">
+                <p14:modId xmlns:p14="http://schemas.microsoft.com/office/powerpoint/2010/main" val="2570299569"/>
+              </p:ext>
+            </p:extLst>
+          </p:nvPr>
+        </p:nvGraphicFramePr>
+        <p:xfrm>
+          <a:off x="380999" y="2084833"/>
+          <a:ext cx="8505826" cy="4696968"/>
+        </p:xfrm>
+        <a:graphic>
+          <a:graphicData uri="http://schemas.openxmlformats.org/drawingml/2006/table">
+            <a:tbl>
+              <a:tblPr firstRow="1" firstCol="1" bandRow="1">
+                <a:tableStyleId>{5C22544A-7EE6-4342-B048-85BDC9FD1C3A}</a:tableStyleId>
+              </a:tblPr>
+              <a:tblGrid>
+                <a:gridCol w="1215118">
+                  <a:extLst>
+                    <a:ext uri="{9D8B030D-6E8A-4147-A177-3AD203B41FA5}">
+                      <a16:colId xmlns:a16="http://schemas.microsoft.com/office/drawing/2014/main" val="4075233630"/>
+                    </a:ext>
+                  </a:extLst>
+                </a:gridCol>
+                <a:gridCol w="1215118">
+                  <a:extLst>
+                    <a:ext uri="{9D8B030D-6E8A-4147-A177-3AD203B41FA5}">
+                      <a16:colId xmlns:a16="http://schemas.microsoft.com/office/drawing/2014/main" val="3044716657"/>
+                    </a:ext>
+                  </a:extLst>
+                </a:gridCol>
+                <a:gridCol w="1215118">
+                  <a:extLst>
+                    <a:ext uri="{9D8B030D-6E8A-4147-A177-3AD203B41FA5}">
+                      <a16:colId xmlns:a16="http://schemas.microsoft.com/office/drawing/2014/main" val="2580722131"/>
+                    </a:ext>
+                  </a:extLst>
+                </a:gridCol>
+                <a:gridCol w="1215118">
+                  <a:extLst>
+                    <a:ext uri="{9D8B030D-6E8A-4147-A177-3AD203B41FA5}">
+                      <a16:colId xmlns:a16="http://schemas.microsoft.com/office/drawing/2014/main" val="3577293135"/>
+                    </a:ext>
+                  </a:extLst>
+                </a:gridCol>
+                <a:gridCol w="1215118">
+                  <a:extLst>
+                    <a:ext uri="{9D8B030D-6E8A-4147-A177-3AD203B41FA5}">
+                      <a16:colId xmlns:a16="http://schemas.microsoft.com/office/drawing/2014/main" val="1727157707"/>
+                    </a:ext>
+                  </a:extLst>
+                </a:gridCol>
+                <a:gridCol w="1215118">
+                  <a:extLst>
+                    <a:ext uri="{9D8B030D-6E8A-4147-A177-3AD203B41FA5}">
+                      <a16:colId xmlns:a16="http://schemas.microsoft.com/office/drawing/2014/main" val="939361377"/>
+                    </a:ext>
+                  </a:extLst>
+                </a:gridCol>
+                <a:gridCol w="1215118">
+                  <a:extLst>
+                    <a:ext uri="{9D8B030D-6E8A-4147-A177-3AD203B41FA5}">
+                      <a16:colId xmlns:a16="http://schemas.microsoft.com/office/drawing/2014/main" val="1565345466"/>
+                    </a:ext>
+                  </a:extLst>
+                </a:gridCol>
+              </a:tblGrid>
+              <a:tr h="369820">
+                <a:tc>
+                  <a:txBody>
+                    <a:bodyPr/>
+                    <a:lstStyle/>
+                    <a:p>
+                      <a:pPr>
+                        <a:lnSpc>
+                          <a:spcPct val="115000"/>
+                        </a:lnSpc>
+                        <a:spcAft>
+                          <a:spcPts val="1000"/>
+                        </a:spcAft>
+                        <a:buNone/>
+                      </a:pPr>
+                      <a:r>
+                        <a:rPr lang="en-IN" sz="1100">
+                          <a:effectLst/>
+                        </a:rPr>
+                        <a:t>Pattern</a:t>
+                      </a:r>
+                      <a:endParaRPr lang="en-IN" sz="1100">
+                        <a:effectLst/>
+                        <a:latin typeface="Calibri" panose="020F0502020204030204" pitchFamily="34" charset="0"/>
+                        <a:ea typeface="Calibri" panose="020F0502020204030204" pitchFamily="34" charset="0"/>
+                        <a:cs typeface="Times New Roman" panose="02020603050405020304" pitchFamily="18" charset="0"/>
+                      </a:endParaRPr>
+                    </a:p>
+                  </a:txBody>
+                  <a:tcPr marL="9525" marR="9525" marT="9525" marB="9525" anchor="ctr"/>
+                </a:tc>
+                <a:tc>
+                  <a:txBody>
+                    <a:bodyPr/>
+                    <a:lstStyle/>
+                    <a:p>
+                      <a:pPr>
+                        <a:lnSpc>
+                          <a:spcPct val="115000"/>
+                        </a:lnSpc>
+                        <a:spcAft>
+                          <a:spcPts val="1000"/>
+                        </a:spcAft>
+                        <a:buNone/>
+                      </a:pPr>
+                      <a:r>
+                        <a:rPr lang="en-IN" sz="1100">
+                          <a:effectLst/>
+                        </a:rPr>
+                        <a:t>Full Form</a:t>
+                      </a:r>
+                      <a:endParaRPr lang="en-IN" sz="1100">
+                        <a:effectLst/>
+                        <a:latin typeface="Calibri" panose="020F0502020204030204" pitchFamily="34" charset="0"/>
+                        <a:ea typeface="Calibri" panose="020F0502020204030204" pitchFamily="34" charset="0"/>
+                        <a:cs typeface="Times New Roman" panose="02020603050405020304" pitchFamily="18" charset="0"/>
+                      </a:endParaRPr>
+                    </a:p>
+                  </a:txBody>
+                  <a:tcPr marL="9525" marR="9525" marT="9525" marB="9525" anchor="ctr"/>
+                </a:tc>
+                <a:tc>
+                  <a:txBody>
+                    <a:bodyPr/>
+                    <a:lstStyle/>
+                    <a:p>
+                      <a:pPr>
+                        <a:lnSpc>
+                          <a:spcPct val="115000"/>
+                        </a:lnSpc>
+                        <a:spcAft>
+                          <a:spcPts val="1000"/>
+                        </a:spcAft>
+                        <a:buNone/>
+                      </a:pPr>
+                      <a:r>
+                        <a:rPr lang="en-IN" sz="1100">
+                          <a:effectLst/>
+                        </a:rPr>
+                        <a:t>Main Idea</a:t>
+                      </a:r>
+                      <a:endParaRPr lang="en-IN" sz="1100">
+                        <a:effectLst/>
+                        <a:latin typeface="Calibri" panose="020F0502020204030204" pitchFamily="34" charset="0"/>
+                        <a:ea typeface="Calibri" panose="020F0502020204030204" pitchFamily="34" charset="0"/>
+                        <a:cs typeface="Times New Roman" panose="02020603050405020304" pitchFamily="18" charset="0"/>
+                      </a:endParaRPr>
+                    </a:p>
+                  </a:txBody>
+                  <a:tcPr marL="9525" marR="9525" marT="9525" marB="9525" anchor="ctr"/>
+                </a:tc>
+                <a:tc>
+                  <a:txBody>
+                    <a:bodyPr/>
+                    <a:lstStyle/>
+                    <a:p>
+                      <a:pPr>
+                        <a:lnSpc>
+                          <a:spcPct val="115000"/>
+                        </a:lnSpc>
+                        <a:spcAft>
+                          <a:spcPts val="1000"/>
+                        </a:spcAft>
+                        <a:buNone/>
+                      </a:pPr>
+                      <a:r>
+                        <a:rPr lang="en-IN" sz="1100">
+                          <a:effectLst/>
+                        </a:rPr>
+                        <a:t>How It Works</a:t>
+                      </a:r>
+                      <a:endParaRPr lang="en-IN" sz="1100">
+                        <a:effectLst/>
+                        <a:latin typeface="Calibri" panose="020F0502020204030204" pitchFamily="34" charset="0"/>
+                        <a:ea typeface="Calibri" panose="020F0502020204030204" pitchFamily="34" charset="0"/>
+                        <a:cs typeface="Times New Roman" panose="02020603050405020304" pitchFamily="18" charset="0"/>
+                      </a:endParaRPr>
+                    </a:p>
+                  </a:txBody>
+                  <a:tcPr marL="9525" marR="9525" marT="9525" marB="9525" anchor="ctr"/>
+                </a:tc>
+                <a:tc>
+                  <a:txBody>
+                    <a:bodyPr/>
+                    <a:lstStyle/>
+                    <a:p>
+                      <a:pPr>
+                        <a:lnSpc>
+                          <a:spcPct val="115000"/>
+                        </a:lnSpc>
+                        <a:spcAft>
+                          <a:spcPts val="1000"/>
+                        </a:spcAft>
+                        <a:buNone/>
+                      </a:pPr>
+                      <a:r>
+                        <a:rPr lang="en-IN" sz="1100">
+                          <a:effectLst/>
+                        </a:rPr>
+                        <a:t>Best Use Cases</a:t>
+                      </a:r>
+                      <a:endParaRPr lang="en-IN" sz="1100">
+                        <a:effectLst/>
+                        <a:latin typeface="Calibri" panose="020F0502020204030204" pitchFamily="34" charset="0"/>
+                        <a:ea typeface="Calibri" panose="020F0502020204030204" pitchFamily="34" charset="0"/>
+                        <a:cs typeface="Times New Roman" panose="02020603050405020304" pitchFamily="18" charset="0"/>
+                      </a:endParaRPr>
+                    </a:p>
+                  </a:txBody>
+                  <a:tcPr marL="9525" marR="9525" marT="9525" marB="9525" anchor="ctr"/>
+                </a:tc>
+                <a:tc>
+                  <a:txBody>
+                    <a:bodyPr/>
+                    <a:lstStyle/>
+                    <a:p>
+                      <a:pPr>
+                        <a:lnSpc>
+                          <a:spcPct val="115000"/>
+                        </a:lnSpc>
+                        <a:spcAft>
+                          <a:spcPts val="1000"/>
+                        </a:spcAft>
+                        <a:buNone/>
+                      </a:pPr>
+                      <a:r>
+                        <a:rPr lang="en-IN" sz="1100">
+                          <a:effectLst/>
+                        </a:rPr>
+                        <a:t>Strengths</a:t>
+                      </a:r>
+                      <a:endParaRPr lang="en-IN" sz="1100">
+                        <a:effectLst/>
+                        <a:latin typeface="Calibri" panose="020F0502020204030204" pitchFamily="34" charset="0"/>
+                        <a:ea typeface="Calibri" panose="020F0502020204030204" pitchFamily="34" charset="0"/>
+                        <a:cs typeface="Times New Roman" panose="02020603050405020304" pitchFamily="18" charset="0"/>
+                      </a:endParaRPr>
+                    </a:p>
+                  </a:txBody>
+                  <a:tcPr marL="9525" marR="9525" marT="9525" marB="9525" anchor="ctr"/>
+                </a:tc>
+                <a:tc>
+                  <a:txBody>
+                    <a:bodyPr/>
+                    <a:lstStyle/>
+                    <a:p>
+                      <a:pPr>
+                        <a:lnSpc>
+                          <a:spcPct val="115000"/>
+                        </a:lnSpc>
+                        <a:spcAft>
+                          <a:spcPts val="1000"/>
+                        </a:spcAft>
+                        <a:buNone/>
+                      </a:pPr>
+                      <a:r>
+                        <a:rPr lang="en-IN" sz="1100">
+                          <a:effectLst/>
+                        </a:rPr>
+                        <a:t>Weaknesses</a:t>
+                      </a:r>
+                      <a:endParaRPr lang="en-IN" sz="1100">
+                        <a:effectLst/>
+                        <a:latin typeface="Calibri" panose="020F0502020204030204" pitchFamily="34" charset="0"/>
+                        <a:ea typeface="Calibri" panose="020F0502020204030204" pitchFamily="34" charset="0"/>
+                        <a:cs typeface="Times New Roman" panose="02020603050405020304" pitchFamily="18" charset="0"/>
+                      </a:endParaRPr>
+                    </a:p>
+                  </a:txBody>
+                  <a:tcPr marL="9525" marR="9525" marT="9525" marB="9525" anchor="ctr"/>
+                </a:tc>
+                <a:extLst>
+                  <a:ext uri="{0D108BD9-81ED-4DB2-BD59-A6C34878D82A}">
+                    <a16:rowId xmlns:a16="http://schemas.microsoft.com/office/drawing/2014/main" val="3696496711"/>
+                  </a:ext>
+                </a:extLst>
+              </a:tr>
+              <a:tr h="1081787">
+                <a:tc>
+                  <a:txBody>
+                    <a:bodyPr/>
+                    <a:lstStyle/>
+                    <a:p>
+                      <a:pPr>
+                        <a:lnSpc>
+                          <a:spcPct val="115000"/>
+                        </a:lnSpc>
+                        <a:spcAft>
+                          <a:spcPts val="1000"/>
+                        </a:spcAft>
+                        <a:buNone/>
+                      </a:pPr>
+                      <a:r>
+                        <a:rPr lang="en-IN" sz="1100">
+                          <a:effectLst/>
+                        </a:rPr>
+                        <a:t>ReAct</a:t>
+                      </a:r>
+                      <a:endParaRPr lang="en-IN" sz="1100">
+                        <a:effectLst/>
+                        <a:latin typeface="Calibri" panose="020F0502020204030204" pitchFamily="34" charset="0"/>
+                        <a:ea typeface="Calibri" panose="020F0502020204030204" pitchFamily="34" charset="0"/>
+                        <a:cs typeface="Times New Roman" panose="02020603050405020304" pitchFamily="18" charset="0"/>
+                      </a:endParaRPr>
+                    </a:p>
+                  </a:txBody>
+                  <a:tcPr marL="9525" marR="9525" marT="9525" marB="9525" anchor="ctr"/>
+                </a:tc>
+                <a:tc>
+                  <a:txBody>
+                    <a:bodyPr/>
+                    <a:lstStyle/>
+                    <a:p>
+                      <a:pPr>
+                        <a:lnSpc>
+                          <a:spcPct val="115000"/>
+                        </a:lnSpc>
+                        <a:spcAft>
+                          <a:spcPts val="1000"/>
+                        </a:spcAft>
+                        <a:buNone/>
+                      </a:pPr>
+                      <a:r>
+                        <a:rPr lang="en-IN" sz="1100">
+                          <a:effectLst/>
+                        </a:rPr>
+                        <a:t>Reason + Act</a:t>
+                      </a:r>
+                      <a:endParaRPr lang="en-IN" sz="1100">
+                        <a:effectLst/>
+                        <a:latin typeface="Calibri" panose="020F0502020204030204" pitchFamily="34" charset="0"/>
+                        <a:ea typeface="Calibri" panose="020F0502020204030204" pitchFamily="34" charset="0"/>
+                        <a:cs typeface="Times New Roman" panose="02020603050405020304" pitchFamily="18" charset="0"/>
+                      </a:endParaRPr>
+                    </a:p>
+                  </a:txBody>
+                  <a:tcPr marL="9525" marR="9525" marT="9525" marB="9525" anchor="ctr"/>
+                </a:tc>
+                <a:tc>
+                  <a:txBody>
+                    <a:bodyPr/>
+                    <a:lstStyle/>
+                    <a:p>
+                      <a:pPr>
+                        <a:lnSpc>
+                          <a:spcPct val="115000"/>
+                        </a:lnSpc>
+                        <a:spcAft>
+                          <a:spcPts val="1000"/>
+                        </a:spcAft>
+                        <a:buNone/>
+                      </a:pPr>
+                      <a:r>
+                        <a:rPr lang="en-IN" sz="1100">
+                          <a:effectLst/>
+                        </a:rPr>
+                        <a:t>Model thinks and takes actions iteratively</a:t>
+                      </a:r>
+                      <a:endParaRPr lang="en-IN" sz="1100">
+                        <a:effectLst/>
+                        <a:latin typeface="Calibri" panose="020F0502020204030204" pitchFamily="34" charset="0"/>
+                        <a:ea typeface="Calibri" panose="020F0502020204030204" pitchFamily="34" charset="0"/>
+                        <a:cs typeface="Times New Roman" panose="02020603050405020304" pitchFamily="18" charset="0"/>
+                      </a:endParaRPr>
+                    </a:p>
+                  </a:txBody>
+                  <a:tcPr marL="9525" marR="9525" marT="9525" marB="9525" anchor="ctr"/>
+                </a:tc>
+                <a:tc>
+                  <a:txBody>
+                    <a:bodyPr/>
+                    <a:lstStyle/>
+                    <a:p>
+                      <a:pPr>
+                        <a:lnSpc>
+                          <a:spcPct val="115000"/>
+                        </a:lnSpc>
+                        <a:spcAft>
+                          <a:spcPts val="1000"/>
+                        </a:spcAft>
+                        <a:buNone/>
+                      </a:pPr>
+                      <a:r>
+                        <a:rPr lang="en-IN" sz="1100">
+                          <a:effectLst/>
+                        </a:rPr>
+                        <a:t>Thought → Action → Observation → Repeat</a:t>
+                      </a:r>
+                      <a:endParaRPr lang="en-IN" sz="1100">
+                        <a:effectLst/>
+                        <a:latin typeface="Calibri" panose="020F0502020204030204" pitchFamily="34" charset="0"/>
+                        <a:ea typeface="Calibri" panose="020F0502020204030204" pitchFamily="34" charset="0"/>
+                        <a:cs typeface="Times New Roman" panose="02020603050405020304" pitchFamily="18" charset="0"/>
+                      </a:endParaRPr>
+                    </a:p>
+                  </a:txBody>
+                  <a:tcPr marL="9525" marR="9525" marT="9525" marB="9525" anchor="ctr"/>
+                </a:tc>
+                <a:tc>
+                  <a:txBody>
+                    <a:bodyPr/>
+                    <a:lstStyle/>
+                    <a:p>
+                      <a:pPr>
+                        <a:lnSpc>
+                          <a:spcPct val="115000"/>
+                        </a:lnSpc>
+                        <a:spcAft>
+                          <a:spcPts val="1000"/>
+                        </a:spcAft>
+                        <a:buNone/>
+                      </a:pPr>
+                      <a:r>
+                        <a:rPr lang="en-IN" sz="1100">
+                          <a:effectLst/>
+                        </a:rPr>
+                        <a:t>AI agents, tool use, web search, APIs</a:t>
+                      </a:r>
+                      <a:endParaRPr lang="en-IN" sz="1100">
+                        <a:effectLst/>
+                        <a:latin typeface="Calibri" panose="020F0502020204030204" pitchFamily="34" charset="0"/>
+                        <a:ea typeface="Calibri" panose="020F0502020204030204" pitchFamily="34" charset="0"/>
+                        <a:cs typeface="Times New Roman" panose="02020603050405020304" pitchFamily="18" charset="0"/>
+                      </a:endParaRPr>
+                    </a:p>
+                  </a:txBody>
+                  <a:tcPr marL="9525" marR="9525" marT="9525" marB="9525" anchor="ctr"/>
+                </a:tc>
+                <a:tc>
+                  <a:txBody>
+                    <a:bodyPr/>
+                    <a:lstStyle/>
+                    <a:p>
+                      <a:pPr>
+                        <a:lnSpc>
+                          <a:spcPct val="115000"/>
+                        </a:lnSpc>
+                        <a:spcAft>
+                          <a:spcPts val="1000"/>
+                        </a:spcAft>
+                        <a:buNone/>
+                      </a:pPr>
+                      <a:r>
+                        <a:rPr lang="en-IN" sz="1100">
+                          <a:effectLst/>
+                        </a:rPr>
+                        <a:t>Dynamic, interactive, works well with tools</a:t>
+                      </a:r>
+                      <a:endParaRPr lang="en-IN" sz="1100">
+                        <a:effectLst/>
+                        <a:latin typeface="Calibri" panose="020F0502020204030204" pitchFamily="34" charset="0"/>
+                        <a:ea typeface="Calibri" panose="020F0502020204030204" pitchFamily="34" charset="0"/>
+                        <a:cs typeface="Times New Roman" panose="02020603050405020304" pitchFamily="18" charset="0"/>
+                      </a:endParaRPr>
+                    </a:p>
+                  </a:txBody>
+                  <a:tcPr marL="9525" marR="9525" marT="9525" marB="9525" anchor="ctr"/>
+                </a:tc>
+                <a:tc>
+                  <a:txBody>
+                    <a:bodyPr/>
+                    <a:lstStyle/>
+                    <a:p>
+                      <a:pPr>
+                        <a:lnSpc>
+                          <a:spcPct val="115000"/>
+                        </a:lnSpc>
+                        <a:spcAft>
+                          <a:spcPts val="1000"/>
+                        </a:spcAft>
+                        <a:buNone/>
+                      </a:pPr>
+                      <a:r>
+                        <a:rPr lang="en-IN" sz="1100">
+                          <a:effectLst/>
+                        </a:rPr>
+                        <a:t>Can become verbose and expensive</a:t>
+                      </a:r>
+                      <a:endParaRPr lang="en-IN" sz="1100">
+                        <a:effectLst/>
+                        <a:latin typeface="Calibri" panose="020F0502020204030204" pitchFamily="34" charset="0"/>
+                        <a:ea typeface="Calibri" panose="020F0502020204030204" pitchFamily="34" charset="0"/>
+                        <a:cs typeface="Times New Roman" panose="02020603050405020304" pitchFamily="18" charset="0"/>
+                      </a:endParaRPr>
+                    </a:p>
+                  </a:txBody>
+                  <a:tcPr marL="9525" marR="9525" marT="9525" marB="9525" anchor="ctr"/>
+                </a:tc>
+                <a:extLst>
+                  <a:ext uri="{0D108BD9-81ED-4DB2-BD59-A6C34878D82A}">
+                    <a16:rowId xmlns:a16="http://schemas.microsoft.com/office/drawing/2014/main" val="3036649350"/>
+                  </a:ext>
+                </a:extLst>
+              </a:tr>
+              <a:tr h="1081787">
+                <a:tc>
+                  <a:txBody>
+                    <a:bodyPr/>
+                    <a:lstStyle/>
+                    <a:p>
+                      <a:pPr>
+                        <a:lnSpc>
+                          <a:spcPct val="115000"/>
+                        </a:lnSpc>
+                        <a:spcAft>
+                          <a:spcPts val="1000"/>
+                        </a:spcAft>
+                        <a:buNone/>
+                      </a:pPr>
+                      <a:r>
+                        <a:rPr lang="en-IN" sz="1100">
+                          <a:effectLst/>
+                        </a:rPr>
+                        <a:t>CoT</a:t>
+                      </a:r>
+                      <a:endParaRPr lang="en-IN" sz="1100">
+                        <a:effectLst/>
+                        <a:latin typeface="Calibri" panose="020F0502020204030204" pitchFamily="34" charset="0"/>
+                        <a:ea typeface="Calibri" panose="020F0502020204030204" pitchFamily="34" charset="0"/>
+                        <a:cs typeface="Times New Roman" panose="02020603050405020304" pitchFamily="18" charset="0"/>
+                      </a:endParaRPr>
+                    </a:p>
+                  </a:txBody>
+                  <a:tcPr marL="9525" marR="9525" marT="9525" marB="9525" anchor="ctr"/>
+                </a:tc>
+                <a:tc>
+                  <a:txBody>
+                    <a:bodyPr/>
+                    <a:lstStyle/>
+                    <a:p>
+                      <a:pPr>
+                        <a:lnSpc>
+                          <a:spcPct val="115000"/>
+                        </a:lnSpc>
+                        <a:spcAft>
+                          <a:spcPts val="1000"/>
+                        </a:spcAft>
+                        <a:buNone/>
+                      </a:pPr>
+                      <a:r>
+                        <a:rPr lang="en-IN" sz="1100">
+                          <a:effectLst/>
+                        </a:rPr>
+                        <a:t>Chain of Thought</a:t>
+                      </a:r>
+                      <a:endParaRPr lang="en-IN" sz="1100">
+                        <a:effectLst/>
+                        <a:latin typeface="Calibri" panose="020F0502020204030204" pitchFamily="34" charset="0"/>
+                        <a:ea typeface="Calibri" panose="020F0502020204030204" pitchFamily="34" charset="0"/>
+                        <a:cs typeface="Times New Roman" panose="02020603050405020304" pitchFamily="18" charset="0"/>
+                      </a:endParaRPr>
+                    </a:p>
+                  </a:txBody>
+                  <a:tcPr marL="9525" marR="9525" marT="9525" marB="9525" anchor="ctr"/>
+                </a:tc>
+                <a:tc>
+                  <a:txBody>
+                    <a:bodyPr/>
+                    <a:lstStyle/>
+                    <a:p>
+                      <a:pPr>
+                        <a:lnSpc>
+                          <a:spcPct val="115000"/>
+                        </a:lnSpc>
+                        <a:spcAft>
+                          <a:spcPts val="1000"/>
+                        </a:spcAft>
+                        <a:buNone/>
+                      </a:pPr>
+                      <a:r>
+                        <a:rPr lang="en-IN" sz="1100">
+                          <a:effectLst/>
+                        </a:rPr>
+                        <a:t>Step-by-step reasoning before answering</a:t>
+                      </a:r>
+                      <a:endParaRPr lang="en-IN" sz="1100">
+                        <a:effectLst/>
+                        <a:latin typeface="Calibri" panose="020F0502020204030204" pitchFamily="34" charset="0"/>
+                        <a:ea typeface="Calibri" panose="020F0502020204030204" pitchFamily="34" charset="0"/>
+                        <a:cs typeface="Times New Roman" panose="02020603050405020304" pitchFamily="18" charset="0"/>
+                      </a:endParaRPr>
+                    </a:p>
+                  </a:txBody>
+                  <a:tcPr marL="9525" marR="9525" marT="9525" marB="9525" anchor="ctr"/>
+                </a:tc>
+                <a:tc>
+                  <a:txBody>
+                    <a:bodyPr/>
+                    <a:lstStyle/>
+                    <a:p>
+                      <a:pPr>
+                        <a:lnSpc>
+                          <a:spcPct val="115000"/>
+                        </a:lnSpc>
+                        <a:spcAft>
+                          <a:spcPts val="1000"/>
+                        </a:spcAft>
+                        <a:buNone/>
+                      </a:pPr>
+                      <a:r>
+                        <a:rPr lang="en-IN" sz="1100">
+                          <a:effectLst/>
+                        </a:rPr>
+                        <a:t>Breaks problem into reasoning steps</a:t>
+                      </a:r>
+                      <a:endParaRPr lang="en-IN" sz="1100">
+                        <a:effectLst/>
+                        <a:latin typeface="Calibri" panose="020F0502020204030204" pitchFamily="34" charset="0"/>
+                        <a:ea typeface="Calibri" panose="020F0502020204030204" pitchFamily="34" charset="0"/>
+                        <a:cs typeface="Times New Roman" panose="02020603050405020304" pitchFamily="18" charset="0"/>
+                      </a:endParaRPr>
+                    </a:p>
+                  </a:txBody>
+                  <a:tcPr marL="9525" marR="9525" marT="9525" marB="9525" anchor="ctr"/>
+                </a:tc>
+                <a:tc>
+                  <a:txBody>
+                    <a:bodyPr/>
+                    <a:lstStyle/>
+                    <a:p>
+                      <a:pPr>
+                        <a:lnSpc>
+                          <a:spcPct val="115000"/>
+                        </a:lnSpc>
+                        <a:spcAft>
+                          <a:spcPts val="1000"/>
+                        </a:spcAft>
+                        <a:buNone/>
+                      </a:pPr>
+                      <a:r>
+                        <a:rPr lang="en-IN" sz="1100">
+                          <a:effectLst/>
+                        </a:rPr>
+                        <a:t>Math, logic, coding, explanations</a:t>
+                      </a:r>
+                      <a:endParaRPr lang="en-IN" sz="1100">
+                        <a:effectLst/>
+                        <a:latin typeface="Calibri" panose="020F0502020204030204" pitchFamily="34" charset="0"/>
+                        <a:ea typeface="Calibri" panose="020F0502020204030204" pitchFamily="34" charset="0"/>
+                        <a:cs typeface="Times New Roman" panose="02020603050405020304" pitchFamily="18" charset="0"/>
+                      </a:endParaRPr>
+                    </a:p>
+                  </a:txBody>
+                  <a:tcPr marL="9525" marR="9525" marT="9525" marB="9525" anchor="ctr"/>
+                </a:tc>
+                <a:tc>
+                  <a:txBody>
+                    <a:bodyPr/>
+                    <a:lstStyle/>
+                    <a:p>
+                      <a:pPr>
+                        <a:lnSpc>
+                          <a:spcPct val="115000"/>
+                        </a:lnSpc>
+                        <a:spcAft>
+                          <a:spcPts val="1000"/>
+                        </a:spcAft>
+                        <a:buNone/>
+                      </a:pPr>
+                      <a:r>
+                        <a:rPr lang="en-IN" sz="1100">
+                          <a:effectLst/>
+                        </a:rPr>
+                        <a:t>Improves reasoning accuracy</a:t>
+                      </a:r>
+                      <a:endParaRPr lang="en-IN" sz="1100">
+                        <a:effectLst/>
+                        <a:latin typeface="Calibri" panose="020F0502020204030204" pitchFamily="34" charset="0"/>
+                        <a:ea typeface="Calibri" panose="020F0502020204030204" pitchFamily="34" charset="0"/>
+                        <a:cs typeface="Times New Roman" panose="02020603050405020304" pitchFamily="18" charset="0"/>
+                      </a:endParaRPr>
+                    </a:p>
+                  </a:txBody>
+                  <a:tcPr marL="9525" marR="9525" marT="9525" marB="9525" anchor="ctr"/>
+                </a:tc>
+                <a:tc>
+                  <a:txBody>
+                    <a:bodyPr/>
+                    <a:lstStyle/>
+                    <a:p>
+                      <a:pPr>
+                        <a:lnSpc>
+                          <a:spcPct val="115000"/>
+                        </a:lnSpc>
+                        <a:spcAft>
+                          <a:spcPts val="1000"/>
+                        </a:spcAft>
+                        <a:buNone/>
+                      </a:pPr>
+                      <a:r>
+                        <a:rPr lang="en-IN" sz="1100">
+                          <a:effectLst/>
+                        </a:rPr>
+                        <a:t>No self-correction</a:t>
+                      </a:r>
+                      <a:endParaRPr lang="en-IN" sz="1100">
+                        <a:effectLst/>
+                        <a:latin typeface="Calibri" panose="020F0502020204030204" pitchFamily="34" charset="0"/>
+                        <a:ea typeface="Calibri" panose="020F0502020204030204" pitchFamily="34" charset="0"/>
+                        <a:cs typeface="Times New Roman" panose="02020603050405020304" pitchFamily="18" charset="0"/>
+                      </a:endParaRPr>
+                    </a:p>
+                  </a:txBody>
+                  <a:tcPr marL="9525" marR="9525" marT="9525" marB="9525" anchor="ctr"/>
+                </a:tc>
+                <a:extLst>
+                  <a:ext uri="{0D108BD9-81ED-4DB2-BD59-A6C34878D82A}">
+                    <a16:rowId xmlns:a16="http://schemas.microsoft.com/office/drawing/2014/main" val="4050275502"/>
+                  </a:ext>
+                </a:extLst>
+              </a:tr>
+              <a:tr h="1081787">
+                <a:tc>
+                  <a:txBody>
+                    <a:bodyPr/>
+                    <a:lstStyle/>
+                    <a:p>
+                      <a:pPr>
+                        <a:lnSpc>
+                          <a:spcPct val="115000"/>
+                        </a:lnSpc>
+                        <a:spcAft>
+                          <a:spcPts val="1000"/>
+                        </a:spcAft>
+                        <a:buNone/>
+                      </a:pPr>
+                      <a:r>
+                        <a:rPr lang="en-IN" sz="1100" dirty="0">
+                          <a:effectLst/>
+                        </a:rPr>
+                        <a:t>Reflection Pattern</a:t>
+                      </a:r>
+                      <a:endParaRPr lang="en-IN" sz="1100" dirty="0">
+                        <a:effectLst/>
+                        <a:latin typeface="Calibri" panose="020F0502020204030204" pitchFamily="34" charset="0"/>
+                        <a:ea typeface="Calibri" panose="020F0502020204030204" pitchFamily="34" charset="0"/>
+                        <a:cs typeface="Times New Roman" panose="02020603050405020304" pitchFamily="18" charset="0"/>
+                      </a:endParaRPr>
+                    </a:p>
+                  </a:txBody>
+                  <a:tcPr marL="9525" marR="9525" marT="9525" marB="9525" anchor="ctr"/>
+                </a:tc>
+                <a:tc>
+                  <a:txBody>
+                    <a:bodyPr/>
+                    <a:lstStyle/>
+                    <a:p>
+                      <a:pPr>
+                        <a:lnSpc>
+                          <a:spcPct val="115000"/>
+                        </a:lnSpc>
+                        <a:spcAft>
+                          <a:spcPts val="1000"/>
+                        </a:spcAft>
+                        <a:buNone/>
+                      </a:pPr>
+                      <a:r>
+                        <a:rPr lang="en-IN" sz="1100">
+                          <a:effectLst/>
+                        </a:rPr>
+                        <a:t>Self-review and improve answer iteratively</a:t>
+                      </a:r>
+                      <a:endParaRPr lang="en-IN" sz="1100">
+                        <a:effectLst/>
+                        <a:latin typeface="Calibri" panose="020F0502020204030204" pitchFamily="34" charset="0"/>
+                        <a:ea typeface="Calibri" panose="020F0502020204030204" pitchFamily="34" charset="0"/>
+                        <a:cs typeface="Times New Roman" panose="02020603050405020304" pitchFamily="18" charset="0"/>
+                      </a:endParaRPr>
+                    </a:p>
+                  </a:txBody>
+                  <a:tcPr marL="9525" marR="9525" marT="9525" marB="9525" anchor="ctr"/>
+                </a:tc>
+                <a:tc>
+                  <a:txBody>
+                    <a:bodyPr/>
+                    <a:lstStyle/>
+                    <a:p>
+                      <a:pPr>
+                        <a:lnSpc>
+                          <a:spcPct val="115000"/>
+                        </a:lnSpc>
+                        <a:spcAft>
+                          <a:spcPts val="1000"/>
+                        </a:spcAft>
+                        <a:buNone/>
+                      </a:pPr>
+                      <a:r>
+                        <a:rPr lang="en-IN" sz="1100">
+                          <a:effectLst/>
+                        </a:rPr>
+                        <a:t>Generate → Reflect → Revise</a:t>
+                      </a:r>
+                      <a:endParaRPr lang="en-IN" sz="1100">
+                        <a:effectLst/>
+                        <a:latin typeface="Calibri" panose="020F0502020204030204" pitchFamily="34" charset="0"/>
+                        <a:ea typeface="Calibri" panose="020F0502020204030204" pitchFamily="34" charset="0"/>
+                        <a:cs typeface="Times New Roman" panose="02020603050405020304" pitchFamily="18" charset="0"/>
+                      </a:endParaRPr>
+                    </a:p>
+                  </a:txBody>
+                  <a:tcPr marL="9525" marR="9525" marT="9525" marB="9525" anchor="ctr"/>
+                </a:tc>
+                <a:tc>
+                  <a:txBody>
+                    <a:bodyPr/>
+                    <a:lstStyle/>
+                    <a:p>
+                      <a:pPr>
+                        <a:lnSpc>
+                          <a:spcPct val="115000"/>
+                        </a:lnSpc>
+                        <a:spcAft>
+                          <a:spcPts val="1000"/>
+                        </a:spcAft>
+                        <a:buNone/>
+                      </a:pPr>
+                      <a:r>
+                        <a:rPr lang="en-IN" sz="1100">
+                          <a:effectLst/>
+                        </a:rPr>
+                        <a:t>Complex reasoning, planning, coding</a:t>
+                      </a:r>
+                      <a:endParaRPr lang="en-IN" sz="1100">
+                        <a:effectLst/>
+                        <a:latin typeface="Calibri" panose="020F0502020204030204" pitchFamily="34" charset="0"/>
+                        <a:ea typeface="Calibri" panose="020F0502020204030204" pitchFamily="34" charset="0"/>
+                        <a:cs typeface="Times New Roman" panose="02020603050405020304" pitchFamily="18" charset="0"/>
+                      </a:endParaRPr>
+                    </a:p>
+                  </a:txBody>
+                  <a:tcPr marL="9525" marR="9525" marT="9525" marB="9525" anchor="ctr"/>
+                </a:tc>
+                <a:tc>
+                  <a:txBody>
+                    <a:bodyPr/>
+                    <a:lstStyle/>
+                    <a:p>
+                      <a:pPr>
+                        <a:lnSpc>
+                          <a:spcPct val="115000"/>
+                        </a:lnSpc>
+                        <a:spcAft>
+                          <a:spcPts val="1000"/>
+                        </a:spcAft>
+                        <a:buNone/>
+                      </a:pPr>
+                      <a:r>
+                        <a:rPr lang="en-IN" sz="1100">
+                          <a:effectLst/>
+                        </a:rPr>
+                        <a:t>Better quality and fewer mistakes</a:t>
+                      </a:r>
+                      <a:endParaRPr lang="en-IN" sz="1100">
+                        <a:effectLst/>
+                        <a:latin typeface="Calibri" panose="020F0502020204030204" pitchFamily="34" charset="0"/>
+                        <a:ea typeface="Calibri" panose="020F0502020204030204" pitchFamily="34" charset="0"/>
+                        <a:cs typeface="Times New Roman" panose="02020603050405020304" pitchFamily="18" charset="0"/>
+                      </a:endParaRPr>
+                    </a:p>
+                  </a:txBody>
+                  <a:tcPr marL="9525" marR="9525" marT="9525" marB="9525" anchor="ctr"/>
+                </a:tc>
+                <a:tc>
+                  <a:txBody>
+                    <a:bodyPr/>
+                    <a:lstStyle/>
+                    <a:p>
+                      <a:pPr>
+                        <a:lnSpc>
+                          <a:spcPct val="115000"/>
+                        </a:lnSpc>
+                        <a:spcAft>
+                          <a:spcPts val="1000"/>
+                        </a:spcAft>
+                        <a:buNone/>
+                      </a:pPr>
+                      <a:r>
+                        <a:rPr lang="en-IN" sz="1100">
+                          <a:effectLst/>
+                        </a:rPr>
+                        <a:t>Slower and more token usage</a:t>
+                      </a:r>
+                      <a:endParaRPr lang="en-IN" sz="1100">
+                        <a:effectLst/>
+                        <a:latin typeface="Calibri" panose="020F0502020204030204" pitchFamily="34" charset="0"/>
+                        <a:ea typeface="Calibri" panose="020F0502020204030204" pitchFamily="34" charset="0"/>
+                        <a:cs typeface="Times New Roman" panose="02020603050405020304" pitchFamily="18" charset="0"/>
+                      </a:endParaRPr>
+                    </a:p>
+                  </a:txBody>
+                  <a:tcPr marL="9525" marR="9525" marT="9525" marB="9525" anchor="ctr"/>
+                </a:tc>
+                <a:tc>
+                  <a:txBody>
+                    <a:bodyPr/>
+                    <a:lstStyle/>
+                    <a:p>
+                      <a:pPr>
+                        <a:lnSpc>
+                          <a:spcPct val="115000"/>
+                        </a:lnSpc>
+                        <a:buNone/>
+                      </a:pPr>
+                      <a:endParaRPr lang="en-IN" sz="1100">
+                        <a:effectLst/>
+                        <a:latin typeface="Calibri" panose="020F0502020204030204" pitchFamily="34" charset="0"/>
+                        <a:cs typeface="Times New Roman" panose="02020603050405020304" pitchFamily="18" charset="0"/>
+                      </a:endParaRPr>
+                    </a:p>
+                  </a:txBody>
+                  <a:tcPr marL="9525" marR="9525" marT="9525" marB="9525" anchor="ctr"/>
+                </a:tc>
+                <a:extLst>
+                  <a:ext uri="{0D108BD9-81ED-4DB2-BD59-A6C34878D82A}">
+                    <a16:rowId xmlns:a16="http://schemas.microsoft.com/office/drawing/2014/main" val="3377631161"/>
+                  </a:ext>
+                </a:extLst>
+              </a:tr>
+              <a:tr h="1081787">
+                <a:tc>
+                  <a:txBody>
+                    <a:bodyPr/>
+                    <a:lstStyle/>
+                    <a:p>
+                      <a:pPr>
+                        <a:lnSpc>
+                          <a:spcPct val="115000"/>
+                        </a:lnSpc>
+                        <a:spcAft>
+                          <a:spcPts val="1000"/>
+                        </a:spcAft>
+                        <a:buNone/>
+                      </a:pPr>
+                      <a:r>
+                        <a:rPr lang="en-IN" sz="1100">
+                          <a:effectLst/>
+                        </a:rPr>
+                        <a:t>Self-Critique Pattern</a:t>
+                      </a:r>
+                      <a:endParaRPr lang="en-IN" sz="1100">
+                        <a:effectLst/>
+                        <a:latin typeface="Calibri" panose="020F0502020204030204" pitchFamily="34" charset="0"/>
+                        <a:ea typeface="Calibri" panose="020F0502020204030204" pitchFamily="34" charset="0"/>
+                        <a:cs typeface="Times New Roman" panose="02020603050405020304" pitchFamily="18" charset="0"/>
+                      </a:endParaRPr>
+                    </a:p>
+                  </a:txBody>
+                  <a:tcPr marL="9525" marR="9525" marT="9525" marB="9525" anchor="ctr"/>
+                </a:tc>
+                <a:tc>
+                  <a:txBody>
+                    <a:bodyPr/>
+                    <a:lstStyle/>
+                    <a:p>
+                      <a:pPr>
+                        <a:lnSpc>
+                          <a:spcPct val="115000"/>
+                        </a:lnSpc>
+                        <a:spcAft>
+                          <a:spcPts val="1000"/>
+                        </a:spcAft>
+                        <a:buNone/>
+                      </a:pPr>
+                      <a:r>
+                        <a:rPr lang="en-IN" sz="1100">
+                          <a:effectLst/>
+                        </a:rPr>
+                        <a:t>Explicitly criticize own output</a:t>
+                      </a:r>
+                      <a:endParaRPr lang="en-IN" sz="1100">
+                        <a:effectLst/>
+                        <a:latin typeface="Calibri" panose="020F0502020204030204" pitchFamily="34" charset="0"/>
+                        <a:ea typeface="Calibri" panose="020F0502020204030204" pitchFamily="34" charset="0"/>
+                        <a:cs typeface="Times New Roman" panose="02020603050405020304" pitchFamily="18" charset="0"/>
+                      </a:endParaRPr>
+                    </a:p>
+                  </a:txBody>
+                  <a:tcPr marL="9525" marR="9525" marT="9525" marB="9525" anchor="ctr"/>
+                </a:tc>
+                <a:tc>
+                  <a:txBody>
+                    <a:bodyPr/>
+                    <a:lstStyle/>
+                    <a:p>
+                      <a:pPr>
+                        <a:lnSpc>
+                          <a:spcPct val="115000"/>
+                        </a:lnSpc>
+                        <a:spcAft>
+                          <a:spcPts val="1000"/>
+                        </a:spcAft>
+                        <a:buNone/>
+                      </a:pPr>
+                      <a:r>
+                        <a:rPr lang="en-IN" sz="1100">
+                          <a:effectLst/>
+                        </a:rPr>
+                        <a:t>Generate → Critique → Fix</a:t>
+                      </a:r>
+                      <a:endParaRPr lang="en-IN" sz="1100">
+                        <a:effectLst/>
+                        <a:latin typeface="Calibri" panose="020F0502020204030204" pitchFamily="34" charset="0"/>
+                        <a:ea typeface="Calibri" panose="020F0502020204030204" pitchFamily="34" charset="0"/>
+                        <a:cs typeface="Times New Roman" panose="02020603050405020304" pitchFamily="18" charset="0"/>
+                      </a:endParaRPr>
+                    </a:p>
+                  </a:txBody>
+                  <a:tcPr marL="9525" marR="9525" marT="9525" marB="9525" anchor="ctr"/>
+                </a:tc>
+                <a:tc>
+                  <a:txBody>
+                    <a:bodyPr/>
+                    <a:lstStyle/>
+                    <a:p>
+                      <a:pPr>
+                        <a:lnSpc>
+                          <a:spcPct val="115000"/>
+                        </a:lnSpc>
+                        <a:spcAft>
+                          <a:spcPts val="1000"/>
+                        </a:spcAft>
+                        <a:buNone/>
+                      </a:pPr>
+                      <a:r>
+                        <a:rPr lang="en-IN" sz="1100">
+                          <a:effectLst/>
+                        </a:rPr>
+                        <a:t>Writing, debugging, evaluation</a:t>
+                      </a:r>
+                      <a:endParaRPr lang="en-IN" sz="1100">
+                        <a:effectLst/>
+                        <a:latin typeface="Calibri" panose="020F0502020204030204" pitchFamily="34" charset="0"/>
+                        <a:ea typeface="Calibri" panose="020F0502020204030204" pitchFamily="34" charset="0"/>
+                        <a:cs typeface="Times New Roman" panose="02020603050405020304" pitchFamily="18" charset="0"/>
+                      </a:endParaRPr>
+                    </a:p>
+                  </a:txBody>
+                  <a:tcPr marL="9525" marR="9525" marT="9525" marB="9525" anchor="ctr"/>
+                </a:tc>
+                <a:tc>
+                  <a:txBody>
+                    <a:bodyPr/>
+                    <a:lstStyle/>
+                    <a:p>
+                      <a:pPr>
+                        <a:lnSpc>
+                          <a:spcPct val="115000"/>
+                        </a:lnSpc>
+                        <a:spcAft>
+                          <a:spcPts val="1000"/>
+                        </a:spcAft>
+                        <a:buNone/>
+                      </a:pPr>
+                      <a:r>
+                        <a:rPr lang="en-IN" sz="1100">
+                          <a:effectLst/>
+                        </a:rPr>
+                        <a:t>Good for refinement and error detection</a:t>
+                      </a:r>
+                      <a:endParaRPr lang="en-IN" sz="1100">
+                        <a:effectLst/>
+                        <a:latin typeface="Calibri" panose="020F0502020204030204" pitchFamily="34" charset="0"/>
+                        <a:ea typeface="Calibri" panose="020F0502020204030204" pitchFamily="34" charset="0"/>
+                        <a:cs typeface="Times New Roman" panose="02020603050405020304" pitchFamily="18" charset="0"/>
+                      </a:endParaRPr>
+                    </a:p>
+                  </a:txBody>
+                  <a:tcPr marL="9525" marR="9525" marT="9525" marB="9525" anchor="ctr"/>
+                </a:tc>
+                <a:tc>
+                  <a:txBody>
+                    <a:bodyPr/>
+                    <a:lstStyle/>
+                    <a:p>
+                      <a:pPr>
+                        <a:lnSpc>
+                          <a:spcPct val="115000"/>
+                        </a:lnSpc>
+                        <a:spcAft>
+                          <a:spcPts val="1000"/>
+                        </a:spcAft>
+                        <a:buNone/>
+                      </a:pPr>
+                      <a:r>
+                        <a:rPr lang="en-IN" sz="1100">
+                          <a:effectLst/>
+                        </a:rPr>
+                        <a:t>May over-correct or hallucinate critiques</a:t>
+                      </a:r>
+                      <a:endParaRPr lang="en-IN" sz="1100">
+                        <a:effectLst/>
+                        <a:latin typeface="Calibri" panose="020F0502020204030204" pitchFamily="34" charset="0"/>
+                        <a:ea typeface="Calibri" panose="020F0502020204030204" pitchFamily="34" charset="0"/>
+                        <a:cs typeface="Times New Roman" panose="02020603050405020304" pitchFamily="18" charset="0"/>
+                      </a:endParaRPr>
+                    </a:p>
+                  </a:txBody>
+                  <a:tcPr marL="9525" marR="9525" marT="9525" marB="9525" anchor="ctr"/>
+                </a:tc>
+                <a:tc>
+                  <a:txBody>
+                    <a:bodyPr/>
+                    <a:lstStyle/>
+                    <a:p>
+                      <a:pPr>
+                        <a:lnSpc>
+                          <a:spcPct val="115000"/>
+                        </a:lnSpc>
+                        <a:buNone/>
+                      </a:pPr>
+                      <a:endParaRPr lang="en-IN" sz="1100" dirty="0">
+                        <a:effectLst/>
+                        <a:latin typeface="Calibri" panose="020F0502020204030204" pitchFamily="34" charset="0"/>
+                        <a:cs typeface="Times New Roman" panose="02020603050405020304" pitchFamily="18" charset="0"/>
+                      </a:endParaRPr>
+                    </a:p>
+                  </a:txBody>
+                  <a:tcPr marL="9525" marR="9525" marT="9525" marB="9525" anchor="ctr"/>
+                </a:tc>
+                <a:extLst>
+                  <a:ext uri="{0D108BD9-81ED-4DB2-BD59-A6C34878D82A}">
+                    <a16:rowId xmlns:a16="http://schemas.microsoft.com/office/drawing/2014/main" val="2684313313"/>
+                  </a:ext>
+                </a:extLst>
+              </a:tr>
+            </a:tbl>
+          </a:graphicData>
+        </a:graphic>
+      </p:graphicFrame>
+    </p:spTree>
+    <p:extLst>
+      <p:ext uri="{BB962C8B-B14F-4D97-AF65-F5344CB8AC3E}">
+        <p14:creationId xmlns:p14="http://schemas.microsoft.com/office/powerpoint/2010/main" val="3288030329"/>
+      </p:ext>
+    </p:extLst>
+  </p:cSld>
+  <p:clrMapOvr>
+    <a:masterClrMapping/>
+  </p:clrMapOvr>
+</p:sld>
+</file>
+
+<file path=ppt/slides/slide14.xml><?xml version="1.0" encoding="utf-8"?>
+<p:sld xmlns:a="http://schemas.openxmlformats.org/drawingml/2006/main" xmlns:r="http://schemas.openxmlformats.org/officeDocument/2006/relationships" xmlns:p="http://schemas.openxmlformats.org/presentationml/2006/main">
+  <p:cSld>
+    <p:spTree>
+      <p:nvGrpSpPr>
+        <p:cNvPr id="1" name=""/>
+        <p:cNvGrpSpPr/>
+        <p:nvPr/>
+      </p:nvGrpSpPr>
+      <p:grpSpPr>
+        <a:xfrm>
+          <a:off x="0" y="0"/>
+          <a:ext cx="0" cy="0"/>
+          <a:chOff x="0" y="0"/>
+          <a:chExt cx="0" cy="0"/>
+        </a:xfrm>
+      </p:grpSpPr>
+      <p:sp>
+        <p:nvSpPr>
+          <p:cNvPr id="2" name="Title 1">
+            <a:extLst>
+              <a:ext uri="{FF2B5EF4-FFF2-40B4-BE49-F238E27FC236}">
                 <a16:creationId xmlns:a16="http://schemas.microsoft.com/office/drawing/2014/main" id="{FD15DA91-D415-B9E2-1C9F-AE6DA4CD46DD}"/>
               </a:ext>
             </a:extLst>
@@ -16980,7 +18192,7 @@
 </p:sld>
 </file>
 
-<file path=ppt/slides/slide14.xml><?xml version="1.0" encoding="utf-8"?>
+<file path=ppt/slides/slide15.xml><?xml version="1.0" encoding="utf-8"?>
 <p:sld xmlns:a="http://schemas.openxmlformats.org/drawingml/2006/main" xmlns:r="http://schemas.openxmlformats.org/officeDocument/2006/relationships" xmlns:p="http://schemas.openxmlformats.org/presentationml/2006/main">
   <p:cSld>
     <p:spTree>
@@ -17067,7 +18279,1106 @@
 </p:sld>
 </file>
 
-<file path=ppt/slides/slide15.xml><?xml version="1.0" encoding="utf-8"?>
+<file path=ppt/slides/slide16.xml><?xml version="1.0" encoding="utf-8"?>
+<p:sld xmlns:a="http://schemas.openxmlformats.org/drawingml/2006/main" xmlns:r="http://schemas.openxmlformats.org/officeDocument/2006/relationships" xmlns:p="http://schemas.openxmlformats.org/presentationml/2006/main">
+  <p:cSld>
+    <p:spTree>
+      <p:nvGrpSpPr>
+        <p:cNvPr id="1" name=""/>
+        <p:cNvGrpSpPr/>
+        <p:nvPr/>
+      </p:nvGrpSpPr>
+      <p:grpSpPr>
+        <a:xfrm>
+          <a:off x="0" y="0"/>
+          <a:ext cx="0" cy="0"/>
+          <a:chOff x="0" y="0"/>
+          <a:chExt cx="0" cy="0"/>
+        </a:xfrm>
+      </p:grpSpPr>
+      <p:sp>
+        <p:nvSpPr>
+          <p:cNvPr id="2" name="Title 1">
+            <a:extLst>
+              <a:ext uri="{FF2B5EF4-FFF2-40B4-BE49-F238E27FC236}">
+                <a16:creationId xmlns:a16="http://schemas.microsoft.com/office/drawing/2014/main" id="{4E87B98C-48A5-FF37-D2BE-CB6B05CE923F}"/>
+              </a:ext>
+            </a:extLst>
+          </p:cNvPr>
+          <p:cNvSpPr>
+            <a:spLocks noGrp="1"/>
+          </p:cNvSpPr>
+          <p:nvPr>
+            <p:ph type="title"/>
+          </p:nvPr>
+        </p:nvSpPr>
+        <p:spPr/>
+        <p:txBody>
+          <a:bodyPr/>
+          <a:lstStyle/>
+          <a:p>
+            <a:r>
+              <a:rPr lang="en-US" dirty="0"/>
+              <a:t>Short VS </a:t>
+            </a:r>
+            <a:r>
+              <a:rPr lang="en-US" dirty="0" err="1"/>
+              <a:t>LONg</a:t>
+            </a:r>
+            <a:r>
+              <a:rPr lang="en-US" dirty="0"/>
+              <a:t> </a:t>
+            </a:r>
+            <a:r>
+              <a:rPr lang="en-US" dirty="0" err="1"/>
+              <a:t>MEmory</a:t>
+            </a:r>
+            <a:endParaRPr lang="en-IN" dirty="0"/>
+          </a:p>
+        </p:txBody>
+      </p:sp>
+      <p:graphicFrame>
+        <p:nvGraphicFramePr>
+          <p:cNvPr id="4" name="Content Placeholder 3">
+            <a:extLst>
+              <a:ext uri="{FF2B5EF4-FFF2-40B4-BE49-F238E27FC236}">
+                <a16:creationId xmlns:a16="http://schemas.microsoft.com/office/drawing/2014/main" id="{B48A6AA6-B593-305F-F5A7-17B712DF51EE}"/>
+              </a:ext>
+            </a:extLst>
+          </p:cNvPr>
+          <p:cNvGraphicFramePr>
+            <a:graphicFrameLocks noGrp="1"/>
+          </p:cNvGraphicFramePr>
+          <p:nvPr>
+            <p:ph idx="1"/>
+            <p:extLst>
+              <p:ext uri="{D42A27DB-BD31-4B8C-83A1-F6EECF244321}">
+                <p14:modId xmlns:p14="http://schemas.microsoft.com/office/powerpoint/2010/main" val="2062513678"/>
+              </p:ext>
+            </p:extLst>
+          </p:nvPr>
+        </p:nvGraphicFramePr>
+        <p:xfrm>
+          <a:off x="768350" y="2362200"/>
+          <a:ext cx="7289799" cy="4143374"/>
+        </p:xfrm>
+        <a:graphic>
+          <a:graphicData uri="http://schemas.openxmlformats.org/drawingml/2006/table">
+            <a:tbl>
+              <a:tblPr firstRow="1" firstCol="1" bandRow="1">
+                <a:tableStyleId>{5C22544A-7EE6-4342-B048-85BDC9FD1C3A}</a:tableStyleId>
+              </a:tblPr>
+              <a:tblGrid>
+                <a:gridCol w="2429933">
+                  <a:extLst>
+                    <a:ext uri="{9D8B030D-6E8A-4147-A177-3AD203B41FA5}">
+                      <a16:colId xmlns:a16="http://schemas.microsoft.com/office/drawing/2014/main" val="3032793387"/>
+                    </a:ext>
+                  </a:extLst>
+                </a:gridCol>
+                <a:gridCol w="2429933">
+                  <a:extLst>
+                    <a:ext uri="{9D8B030D-6E8A-4147-A177-3AD203B41FA5}">
+                      <a16:colId xmlns:a16="http://schemas.microsoft.com/office/drawing/2014/main" val="2759780470"/>
+                    </a:ext>
+                  </a:extLst>
+                </a:gridCol>
+                <a:gridCol w="2429933">
+                  <a:extLst>
+                    <a:ext uri="{9D8B030D-6E8A-4147-A177-3AD203B41FA5}">
+                      <a16:colId xmlns:a16="http://schemas.microsoft.com/office/drawing/2014/main" val="3169929029"/>
+                    </a:ext>
+                  </a:extLst>
+                </a:gridCol>
+              </a:tblGrid>
+              <a:tr h="321497">
+                <a:tc>
+                  <a:txBody>
+                    <a:bodyPr/>
+                    <a:lstStyle/>
+                    <a:p>
+                      <a:pPr>
+                        <a:lnSpc>
+                          <a:spcPct val="115000"/>
+                        </a:lnSpc>
+                        <a:spcAft>
+                          <a:spcPts val="1000"/>
+                        </a:spcAft>
+                        <a:buNone/>
+                      </a:pPr>
+                      <a:r>
+                        <a:rPr lang="en-IN" sz="1100">
+                          <a:effectLst/>
+                        </a:rPr>
+                        <a:t>Feature</a:t>
+                      </a:r>
+                      <a:endParaRPr lang="en-IN" sz="1100">
+                        <a:effectLst/>
+                        <a:latin typeface="Calibri" panose="020F0502020204030204" pitchFamily="34" charset="0"/>
+                        <a:ea typeface="Calibri" panose="020F0502020204030204" pitchFamily="34" charset="0"/>
+                        <a:cs typeface="Times New Roman" panose="02020603050405020304" pitchFamily="18" charset="0"/>
+                      </a:endParaRPr>
+                    </a:p>
+                  </a:txBody>
+                  <a:tcPr marL="9525" marR="9525" marT="9525" marB="9525" anchor="ctr"/>
+                </a:tc>
+                <a:tc>
+                  <a:txBody>
+                    <a:bodyPr/>
+                    <a:lstStyle/>
+                    <a:p>
+                      <a:pPr>
+                        <a:lnSpc>
+                          <a:spcPct val="115000"/>
+                        </a:lnSpc>
+                        <a:spcAft>
+                          <a:spcPts val="1000"/>
+                        </a:spcAft>
+                        <a:buNone/>
+                      </a:pPr>
+                      <a:r>
+                        <a:rPr lang="en-IN" sz="1100">
+                          <a:effectLst/>
+                        </a:rPr>
+                        <a:t>Short-Term Memory (STM)</a:t>
+                      </a:r>
+                      <a:endParaRPr lang="en-IN" sz="1100">
+                        <a:effectLst/>
+                        <a:latin typeface="Calibri" panose="020F0502020204030204" pitchFamily="34" charset="0"/>
+                        <a:ea typeface="Calibri" panose="020F0502020204030204" pitchFamily="34" charset="0"/>
+                        <a:cs typeface="Times New Roman" panose="02020603050405020304" pitchFamily="18" charset="0"/>
+                      </a:endParaRPr>
+                    </a:p>
+                  </a:txBody>
+                  <a:tcPr marL="9525" marR="9525" marT="9525" marB="9525" anchor="ctr"/>
+                </a:tc>
+                <a:tc>
+                  <a:txBody>
+                    <a:bodyPr/>
+                    <a:lstStyle/>
+                    <a:p>
+                      <a:pPr>
+                        <a:lnSpc>
+                          <a:spcPct val="115000"/>
+                        </a:lnSpc>
+                        <a:spcAft>
+                          <a:spcPts val="1000"/>
+                        </a:spcAft>
+                        <a:buNone/>
+                      </a:pPr>
+                      <a:r>
+                        <a:rPr lang="en-IN" sz="1100">
+                          <a:effectLst/>
+                        </a:rPr>
+                        <a:t>Long-Term Memory (LTM)</a:t>
+                      </a:r>
+                      <a:endParaRPr lang="en-IN" sz="1100">
+                        <a:effectLst/>
+                        <a:latin typeface="Calibri" panose="020F0502020204030204" pitchFamily="34" charset="0"/>
+                        <a:ea typeface="Calibri" panose="020F0502020204030204" pitchFamily="34" charset="0"/>
+                        <a:cs typeface="Times New Roman" panose="02020603050405020304" pitchFamily="18" charset="0"/>
+                      </a:endParaRPr>
+                    </a:p>
+                  </a:txBody>
+                  <a:tcPr marL="9525" marR="9525" marT="9525" marB="9525" anchor="ctr"/>
+                </a:tc>
+                <a:extLst>
+                  <a:ext uri="{0D108BD9-81ED-4DB2-BD59-A6C34878D82A}">
+                    <a16:rowId xmlns:a16="http://schemas.microsoft.com/office/drawing/2014/main" val="3668435616"/>
+                  </a:ext>
+                </a:extLst>
+              </a:tr>
+              <a:tr h="630965">
+                <a:tc>
+                  <a:txBody>
+                    <a:bodyPr/>
+                    <a:lstStyle/>
+                    <a:p>
+                      <a:pPr>
+                        <a:lnSpc>
+                          <a:spcPct val="115000"/>
+                        </a:lnSpc>
+                        <a:spcAft>
+                          <a:spcPts val="1000"/>
+                        </a:spcAft>
+                        <a:buNone/>
+                      </a:pPr>
+                      <a:r>
+                        <a:rPr lang="en-IN" sz="1100">
+                          <a:effectLst/>
+                        </a:rPr>
+                        <a:t>Definition</a:t>
+                      </a:r>
+                      <a:endParaRPr lang="en-IN" sz="1100">
+                        <a:effectLst/>
+                        <a:latin typeface="Calibri" panose="020F0502020204030204" pitchFamily="34" charset="0"/>
+                        <a:ea typeface="Calibri" panose="020F0502020204030204" pitchFamily="34" charset="0"/>
+                        <a:cs typeface="Times New Roman" panose="02020603050405020304" pitchFamily="18" charset="0"/>
+                      </a:endParaRPr>
+                    </a:p>
+                  </a:txBody>
+                  <a:tcPr marL="9525" marR="9525" marT="9525" marB="9525" anchor="ctr"/>
+                </a:tc>
+                <a:tc>
+                  <a:txBody>
+                    <a:bodyPr/>
+                    <a:lstStyle/>
+                    <a:p>
+                      <a:pPr>
+                        <a:lnSpc>
+                          <a:spcPct val="115000"/>
+                        </a:lnSpc>
+                        <a:spcAft>
+                          <a:spcPts val="1000"/>
+                        </a:spcAft>
+                        <a:buNone/>
+                      </a:pPr>
+                      <a:r>
+                        <a:rPr lang="en-IN" sz="1100">
+                          <a:effectLst/>
+                        </a:rPr>
+                        <a:t>Temporary storage of information for immediate use</a:t>
+                      </a:r>
+                      <a:endParaRPr lang="en-IN" sz="1100">
+                        <a:effectLst/>
+                        <a:latin typeface="Calibri" panose="020F0502020204030204" pitchFamily="34" charset="0"/>
+                        <a:ea typeface="Calibri" panose="020F0502020204030204" pitchFamily="34" charset="0"/>
+                        <a:cs typeface="Times New Roman" panose="02020603050405020304" pitchFamily="18" charset="0"/>
+                      </a:endParaRPr>
+                    </a:p>
+                  </a:txBody>
+                  <a:tcPr marL="9525" marR="9525" marT="9525" marB="9525" anchor="ctr"/>
+                </a:tc>
+                <a:tc>
+                  <a:txBody>
+                    <a:bodyPr/>
+                    <a:lstStyle/>
+                    <a:p>
+                      <a:pPr>
+                        <a:lnSpc>
+                          <a:spcPct val="115000"/>
+                        </a:lnSpc>
+                        <a:spcAft>
+                          <a:spcPts val="1000"/>
+                        </a:spcAft>
+                        <a:buNone/>
+                      </a:pPr>
+                      <a:r>
+                        <a:rPr lang="en-IN" sz="1100">
+                          <a:effectLst/>
+                        </a:rPr>
+                        <a:t>Permanent or semi-permanent storage of information</a:t>
+                      </a:r>
+                      <a:endParaRPr lang="en-IN" sz="1100">
+                        <a:effectLst/>
+                        <a:latin typeface="Calibri" panose="020F0502020204030204" pitchFamily="34" charset="0"/>
+                        <a:ea typeface="Calibri" panose="020F0502020204030204" pitchFamily="34" charset="0"/>
+                        <a:cs typeface="Times New Roman" panose="02020603050405020304" pitchFamily="18" charset="0"/>
+                      </a:endParaRPr>
+                    </a:p>
+                  </a:txBody>
+                  <a:tcPr marL="9525" marR="9525" marT="9525" marB="9525" anchor="ctr"/>
+                </a:tc>
+                <a:extLst>
+                  <a:ext uri="{0D108BD9-81ED-4DB2-BD59-A6C34878D82A}">
+                    <a16:rowId xmlns:a16="http://schemas.microsoft.com/office/drawing/2014/main" val="668064818"/>
+                  </a:ext>
+                </a:extLst>
+              </a:tr>
+              <a:tr h="321497">
+                <a:tc>
+                  <a:txBody>
+                    <a:bodyPr/>
+                    <a:lstStyle/>
+                    <a:p>
+                      <a:pPr>
+                        <a:lnSpc>
+                          <a:spcPct val="115000"/>
+                        </a:lnSpc>
+                        <a:spcAft>
+                          <a:spcPts val="1000"/>
+                        </a:spcAft>
+                        <a:buNone/>
+                      </a:pPr>
+                      <a:r>
+                        <a:rPr lang="en-IN" sz="1100">
+                          <a:effectLst/>
+                        </a:rPr>
+                        <a:t>Duration</a:t>
+                      </a:r>
+                      <a:endParaRPr lang="en-IN" sz="1100">
+                        <a:effectLst/>
+                        <a:latin typeface="Calibri" panose="020F0502020204030204" pitchFamily="34" charset="0"/>
+                        <a:ea typeface="Calibri" panose="020F0502020204030204" pitchFamily="34" charset="0"/>
+                        <a:cs typeface="Times New Roman" panose="02020603050405020304" pitchFamily="18" charset="0"/>
+                      </a:endParaRPr>
+                    </a:p>
+                  </a:txBody>
+                  <a:tcPr marL="9525" marR="9525" marT="9525" marB="9525" anchor="ctr"/>
+                </a:tc>
+                <a:tc>
+                  <a:txBody>
+                    <a:bodyPr/>
+                    <a:lstStyle/>
+                    <a:p>
+                      <a:pPr>
+                        <a:lnSpc>
+                          <a:spcPct val="115000"/>
+                        </a:lnSpc>
+                        <a:spcAft>
+                          <a:spcPts val="1000"/>
+                        </a:spcAft>
+                        <a:buNone/>
+                      </a:pPr>
+                      <a:r>
+                        <a:rPr lang="en-IN" sz="1100">
+                          <a:effectLst/>
+                        </a:rPr>
+                        <a:t>Few seconds to about 30 seconds</a:t>
+                      </a:r>
+                      <a:endParaRPr lang="en-IN" sz="1100">
+                        <a:effectLst/>
+                        <a:latin typeface="Calibri" panose="020F0502020204030204" pitchFamily="34" charset="0"/>
+                        <a:ea typeface="Calibri" panose="020F0502020204030204" pitchFamily="34" charset="0"/>
+                        <a:cs typeface="Times New Roman" panose="02020603050405020304" pitchFamily="18" charset="0"/>
+                      </a:endParaRPr>
+                    </a:p>
+                  </a:txBody>
+                  <a:tcPr marL="9525" marR="9525" marT="9525" marB="9525" anchor="ctr"/>
+                </a:tc>
+                <a:tc>
+                  <a:txBody>
+                    <a:bodyPr/>
+                    <a:lstStyle/>
+                    <a:p>
+                      <a:pPr>
+                        <a:lnSpc>
+                          <a:spcPct val="115000"/>
+                        </a:lnSpc>
+                        <a:spcAft>
+                          <a:spcPts val="1000"/>
+                        </a:spcAft>
+                        <a:buNone/>
+                      </a:pPr>
+                      <a:r>
+                        <a:rPr lang="en-IN" sz="1100">
+                          <a:effectLst/>
+                        </a:rPr>
+                        <a:t>Minutes to lifetime</a:t>
+                      </a:r>
+                      <a:endParaRPr lang="en-IN" sz="1100">
+                        <a:effectLst/>
+                        <a:latin typeface="Calibri" panose="020F0502020204030204" pitchFamily="34" charset="0"/>
+                        <a:ea typeface="Calibri" panose="020F0502020204030204" pitchFamily="34" charset="0"/>
+                        <a:cs typeface="Times New Roman" panose="02020603050405020304" pitchFamily="18" charset="0"/>
+                      </a:endParaRPr>
+                    </a:p>
+                  </a:txBody>
+                  <a:tcPr marL="9525" marR="9525" marT="9525" marB="9525" anchor="ctr"/>
+                </a:tc>
+                <a:extLst>
+                  <a:ext uri="{0D108BD9-81ED-4DB2-BD59-A6C34878D82A}">
+                    <a16:rowId xmlns:a16="http://schemas.microsoft.com/office/drawing/2014/main" val="2013086288"/>
+                  </a:ext>
+                </a:extLst>
+              </a:tr>
+              <a:tr h="321497">
+                <a:tc>
+                  <a:txBody>
+                    <a:bodyPr/>
+                    <a:lstStyle/>
+                    <a:p>
+                      <a:pPr>
+                        <a:lnSpc>
+                          <a:spcPct val="115000"/>
+                        </a:lnSpc>
+                        <a:spcAft>
+                          <a:spcPts val="1000"/>
+                        </a:spcAft>
+                        <a:buNone/>
+                      </a:pPr>
+                      <a:r>
+                        <a:rPr lang="en-IN" sz="1100">
+                          <a:effectLst/>
+                        </a:rPr>
+                        <a:t>Capacity</a:t>
+                      </a:r>
+                      <a:endParaRPr lang="en-IN" sz="1100">
+                        <a:effectLst/>
+                        <a:latin typeface="Calibri" panose="020F0502020204030204" pitchFamily="34" charset="0"/>
+                        <a:ea typeface="Calibri" panose="020F0502020204030204" pitchFamily="34" charset="0"/>
+                        <a:cs typeface="Times New Roman" panose="02020603050405020304" pitchFamily="18" charset="0"/>
+                      </a:endParaRPr>
+                    </a:p>
+                  </a:txBody>
+                  <a:tcPr marL="9525" marR="9525" marT="9525" marB="9525" anchor="ctr"/>
+                </a:tc>
+                <a:tc>
+                  <a:txBody>
+                    <a:bodyPr/>
+                    <a:lstStyle/>
+                    <a:p>
+                      <a:pPr>
+                        <a:lnSpc>
+                          <a:spcPct val="115000"/>
+                        </a:lnSpc>
+                        <a:spcAft>
+                          <a:spcPts val="1000"/>
+                        </a:spcAft>
+                        <a:buNone/>
+                      </a:pPr>
+                      <a:r>
+                        <a:rPr lang="en-IN" sz="1100">
+                          <a:effectLst/>
+                        </a:rPr>
+                        <a:t>Limited (about 5–9 items)</a:t>
+                      </a:r>
+                      <a:endParaRPr lang="en-IN" sz="1100">
+                        <a:effectLst/>
+                        <a:latin typeface="Calibri" panose="020F0502020204030204" pitchFamily="34" charset="0"/>
+                        <a:ea typeface="Calibri" panose="020F0502020204030204" pitchFamily="34" charset="0"/>
+                        <a:cs typeface="Times New Roman" panose="02020603050405020304" pitchFamily="18" charset="0"/>
+                      </a:endParaRPr>
+                    </a:p>
+                  </a:txBody>
+                  <a:tcPr marL="9525" marR="9525" marT="9525" marB="9525" anchor="ctr"/>
+                </a:tc>
+                <a:tc>
+                  <a:txBody>
+                    <a:bodyPr/>
+                    <a:lstStyle/>
+                    <a:p>
+                      <a:pPr>
+                        <a:lnSpc>
+                          <a:spcPct val="115000"/>
+                        </a:lnSpc>
+                        <a:spcAft>
+                          <a:spcPts val="1000"/>
+                        </a:spcAft>
+                        <a:buNone/>
+                      </a:pPr>
+                      <a:r>
+                        <a:rPr lang="en-IN" sz="1100">
+                          <a:effectLst/>
+                        </a:rPr>
+                        <a:t>Virtually unlimited</a:t>
+                      </a:r>
+                      <a:endParaRPr lang="en-IN" sz="1100">
+                        <a:effectLst/>
+                        <a:latin typeface="Calibri" panose="020F0502020204030204" pitchFamily="34" charset="0"/>
+                        <a:ea typeface="Calibri" panose="020F0502020204030204" pitchFamily="34" charset="0"/>
+                        <a:cs typeface="Times New Roman" panose="02020603050405020304" pitchFamily="18" charset="0"/>
+                      </a:endParaRPr>
+                    </a:p>
+                  </a:txBody>
+                  <a:tcPr marL="9525" marR="9525" marT="9525" marB="9525" anchor="ctr"/>
+                </a:tc>
+                <a:extLst>
+                  <a:ext uri="{0D108BD9-81ED-4DB2-BD59-A6C34878D82A}">
+                    <a16:rowId xmlns:a16="http://schemas.microsoft.com/office/drawing/2014/main" val="2234127157"/>
+                  </a:ext>
+                </a:extLst>
+              </a:tr>
+              <a:tr h="630965">
+                <a:tc>
+                  <a:txBody>
+                    <a:bodyPr/>
+                    <a:lstStyle/>
+                    <a:p>
+                      <a:pPr>
+                        <a:lnSpc>
+                          <a:spcPct val="115000"/>
+                        </a:lnSpc>
+                        <a:spcAft>
+                          <a:spcPts val="1000"/>
+                        </a:spcAft>
+                        <a:buNone/>
+                      </a:pPr>
+                      <a:r>
+                        <a:rPr lang="en-IN" sz="1100">
+                          <a:effectLst/>
+                        </a:rPr>
+                        <a:t>Purpose</a:t>
+                      </a:r>
+                      <a:endParaRPr lang="en-IN" sz="1100">
+                        <a:effectLst/>
+                        <a:latin typeface="Calibri" panose="020F0502020204030204" pitchFamily="34" charset="0"/>
+                        <a:ea typeface="Calibri" panose="020F0502020204030204" pitchFamily="34" charset="0"/>
+                        <a:cs typeface="Times New Roman" panose="02020603050405020304" pitchFamily="18" charset="0"/>
+                      </a:endParaRPr>
+                    </a:p>
+                  </a:txBody>
+                  <a:tcPr marL="9525" marR="9525" marT="9525" marB="9525" anchor="ctr"/>
+                </a:tc>
+                <a:tc>
+                  <a:txBody>
+                    <a:bodyPr/>
+                    <a:lstStyle/>
+                    <a:p>
+                      <a:pPr>
+                        <a:lnSpc>
+                          <a:spcPct val="115000"/>
+                        </a:lnSpc>
+                        <a:spcAft>
+                          <a:spcPts val="1000"/>
+                        </a:spcAft>
+                        <a:buNone/>
+                      </a:pPr>
+                      <a:r>
+                        <a:rPr lang="en-IN" sz="1100">
+                          <a:effectLst/>
+                        </a:rPr>
+                        <a:t>Holds information briefly while performing tasks</a:t>
+                      </a:r>
+                      <a:endParaRPr lang="en-IN" sz="1100">
+                        <a:effectLst/>
+                        <a:latin typeface="Calibri" panose="020F0502020204030204" pitchFamily="34" charset="0"/>
+                        <a:ea typeface="Calibri" panose="020F0502020204030204" pitchFamily="34" charset="0"/>
+                        <a:cs typeface="Times New Roman" panose="02020603050405020304" pitchFamily="18" charset="0"/>
+                      </a:endParaRPr>
+                    </a:p>
+                  </a:txBody>
+                  <a:tcPr marL="9525" marR="9525" marT="9525" marB="9525" anchor="ctr"/>
+                </a:tc>
+                <a:tc>
+                  <a:txBody>
+                    <a:bodyPr/>
+                    <a:lstStyle/>
+                    <a:p>
+                      <a:pPr>
+                        <a:lnSpc>
+                          <a:spcPct val="115000"/>
+                        </a:lnSpc>
+                        <a:spcAft>
+                          <a:spcPts val="1000"/>
+                        </a:spcAft>
+                        <a:buNone/>
+                      </a:pPr>
+                      <a:r>
+                        <a:rPr lang="en-IN" sz="1100">
+                          <a:effectLst/>
+                        </a:rPr>
+                        <a:t>Stores knowledge, experiences, and skills</a:t>
+                      </a:r>
+                      <a:endParaRPr lang="en-IN" sz="1100">
+                        <a:effectLst/>
+                        <a:latin typeface="Calibri" panose="020F0502020204030204" pitchFamily="34" charset="0"/>
+                        <a:ea typeface="Calibri" panose="020F0502020204030204" pitchFamily="34" charset="0"/>
+                        <a:cs typeface="Times New Roman" panose="02020603050405020304" pitchFamily="18" charset="0"/>
+                      </a:endParaRPr>
+                    </a:p>
+                  </a:txBody>
+                  <a:tcPr marL="9525" marR="9525" marT="9525" marB="9525" anchor="ctr"/>
+                </a:tc>
+                <a:extLst>
+                  <a:ext uri="{0D108BD9-81ED-4DB2-BD59-A6C34878D82A}">
+                    <a16:rowId xmlns:a16="http://schemas.microsoft.com/office/drawing/2014/main" val="3690696219"/>
+                  </a:ext>
+                </a:extLst>
+              </a:tr>
+              <a:tr h="321497">
+                <a:tc>
+                  <a:txBody>
+                    <a:bodyPr/>
+                    <a:lstStyle/>
+                    <a:p>
+                      <a:pPr>
+                        <a:lnSpc>
+                          <a:spcPct val="115000"/>
+                        </a:lnSpc>
+                        <a:spcAft>
+                          <a:spcPts val="1000"/>
+                        </a:spcAft>
+                        <a:buNone/>
+                      </a:pPr>
+                      <a:r>
+                        <a:rPr lang="en-IN" sz="1100">
+                          <a:effectLst/>
+                        </a:rPr>
+                        <a:t>Example</a:t>
+                      </a:r>
+                      <a:endParaRPr lang="en-IN" sz="1100">
+                        <a:effectLst/>
+                        <a:latin typeface="Calibri" panose="020F0502020204030204" pitchFamily="34" charset="0"/>
+                        <a:ea typeface="Calibri" panose="020F0502020204030204" pitchFamily="34" charset="0"/>
+                        <a:cs typeface="Times New Roman" panose="02020603050405020304" pitchFamily="18" charset="0"/>
+                      </a:endParaRPr>
+                    </a:p>
+                  </a:txBody>
+                  <a:tcPr marL="9525" marR="9525" marT="9525" marB="9525" anchor="ctr"/>
+                </a:tc>
+                <a:tc>
+                  <a:txBody>
+                    <a:bodyPr/>
+                    <a:lstStyle/>
+                    <a:p>
+                      <a:pPr>
+                        <a:lnSpc>
+                          <a:spcPct val="115000"/>
+                        </a:lnSpc>
+                        <a:spcAft>
+                          <a:spcPts val="1000"/>
+                        </a:spcAft>
+                        <a:buNone/>
+                      </a:pPr>
+                      <a:r>
+                        <a:rPr lang="en-IN" sz="1100">
+                          <a:effectLst/>
+                        </a:rPr>
+                        <a:t>Remembering a phone number briefly</a:t>
+                      </a:r>
+                      <a:endParaRPr lang="en-IN" sz="1100">
+                        <a:effectLst/>
+                        <a:latin typeface="Calibri" panose="020F0502020204030204" pitchFamily="34" charset="0"/>
+                        <a:ea typeface="Calibri" panose="020F0502020204030204" pitchFamily="34" charset="0"/>
+                        <a:cs typeface="Times New Roman" panose="02020603050405020304" pitchFamily="18" charset="0"/>
+                      </a:endParaRPr>
+                    </a:p>
+                  </a:txBody>
+                  <a:tcPr marL="9525" marR="9525" marT="9525" marB="9525" anchor="ctr"/>
+                </a:tc>
+                <a:tc>
+                  <a:txBody>
+                    <a:bodyPr/>
+                    <a:lstStyle/>
+                    <a:p>
+                      <a:pPr>
+                        <a:lnSpc>
+                          <a:spcPct val="115000"/>
+                        </a:lnSpc>
+                        <a:spcAft>
+                          <a:spcPts val="1000"/>
+                        </a:spcAft>
+                        <a:buNone/>
+                      </a:pPr>
+                      <a:r>
+                        <a:rPr lang="en-IN" sz="1100">
+                          <a:effectLst/>
+                        </a:rPr>
+                        <a:t>Remembering your childhood home</a:t>
+                      </a:r>
+                      <a:endParaRPr lang="en-IN" sz="1100">
+                        <a:effectLst/>
+                        <a:latin typeface="Calibri" panose="020F0502020204030204" pitchFamily="34" charset="0"/>
+                        <a:ea typeface="Calibri" panose="020F0502020204030204" pitchFamily="34" charset="0"/>
+                        <a:cs typeface="Times New Roman" panose="02020603050405020304" pitchFamily="18" charset="0"/>
+                      </a:endParaRPr>
+                    </a:p>
+                  </a:txBody>
+                  <a:tcPr marL="9525" marR="9525" marT="9525" marB="9525" anchor="ctr"/>
+                </a:tc>
+                <a:extLst>
+                  <a:ext uri="{0D108BD9-81ED-4DB2-BD59-A6C34878D82A}">
+                    <a16:rowId xmlns:a16="http://schemas.microsoft.com/office/drawing/2014/main" val="1186732903"/>
+                  </a:ext>
+                </a:extLst>
+              </a:tr>
+              <a:tr h="321497">
+                <a:tc>
+                  <a:txBody>
+                    <a:bodyPr/>
+                    <a:lstStyle/>
+                    <a:p>
+                      <a:pPr>
+                        <a:lnSpc>
+                          <a:spcPct val="115000"/>
+                        </a:lnSpc>
+                        <a:spcAft>
+                          <a:spcPts val="1000"/>
+                        </a:spcAft>
+                        <a:buNone/>
+                      </a:pPr>
+                      <a:r>
+                        <a:rPr lang="en-IN" sz="1100">
+                          <a:effectLst/>
+                        </a:rPr>
+                        <a:t>Encoding</a:t>
+                      </a:r>
+                      <a:endParaRPr lang="en-IN" sz="1100">
+                        <a:effectLst/>
+                        <a:latin typeface="Calibri" panose="020F0502020204030204" pitchFamily="34" charset="0"/>
+                        <a:ea typeface="Calibri" panose="020F0502020204030204" pitchFamily="34" charset="0"/>
+                        <a:cs typeface="Times New Roman" panose="02020603050405020304" pitchFamily="18" charset="0"/>
+                      </a:endParaRPr>
+                    </a:p>
+                  </a:txBody>
+                  <a:tcPr marL="9525" marR="9525" marT="9525" marB="9525" anchor="ctr"/>
+                </a:tc>
+                <a:tc>
+                  <a:txBody>
+                    <a:bodyPr/>
+                    <a:lstStyle/>
+                    <a:p>
+                      <a:pPr>
+                        <a:lnSpc>
+                          <a:spcPct val="115000"/>
+                        </a:lnSpc>
+                        <a:spcAft>
+                          <a:spcPts val="1000"/>
+                        </a:spcAft>
+                        <a:buNone/>
+                      </a:pPr>
+                      <a:r>
+                        <a:rPr lang="en-IN" sz="1100">
+                          <a:effectLst/>
+                        </a:rPr>
+                        <a:t>Mainly acoustic or visual</a:t>
+                      </a:r>
+                      <a:endParaRPr lang="en-IN" sz="1100">
+                        <a:effectLst/>
+                        <a:latin typeface="Calibri" panose="020F0502020204030204" pitchFamily="34" charset="0"/>
+                        <a:ea typeface="Calibri" panose="020F0502020204030204" pitchFamily="34" charset="0"/>
+                        <a:cs typeface="Times New Roman" panose="02020603050405020304" pitchFamily="18" charset="0"/>
+                      </a:endParaRPr>
+                    </a:p>
+                  </a:txBody>
+                  <a:tcPr marL="9525" marR="9525" marT="9525" marB="9525" anchor="ctr"/>
+                </a:tc>
+                <a:tc>
+                  <a:txBody>
+                    <a:bodyPr/>
+                    <a:lstStyle/>
+                    <a:p>
+                      <a:pPr>
+                        <a:lnSpc>
+                          <a:spcPct val="115000"/>
+                        </a:lnSpc>
+                        <a:spcAft>
+                          <a:spcPts val="1000"/>
+                        </a:spcAft>
+                        <a:buNone/>
+                      </a:pPr>
+                      <a:r>
+                        <a:rPr lang="en-IN" sz="1100">
+                          <a:effectLst/>
+                        </a:rPr>
+                        <a:t>Mainly semantic (meaning-based)</a:t>
+                      </a:r>
+                      <a:endParaRPr lang="en-IN" sz="1100">
+                        <a:effectLst/>
+                        <a:latin typeface="Calibri" panose="020F0502020204030204" pitchFamily="34" charset="0"/>
+                        <a:ea typeface="Calibri" panose="020F0502020204030204" pitchFamily="34" charset="0"/>
+                        <a:cs typeface="Times New Roman" panose="02020603050405020304" pitchFamily="18" charset="0"/>
+                      </a:endParaRPr>
+                    </a:p>
+                  </a:txBody>
+                  <a:tcPr marL="9525" marR="9525" marT="9525" marB="9525" anchor="ctr"/>
+                </a:tc>
+                <a:extLst>
+                  <a:ext uri="{0D108BD9-81ED-4DB2-BD59-A6C34878D82A}">
+                    <a16:rowId xmlns:a16="http://schemas.microsoft.com/office/drawing/2014/main" val="3417984188"/>
+                  </a:ext>
+                </a:extLst>
+              </a:tr>
+              <a:tr h="321497">
+                <a:tc>
+                  <a:txBody>
+                    <a:bodyPr/>
+                    <a:lstStyle/>
+                    <a:p>
+                      <a:pPr>
+                        <a:lnSpc>
+                          <a:spcPct val="115000"/>
+                        </a:lnSpc>
+                        <a:spcAft>
+                          <a:spcPts val="1000"/>
+                        </a:spcAft>
+                        <a:buNone/>
+                      </a:pPr>
+                      <a:r>
+                        <a:rPr lang="en-IN" sz="1100">
+                          <a:effectLst/>
+                        </a:rPr>
+                        <a:t>Brain Areas Involved</a:t>
+                      </a:r>
+                      <a:endParaRPr lang="en-IN" sz="1100">
+                        <a:effectLst/>
+                        <a:latin typeface="Calibri" panose="020F0502020204030204" pitchFamily="34" charset="0"/>
+                        <a:ea typeface="Calibri" panose="020F0502020204030204" pitchFamily="34" charset="0"/>
+                        <a:cs typeface="Times New Roman" panose="02020603050405020304" pitchFamily="18" charset="0"/>
+                      </a:endParaRPr>
+                    </a:p>
+                  </a:txBody>
+                  <a:tcPr marL="9525" marR="9525" marT="9525" marB="9525" anchor="ctr"/>
+                </a:tc>
+                <a:tc>
+                  <a:txBody>
+                    <a:bodyPr/>
+                    <a:lstStyle/>
+                    <a:p>
+                      <a:pPr>
+                        <a:lnSpc>
+                          <a:spcPct val="115000"/>
+                        </a:lnSpc>
+                        <a:spcAft>
+                          <a:spcPts val="1000"/>
+                        </a:spcAft>
+                        <a:buNone/>
+                      </a:pPr>
+                      <a:r>
+                        <a:rPr lang="en-IN" sz="1100">
+                          <a:effectLst/>
+                        </a:rPr>
+                        <a:t>Prefrontal cortex</a:t>
+                      </a:r>
+                      <a:endParaRPr lang="en-IN" sz="1100">
+                        <a:effectLst/>
+                        <a:latin typeface="Calibri" panose="020F0502020204030204" pitchFamily="34" charset="0"/>
+                        <a:ea typeface="Calibri" panose="020F0502020204030204" pitchFamily="34" charset="0"/>
+                        <a:cs typeface="Times New Roman" panose="02020603050405020304" pitchFamily="18" charset="0"/>
+                      </a:endParaRPr>
+                    </a:p>
+                  </a:txBody>
+                  <a:tcPr marL="9525" marR="9525" marT="9525" marB="9525" anchor="ctr"/>
+                </a:tc>
+                <a:tc>
+                  <a:txBody>
+                    <a:bodyPr/>
+                    <a:lstStyle/>
+                    <a:p>
+                      <a:pPr>
+                        <a:lnSpc>
+                          <a:spcPct val="115000"/>
+                        </a:lnSpc>
+                        <a:spcAft>
+                          <a:spcPts val="1000"/>
+                        </a:spcAft>
+                        <a:buNone/>
+                      </a:pPr>
+                      <a:r>
+                        <a:rPr lang="en-IN" sz="1100">
+                          <a:effectLst/>
+                        </a:rPr>
+                        <a:t>Hippocampus and cerebral cortex</a:t>
+                      </a:r>
+                      <a:endParaRPr lang="en-IN" sz="1100">
+                        <a:effectLst/>
+                        <a:latin typeface="Calibri" panose="020F0502020204030204" pitchFamily="34" charset="0"/>
+                        <a:ea typeface="Calibri" panose="020F0502020204030204" pitchFamily="34" charset="0"/>
+                        <a:cs typeface="Times New Roman" panose="02020603050405020304" pitchFamily="18" charset="0"/>
+                      </a:endParaRPr>
+                    </a:p>
+                  </a:txBody>
+                  <a:tcPr marL="9525" marR="9525" marT="9525" marB="9525" anchor="ctr"/>
+                </a:tc>
+                <a:extLst>
+                  <a:ext uri="{0D108BD9-81ED-4DB2-BD59-A6C34878D82A}">
+                    <a16:rowId xmlns:a16="http://schemas.microsoft.com/office/drawing/2014/main" val="1347048915"/>
+                  </a:ext>
+                </a:extLst>
+              </a:tr>
+              <a:tr h="321497">
+                <a:tc>
+                  <a:txBody>
+                    <a:bodyPr/>
+                    <a:lstStyle/>
+                    <a:p>
+                      <a:pPr>
+                        <a:lnSpc>
+                          <a:spcPct val="115000"/>
+                        </a:lnSpc>
+                        <a:spcAft>
+                          <a:spcPts val="1000"/>
+                        </a:spcAft>
+                        <a:buNone/>
+                      </a:pPr>
+                      <a:r>
+                        <a:rPr lang="en-IN" sz="1100">
+                          <a:effectLst/>
+                        </a:rPr>
+                        <a:t>Forgetting</a:t>
+                      </a:r>
+                      <a:endParaRPr lang="en-IN" sz="1100">
+                        <a:effectLst/>
+                        <a:latin typeface="Calibri" panose="020F0502020204030204" pitchFamily="34" charset="0"/>
+                        <a:ea typeface="Calibri" panose="020F0502020204030204" pitchFamily="34" charset="0"/>
+                        <a:cs typeface="Times New Roman" panose="02020603050405020304" pitchFamily="18" charset="0"/>
+                      </a:endParaRPr>
+                    </a:p>
+                  </a:txBody>
+                  <a:tcPr marL="9525" marR="9525" marT="9525" marB="9525" anchor="ctr"/>
+                </a:tc>
+                <a:tc>
+                  <a:txBody>
+                    <a:bodyPr/>
+                    <a:lstStyle/>
+                    <a:p>
+                      <a:pPr>
+                        <a:lnSpc>
+                          <a:spcPct val="115000"/>
+                        </a:lnSpc>
+                        <a:spcAft>
+                          <a:spcPts val="1000"/>
+                        </a:spcAft>
+                        <a:buNone/>
+                      </a:pPr>
+                      <a:r>
+                        <a:rPr lang="en-IN" sz="1100">
+                          <a:effectLst/>
+                        </a:rPr>
+                        <a:t>Rapid if not rehearsed</a:t>
+                      </a:r>
+                      <a:endParaRPr lang="en-IN" sz="1100">
+                        <a:effectLst/>
+                        <a:latin typeface="Calibri" panose="020F0502020204030204" pitchFamily="34" charset="0"/>
+                        <a:ea typeface="Calibri" panose="020F0502020204030204" pitchFamily="34" charset="0"/>
+                        <a:cs typeface="Times New Roman" panose="02020603050405020304" pitchFamily="18" charset="0"/>
+                      </a:endParaRPr>
+                    </a:p>
+                  </a:txBody>
+                  <a:tcPr marL="9525" marR="9525" marT="9525" marB="9525" anchor="ctr"/>
+                </a:tc>
+                <a:tc>
+                  <a:txBody>
+                    <a:bodyPr/>
+                    <a:lstStyle/>
+                    <a:p>
+                      <a:pPr>
+                        <a:lnSpc>
+                          <a:spcPct val="115000"/>
+                        </a:lnSpc>
+                        <a:spcAft>
+                          <a:spcPts val="1000"/>
+                        </a:spcAft>
+                        <a:buNone/>
+                      </a:pPr>
+                      <a:r>
+                        <a:rPr lang="en-IN" sz="1100">
+                          <a:effectLst/>
+                        </a:rPr>
+                        <a:t>Slower; may persist for years</a:t>
+                      </a:r>
+                      <a:endParaRPr lang="en-IN" sz="1100">
+                        <a:effectLst/>
+                        <a:latin typeface="Calibri" panose="020F0502020204030204" pitchFamily="34" charset="0"/>
+                        <a:ea typeface="Calibri" panose="020F0502020204030204" pitchFamily="34" charset="0"/>
+                        <a:cs typeface="Times New Roman" panose="02020603050405020304" pitchFamily="18" charset="0"/>
+                      </a:endParaRPr>
+                    </a:p>
+                  </a:txBody>
+                  <a:tcPr marL="9525" marR="9525" marT="9525" marB="9525" anchor="ctr"/>
+                </a:tc>
+                <a:extLst>
+                  <a:ext uri="{0D108BD9-81ED-4DB2-BD59-A6C34878D82A}">
+                    <a16:rowId xmlns:a16="http://schemas.microsoft.com/office/drawing/2014/main" val="347673455"/>
+                  </a:ext>
+                </a:extLst>
+              </a:tr>
+              <a:tr h="630965">
+                <a:tc>
+                  <a:txBody>
+                    <a:bodyPr/>
+                    <a:lstStyle/>
+                    <a:p>
+                      <a:pPr>
+                        <a:lnSpc>
+                          <a:spcPct val="115000"/>
+                        </a:lnSpc>
+                        <a:spcAft>
+                          <a:spcPts val="1000"/>
+                        </a:spcAft>
+                        <a:buNone/>
+                      </a:pPr>
+                      <a:r>
+                        <a:rPr lang="en-IN" sz="1100">
+                          <a:effectLst/>
+                        </a:rPr>
+                        <a:t>Maintenance</a:t>
+                      </a:r>
+                      <a:endParaRPr lang="en-IN" sz="1100">
+                        <a:effectLst/>
+                        <a:latin typeface="Calibri" panose="020F0502020204030204" pitchFamily="34" charset="0"/>
+                        <a:ea typeface="Calibri" panose="020F0502020204030204" pitchFamily="34" charset="0"/>
+                        <a:cs typeface="Times New Roman" panose="02020603050405020304" pitchFamily="18" charset="0"/>
+                      </a:endParaRPr>
+                    </a:p>
+                  </a:txBody>
+                  <a:tcPr marL="9525" marR="9525" marT="9525" marB="9525" anchor="ctr"/>
+                </a:tc>
+                <a:tc>
+                  <a:txBody>
+                    <a:bodyPr/>
+                    <a:lstStyle/>
+                    <a:p>
+                      <a:pPr>
+                        <a:lnSpc>
+                          <a:spcPct val="115000"/>
+                        </a:lnSpc>
+                        <a:spcAft>
+                          <a:spcPts val="1000"/>
+                        </a:spcAft>
+                        <a:buNone/>
+                      </a:pPr>
+                      <a:r>
+                        <a:rPr lang="en-IN" sz="1100">
+                          <a:effectLst/>
+                        </a:rPr>
+                        <a:t>Requires rehearsal/repetition</a:t>
+                      </a:r>
+                      <a:endParaRPr lang="en-IN" sz="1100">
+                        <a:effectLst/>
+                        <a:latin typeface="Calibri" panose="020F0502020204030204" pitchFamily="34" charset="0"/>
+                        <a:ea typeface="Calibri" panose="020F0502020204030204" pitchFamily="34" charset="0"/>
+                        <a:cs typeface="Times New Roman" panose="02020603050405020304" pitchFamily="18" charset="0"/>
+                      </a:endParaRPr>
+                    </a:p>
+                  </a:txBody>
+                  <a:tcPr marL="9525" marR="9525" marT="9525" marB="9525" anchor="ctr"/>
+                </a:tc>
+                <a:tc>
+                  <a:txBody>
+                    <a:bodyPr/>
+                    <a:lstStyle/>
+                    <a:p>
+                      <a:pPr>
+                        <a:lnSpc>
+                          <a:spcPct val="115000"/>
+                        </a:lnSpc>
+                        <a:spcAft>
+                          <a:spcPts val="1000"/>
+                        </a:spcAft>
+                        <a:buNone/>
+                      </a:pPr>
+                      <a:r>
+                        <a:rPr lang="en-IN" sz="1100" dirty="0">
+                          <a:effectLst/>
+                        </a:rPr>
+                        <a:t>Consolidated through learning and experience</a:t>
+                      </a:r>
+                      <a:endParaRPr lang="en-IN" sz="1100" dirty="0">
+                        <a:effectLst/>
+                        <a:latin typeface="Calibri" panose="020F0502020204030204" pitchFamily="34" charset="0"/>
+                        <a:ea typeface="Calibri" panose="020F0502020204030204" pitchFamily="34" charset="0"/>
+                        <a:cs typeface="Times New Roman" panose="02020603050405020304" pitchFamily="18" charset="0"/>
+                      </a:endParaRPr>
+                    </a:p>
+                  </a:txBody>
+                  <a:tcPr marL="9525" marR="9525" marT="9525" marB="9525" anchor="ctr"/>
+                </a:tc>
+                <a:extLst>
+                  <a:ext uri="{0D108BD9-81ED-4DB2-BD59-A6C34878D82A}">
+                    <a16:rowId xmlns:a16="http://schemas.microsoft.com/office/drawing/2014/main" val="102277146"/>
+                  </a:ext>
+                </a:extLst>
+              </a:tr>
+            </a:tbl>
+          </a:graphicData>
+        </a:graphic>
+      </p:graphicFrame>
+    </p:spTree>
+    <p:extLst>
+      <p:ext uri="{BB962C8B-B14F-4D97-AF65-F5344CB8AC3E}">
+        <p14:creationId xmlns:p14="http://schemas.microsoft.com/office/powerpoint/2010/main" val="3198685092"/>
+      </p:ext>
+    </p:extLst>
+  </p:cSld>
+  <p:clrMapOvr>
+    <a:masterClrMapping/>
+  </p:clrMapOvr>
+</p:sld>
+</file>
+
+<file path=ppt/slides/slide17.xml><?xml version="1.0" encoding="utf-8"?>
 <p:sld xmlns:a="http://schemas.openxmlformats.org/drawingml/2006/main" xmlns:r="http://schemas.openxmlformats.org/officeDocument/2006/relationships" xmlns:p="http://schemas.openxmlformats.org/presentationml/2006/main">
   <p:cSld>
     <p:spTree>
@@ -17192,7 +19503,7 @@
 </p:sld>
 </file>
 
-<file path=ppt/slides/slide16.xml><?xml version="1.0" encoding="utf-8"?>
+<file path=ppt/slides/slide18.xml><?xml version="1.0" encoding="utf-8"?>
 <p:sld xmlns:a="http://schemas.openxmlformats.org/drawingml/2006/main" xmlns:r="http://schemas.openxmlformats.org/officeDocument/2006/relationships" xmlns:p="http://schemas.openxmlformats.org/presentationml/2006/main">
   <p:cSld>
     <p:spTree>
@@ -17279,7 +19590,7 @@
 </p:sld>
 </file>
 
-<file path=ppt/slides/slide17.xml><?xml version="1.0" encoding="utf-8"?>
+<file path=ppt/slides/slide19.xml><?xml version="1.0" encoding="utf-8"?>
 <p:sld xmlns:a="http://schemas.openxmlformats.org/drawingml/2006/main" xmlns:r="http://schemas.openxmlformats.org/officeDocument/2006/relationships" xmlns:p="http://schemas.openxmlformats.org/presentationml/2006/main">
   <p:cSld>
     <p:spTree>
@@ -17384,301 +19695,6 @@
         </p:txBody>
       </p:sp>
     </p:spTree>
-  </p:cSld>
-  <p:clrMapOvr>
-    <a:masterClrMapping/>
-  </p:clrMapOvr>
-</p:sld>
-</file>
-
-<file path=ppt/slides/slide18.xml><?xml version="1.0" encoding="utf-8"?>
-<p:sld xmlns:a="http://schemas.openxmlformats.org/drawingml/2006/main" xmlns:r="http://schemas.openxmlformats.org/officeDocument/2006/relationships" xmlns:p="http://schemas.openxmlformats.org/presentationml/2006/main">
-  <p:cSld>
-    <p:spTree>
-      <p:nvGrpSpPr>
-        <p:cNvPr id="1" name=""/>
-        <p:cNvGrpSpPr/>
-        <p:nvPr/>
-      </p:nvGrpSpPr>
-      <p:grpSpPr>
-        <a:xfrm>
-          <a:off x="0" y="0"/>
-          <a:ext cx="0" cy="0"/>
-          <a:chOff x="0" y="0"/>
-          <a:chExt cx="0" cy="0"/>
-        </a:xfrm>
-      </p:grpSpPr>
-      <p:sp>
-        <p:nvSpPr>
-          <p:cNvPr id="2" name="Title 1">
-            <a:extLst>
-              <a:ext uri="{FF2B5EF4-FFF2-40B4-BE49-F238E27FC236}">
-                <a16:creationId xmlns:a16="http://schemas.microsoft.com/office/drawing/2014/main" id="{59782517-9610-8244-F54E-1EF7816F60F6}"/>
-              </a:ext>
-            </a:extLst>
-          </p:cNvPr>
-          <p:cNvSpPr>
-            <a:spLocks noGrp="1"/>
-          </p:cNvSpPr>
-          <p:nvPr>
-            <p:ph type="title"/>
-          </p:nvPr>
-        </p:nvSpPr>
-        <p:spPr/>
-        <p:txBody>
-          <a:bodyPr/>
-          <a:lstStyle/>
-          <a:p>
-            <a:r>
-              <a:rPr lang="en-US" dirty="0"/>
-              <a:t>Why </a:t>
-            </a:r>
-            <a:r>
-              <a:rPr lang="en-US" dirty="0" err="1"/>
-              <a:t>LangGraph</a:t>
-            </a:r>
-            <a:r>
-              <a:rPr lang="en-US" dirty="0"/>
-              <a:t> for Data Engineering?</a:t>
-            </a:r>
-            <a:endParaRPr lang="en-IN" dirty="0"/>
-          </a:p>
-        </p:txBody>
-      </p:sp>
-      <p:sp>
-        <p:nvSpPr>
-          <p:cNvPr id="3" name="Content Placeholder 2">
-            <a:extLst>
-              <a:ext uri="{FF2B5EF4-FFF2-40B4-BE49-F238E27FC236}">
-                <a16:creationId xmlns:a16="http://schemas.microsoft.com/office/drawing/2014/main" id="{A7275153-76E7-7787-5AA5-60212563F969}"/>
-              </a:ext>
-            </a:extLst>
-          </p:cNvPr>
-          <p:cNvSpPr>
-            <a:spLocks noGrp="1"/>
-          </p:cNvSpPr>
-          <p:nvPr>
-            <p:ph idx="1"/>
-          </p:nvPr>
-        </p:nvSpPr>
-        <p:spPr/>
-        <p:txBody>
-          <a:bodyPr>
-            <a:normAutofit fontScale="92500" lnSpcReduction="20000"/>
-          </a:bodyPr>
-          <a:lstStyle/>
-          <a:p>
-            <a:r>
-              <a:rPr lang="en-US" b="1" dirty="0"/>
-              <a:t>Advantages</a:t>
-            </a:r>
-          </a:p>
-          <a:p>
-            <a:r>
-              <a:rPr lang="en-US" dirty="0"/>
-              <a:t>Deterministic workflows </a:t>
-            </a:r>
-          </a:p>
-          <a:p>
-            <a:r>
-              <a:rPr lang="en-US" dirty="0"/>
-              <a:t>Agent state management </a:t>
-            </a:r>
-          </a:p>
-          <a:p>
-            <a:r>
-              <a:rPr lang="en-US" dirty="0"/>
-              <a:t>Long-running execution </a:t>
-            </a:r>
-          </a:p>
-          <a:p>
-            <a:r>
-              <a:rPr lang="en-US" dirty="0"/>
-              <a:t>Retry handling </a:t>
-            </a:r>
-          </a:p>
-          <a:p>
-            <a:r>
-              <a:rPr lang="en-US" dirty="0"/>
-              <a:t>Error recovery </a:t>
-            </a:r>
-          </a:p>
-          <a:p>
-            <a:r>
-              <a:rPr lang="en-US" b="1" dirty="0"/>
-              <a:t>Ideal For</a:t>
-            </a:r>
-          </a:p>
-          <a:p>
-            <a:r>
-              <a:rPr lang="en-US" dirty="0"/>
-              <a:t>ETL orchestration </a:t>
-            </a:r>
-          </a:p>
-          <a:p>
-            <a:r>
-              <a:rPr lang="en-US" dirty="0"/>
-              <a:t>Autonomous monitoring </a:t>
-            </a:r>
-          </a:p>
-          <a:p>
-            <a:r>
-              <a:rPr lang="en-US" dirty="0"/>
-              <a:t>SQL review systems</a:t>
-            </a:r>
-          </a:p>
-          <a:p>
-            <a:endParaRPr lang="en-IN" dirty="0"/>
-          </a:p>
-        </p:txBody>
-      </p:sp>
-    </p:spTree>
-    <p:extLst>
-      <p:ext uri="{BB962C8B-B14F-4D97-AF65-F5344CB8AC3E}">
-        <p14:creationId xmlns:p14="http://schemas.microsoft.com/office/powerpoint/2010/main" val="3853504214"/>
-      </p:ext>
-    </p:extLst>
-  </p:cSld>
-  <p:clrMapOvr>
-    <a:masterClrMapping/>
-  </p:clrMapOvr>
-</p:sld>
-</file>
-
-<file path=ppt/slides/slide19.xml><?xml version="1.0" encoding="utf-8"?>
-<p:sld xmlns:a="http://schemas.openxmlformats.org/drawingml/2006/main" xmlns:r="http://schemas.openxmlformats.org/officeDocument/2006/relationships" xmlns:p="http://schemas.openxmlformats.org/presentationml/2006/main">
-  <p:cSld>
-    <p:spTree>
-      <p:nvGrpSpPr>
-        <p:cNvPr id="1" name=""/>
-        <p:cNvGrpSpPr/>
-        <p:nvPr/>
-      </p:nvGrpSpPr>
-      <p:grpSpPr>
-        <a:xfrm>
-          <a:off x="0" y="0"/>
-          <a:ext cx="0" cy="0"/>
-          <a:chOff x="0" y="0"/>
-          <a:chExt cx="0" cy="0"/>
-        </a:xfrm>
-      </p:grpSpPr>
-      <p:sp>
-        <p:nvSpPr>
-          <p:cNvPr id="2" name="Title 1">
-            <a:extLst>
-              <a:ext uri="{FF2B5EF4-FFF2-40B4-BE49-F238E27FC236}">
-                <a16:creationId xmlns:a16="http://schemas.microsoft.com/office/drawing/2014/main" id="{982E8416-7C74-5F45-7405-CB065CA40971}"/>
-              </a:ext>
-            </a:extLst>
-          </p:cNvPr>
-          <p:cNvSpPr>
-            <a:spLocks noGrp="1"/>
-          </p:cNvSpPr>
-          <p:nvPr>
-            <p:ph type="title"/>
-          </p:nvPr>
-        </p:nvSpPr>
-        <p:spPr/>
-        <p:txBody>
-          <a:bodyPr/>
-          <a:lstStyle/>
-          <a:p>
-            <a:r>
-              <a:rPr lang="en-IN" dirty="0" err="1"/>
-              <a:t>LangGraph</a:t>
-            </a:r>
-            <a:r>
-              <a:rPr lang="en-IN" dirty="0"/>
-              <a:t> Components</a:t>
-            </a:r>
-          </a:p>
-        </p:txBody>
-      </p:sp>
-      <p:sp>
-        <p:nvSpPr>
-          <p:cNvPr id="3" name="Content Placeholder 2">
-            <a:extLst>
-              <a:ext uri="{FF2B5EF4-FFF2-40B4-BE49-F238E27FC236}">
-                <a16:creationId xmlns:a16="http://schemas.microsoft.com/office/drawing/2014/main" id="{26D25B9D-B198-BCF3-FA60-954ADDD3C384}"/>
-              </a:ext>
-            </a:extLst>
-          </p:cNvPr>
-          <p:cNvSpPr>
-            <a:spLocks noGrp="1"/>
-          </p:cNvSpPr>
-          <p:nvPr>
-            <p:ph idx="1"/>
-          </p:nvPr>
-        </p:nvSpPr>
-        <p:spPr/>
-        <p:txBody>
-          <a:bodyPr/>
-          <a:lstStyle/>
-          <a:p>
-            <a:r>
-              <a:rPr lang="en-US" b="1" dirty="0"/>
-              <a:t>Core Concepts</a:t>
-            </a:r>
-          </a:p>
-          <a:p>
-            <a:r>
-              <a:rPr lang="en-US" b="1" dirty="0"/>
-              <a:t>Nodes</a:t>
-            </a:r>
-          </a:p>
-          <a:p>
-            <a:r>
-              <a:rPr lang="en-US" dirty="0"/>
-              <a:t>Execution steps</a:t>
-            </a:r>
-          </a:p>
-          <a:p>
-            <a:r>
-              <a:rPr lang="en-US" b="1" dirty="0"/>
-              <a:t>Edges</a:t>
-            </a:r>
-          </a:p>
-          <a:p>
-            <a:r>
-              <a:rPr lang="en-US" dirty="0"/>
-              <a:t>Transitions between nodes</a:t>
-            </a:r>
-          </a:p>
-          <a:p>
-            <a:r>
-              <a:rPr lang="en-US" b="1" dirty="0"/>
-              <a:t>State</a:t>
-            </a:r>
-          </a:p>
-          <a:p>
-            <a:r>
-              <a:rPr lang="en-US" dirty="0"/>
-              <a:t>Shared workflow memory</a:t>
-            </a:r>
-          </a:p>
-          <a:p>
-            <a:r>
-              <a:rPr lang="en-US" b="1" dirty="0"/>
-              <a:t>Checkpoints</a:t>
-            </a:r>
-          </a:p>
-          <a:p>
-            <a:r>
-              <a:rPr lang="en-US" dirty="0"/>
-              <a:t>Persist execution progress</a:t>
-            </a:r>
-          </a:p>
-          <a:p>
-            <a:endParaRPr lang="en-IN" dirty="0"/>
-          </a:p>
-        </p:txBody>
-      </p:sp>
-    </p:spTree>
-    <p:extLst>
-      <p:ext uri="{BB962C8B-B14F-4D97-AF65-F5344CB8AC3E}">
-        <p14:creationId xmlns:p14="http://schemas.microsoft.com/office/powerpoint/2010/main" val="151785474"/>
-      </p:ext>
-    </p:extLst>
   </p:cSld>
   <p:clrMapOvr>
     <a:masterClrMapping/>
@@ -17787,7 +19803,13 @@
       </p:grpSpPr>
       <p:sp>
         <p:nvSpPr>
-          <p:cNvPr id="2" name="Title 1"/>
+          <p:cNvPr id="2" name="Title 1">
+            <a:extLst>
+              <a:ext uri="{FF2B5EF4-FFF2-40B4-BE49-F238E27FC236}">
+                <a16:creationId xmlns:a16="http://schemas.microsoft.com/office/drawing/2014/main" id="{59782517-9610-8244-F54E-1EF7816F60F6}"/>
+              </a:ext>
+            </a:extLst>
+          </p:cNvPr>
           <p:cNvSpPr>
             <a:spLocks noGrp="1"/>
           </p:cNvSpPr>
@@ -17801,14 +19823,30 @@
           <a:lstStyle/>
           <a:p>
             <a:r>
-              <a:t>CrewAI Overview</a:t>
-            </a:r>
+              <a:rPr lang="en-US" dirty="0"/>
+              <a:t>Why </a:t>
+            </a:r>
+            <a:r>
+              <a:rPr lang="en-US" dirty="0" err="1"/>
+              <a:t>LangGraph</a:t>
+            </a:r>
+            <a:r>
+              <a:rPr lang="en-US" dirty="0"/>
+              <a:t> for Data Engineering?</a:t>
+            </a:r>
+            <a:endParaRPr lang="en-IN" dirty="0"/>
           </a:p>
         </p:txBody>
       </p:sp>
       <p:sp>
         <p:nvSpPr>
-          <p:cNvPr id="3" name="Content Placeholder 2"/>
+          <p:cNvPr id="3" name="Content Placeholder 2">
+            <a:extLst>
+              <a:ext uri="{FF2B5EF4-FFF2-40B4-BE49-F238E27FC236}">
+                <a16:creationId xmlns:a16="http://schemas.microsoft.com/office/drawing/2014/main" id="{A7275153-76E7-7787-5AA5-60212563F969}"/>
+              </a:ext>
+            </a:extLst>
+          </p:cNvPr>
           <p:cNvSpPr>
             <a:spLocks noGrp="1"/>
           </p:cNvSpPr>
@@ -17818,53 +19856,81 @@
         </p:nvSpPr>
         <p:spPr/>
         <p:txBody>
-          <a:bodyPr/>
+          <a:bodyPr>
+            <a:normAutofit fontScale="92500" lnSpcReduction="20000"/>
+          </a:bodyPr>
           <a:lstStyle/>
           <a:p>
             <a:r>
+              <a:rPr lang="en-US" b="1" dirty="0"/>
+              <a:t>Advantages</a:t>
+            </a:r>
+          </a:p>
+          <a:p>
+            <a:r>
               <a:rPr lang="en-US" dirty="0"/>
-              <a:t>Framework for role-based multi-agent collaboration.</a:t>
+              <a:t>Deterministic workflows </a:t>
+            </a:r>
+          </a:p>
+          <a:p>
+            <a:r>
+              <a:rPr lang="en-US" dirty="0"/>
+              <a:t>Agent state management </a:t>
+            </a:r>
+          </a:p>
+          <a:p>
+            <a:r>
+              <a:rPr lang="en-US" dirty="0"/>
+              <a:t>Long-running execution </a:t>
+            </a:r>
+          </a:p>
+          <a:p>
+            <a:r>
+              <a:rPr lang="en-US" dirty="0"/>
+              <a:t>Retry handling </a:t>
+            </a:r>
+          </a:p>
+          <a:p>
+            <a:r>
+              <a:rPr lang="en-US" dirty="0"/>
+              <a:t>Error recovery </a:t>
             </a:r>
           </a:p>
           <a:p>
             <a:r>
               <a:rPr lang="en-US" b="1" dirty="0"/>
-              <a:t>Key Concepts</a:t>
+              <a:t>Ideal For</a:t>
             </a:r>
           </a:p>
           <a:p>
             <a:r>
               <a:rPr lang="en-US" dirty="0"/>
-              <a:t>Agents </a:t>
+              <a:t>ETL orchestration </a:t>
             </a:r>
           </a:p>
           <a:p>
             <a:r>
               <a:rPr lang="en-US" dirty="0"/>
-              <a:t>Tasks </a:t>
+              <a:t>Autonomous monitoring </a:t>
             </a:r>
           </a:p>
           <a:p>
             <a:r>
               <a:rPr lang="en-US" dirty="0"/>
-              <a:t>Crews </a:t>
-            </a:r>
-          </a:p>
-          <a:p>
-            <a:r>
-              <a:rPr lang="en-US" dirty="0"/>
-              <a:t>Delegation </a:t>
-            </a:r>
-          </a:p>
-          <a:p>
-            <a:r>
-              <a:rPr lang="en-US" dirty="0"/>
-              <a:t>Collaboration</a:t>
-            </a:r>
+              <a:t>SQL review systems</a:t>
+            </a:r>
+          </a:p>
+          <a:p>
+            <a:endParaRPr lang="en-IN" dirty="0"/>
           </a:p>
         </p:txBody>
       </p:sp>
     </p:spTree>
+    <p:extLst>
+      <p:ext uri="{BB962C8B-B14F-4D97-AF65-F5344CB8AC3E}">
+        <p14:creationId xmlns:p14="http://schemas.microsoft.com/office/powerpoint/2010/main" val="3853504214"/>
+      </p:ext>
+    </p:extLst>
   </p:cSld>
   <p:clrMapOvr>
     <a:masterClrMapping/>
@@ -17894,7 +19960,7 @@
           <p:cNvPr id="2" name="Title 1">
             <a:extLst>
               <a:ext uri="{FF2B5EF4-FFF2-40B4-BE49-F238E27FC236}">
-                <a16:creationId xmlns:a16="http://schemas.microsoft.com/office/drawing/2014/main" id="{ED959771-40DE-D6A5-FB96-F3E3B4976778}"/>
+                <a16:creationId xmlns:a16="http://schemas.microsoft.com/office/drawing/2014/main" id="{982E8416-7C74-5F45-7405-CB065CA40971}"/>
               </a:ext>
             </a:extLst>
           </p:cNvPr>
@@ -17912,11 +19978,11 @@
           <a:p>
             <a:r>
               <a:rPr lang="en-IN" dirty="0" err="1"/>
-              <a:t>CrewAI</a:t>
+              <a:t>LangGraph</a:t>
             </a:r>
             <a:r>
               <a:rPr lang="en-IN" dirty="0"/>
-              <a:t> Use Cases</a:t>
+              <a:t> Components</a:t>
             </a:r>
           </a:p>
         </p:txBody>
@@ -17926,7 +19992,7 @@
           <p:cNvPr id="3" name="Content Placeholder 2">
             <a:extLst>
               <a:ext uri="{FF2B5EF4-FFF2-40B4-BE49-F238E27FC236}">
-                <a16:creationId xmlns:a16="http://schemas.microsoft.com/office/drawing/2014/main" id="{B7D90097-40EC-F734-0057-56061F7098C9}"/>
+                <a16:creationId xmlns:a16="http://schemas.microsoft.com/office/drawing/2014/main" id="{26D25B9D-B198-BCF3-FA60-954ADDD3C384}"/>
               </a:ext>
             </a:extLst>
           </p:cNvPr>
@@ -17943,38 +20009,56 @@
           <a:lstStyle/>
           <a:p>
             <a:r>
-              <a:rPr lang="en-IN" b="1" dirty="0"/>
-              <a:t>Data Engineering Scenarios</a:t>
-            </a:r>
-          </a:p>
-          <a:p>
-            <a:r>
-              <a:rPr lang="en-IN" dirty="0"/>
-              <a:t>Data quality agents </a:t>
-            </a:r>
-          </a:p>
-          <a:p>
-            <a:r>
-              <a:rPr lang="en-IN" dirty="0"/>
-              <a:t>Metadata extraction </a:t>
-            </a:r>
-          </a:p>
-          <a:p>
-            <a:r>
-              <a:rPr lang="en-IN" dirty="0"/>
-              <a:t>Documentation generation </a:t>
-            </a:r>
-          </a:p>
-          <a:p>
-            <a:r>
-              <a:rPr lang="en-IN" dirty="0"/>
-              <a:t>Incident investigation </a:t>
-            </a:r>
-          </a:p>
-          <a:p>
-            <a:r>
-              <a:rPr lang="en-IN" dirty="0"/>
-              <a:t>Pipeline monitoring</a:t>
+              <a:rPr lang="en-US" b="1" dirty="0"/>
+              <a:t>Core Concepts</a:t>
+            </a:r>
+          </a:p>
+          <a:p>
+            <a:r>
+              <a:rPr lang="en-US" b="1" dirty="0"/>
+              <a:t>Nodes</a:t>
+            </a:r>
+          </a:p>
+          <a:p>
+            <a:r>
+              <a:rPr lang="en-US" dirty="0"/>
+              <a:t>Execution steps</a:t>
+            </a:r>
+          </a:p>
+          <a:p>
+            <a:r>
+              <a:rPr lang="en-US" b="1" dirty="0"/>
+              <a:t>Edges</a:t>
+            </a:r>
+          </a:p>
+          <a:p>
+            <a:r>
+              <a:rPr lang="en-US" dirty="0"/>
+              <a:t>Transitions between nodes</a:t>
+            </a:r>
+          </a:p>
+          <a:p>
+            <a:r>
+              <a:rPr lang="en-US" b="1" dirty="0"/>
+              <a:t>State</a:t>
+            </a:r>
+          </a:p>
+          <a:p>
+            <a:r>
+              <a:rPr lang="en-US" dirty="0"/>
+              <a:t>Shared workflow memory</a:t>
+            </a:r>
+          </a:p>
+          <a:p>
+            <a:r>
+              <a:rPr lang="en-US" b="1" dirty="0"/>
+              <a:t>Checkpoints</a:t>
+            </a:r>
+          </a:p>
+          <a:p>
+            <a:r>
+              <a:rPr lang="en-US" dirty="0"/>
+              <a:t>Persist execution progress</a:t>
             </a:r>
           </a:p>
           <a:p>
@@ -17985,7 +20069,7 @@
     </p:spTree>
     <p:extLst>
       <p:ext uri="{BB962C8B-B14F-4D97-AF65-F5344CB8AC3E}">
-        <p14:creationId xmlns:p14="http://schemas.microsoft.com/office/powerpoint/2010/main" val="465707496"/>
+        <p14:creationId xmlns:p14="http://schemas.microsoft.com/office/powerpoint/2010/main" val="151785474"/>
       </p:ext>
     </p:extLst>
   </p:cSld>
@@ -18028,7 +20112,7 @@
           <a:lstStyle/>
           <a:p>
             <a:r>
-              <a:t>AutoGen Overview</a:t>
+              <a:t>CrewAI Overview</a:t>
             </a:r>
           </a:p>
         </p:txBody>
@@ -18049,27 +20133,44 @@
           <a:lstStyle/>
           <a:p>
             <a:r>
-              <a:t>Microsoft framework for multi-agent conversations</a:t>
-            </a:r>
-          </a:p>
-          <a:p>
-            <a:r>
-              <a:t>Agents communicate autonomously</a:t>
-            </a:r>
-          </a:p>
-          <a:p>
-            <a:r>
-              <a:t>Supports humans-in-the-loop</a:t>
-            </a:r>
-          </a:p>
-          <a:p>
-            <a:r>
-              <a:t>Useful for enterprise workflow automation</a:t>
-            </a:r>
-          </a:p>
-          <a:p>
-            <a:r>
-              <a:t>Supports coding, debugging, and task orchestration</a:t>
+              <a:rPr lang="en-US" dirty="0"/>
+              <a:t>Framework for role-based multi-agent collaboration.</a:t>
+            </a:r>
+          </a:p>
+          <a:p>
+            <a:r>
+              <a:rPr lang="en-US" b="1" dirty="0"/>
+              <a:t>Key Concepts</a:t>
+            </a:r>
+          </a:p>
+          <a:p>
+            <a:r>
+              <a:rPr lang="en-US" dirty="0"/>
+              <a:t>Agents </a:t>
+            </a:r>
+          </a:p>
+          <a:p>
+            <a:r>
+              <a:rPr lang="en-US" dirty="0"/>
+              <a:t>Tasks </a:t>
+            </a:r>
+          </a:p>
+          <a:p>
+            <a:r>
+              <a:rPr lang="en-US" dirty="0"/>
+              <a:t>Crews </a:t>
+            </a:r>
+          </a:p>
+          <a:p>
+            <a:r>
+              <a:rPr lang="en-US" dirty="0"/>
+              <a:t>Delegation </a:t>
+            </a:r>
+          </a:p>
+          <a:p>
+            <a:r>
+              <a:rPr lang="en-US" dirty="0"/>
+              <a:t>Collaboration</a:t>
             </a:r>
           </a:p>
         </p:txBody>
@@ -18101,7 +20202,13 @@
       </p:grpSpPr>
       <p:sp>
         <p:nvSpPr>
-          <p:cNvPr id="2" name="Title 1"/>
+          <p:cNvPr id="2" name="Title 1">
+            <a:extLst>
+              <a:ext uri="{FF2B5EF4-FFF2-40B4-BE49-F238E27FC236}">
+                <a16:creationId xmlns:a16="http://schemas.microsoft.com/office/drawing/2014/main" id="{ED959771-40DE-D6A5-FB96-F3E3B4976778}"/>
+              </a:ext>
+            </a:extLst>
+          </p:cNvPr>
           <p:cNvSpPr>
             <a:spLocks noGrp="1"/>
           </p:cNvSpPr>
@@ -18115,14 +20222,25 @@
           <a:lstStyle/>
           <a:p>
             <a:r>
-              <a:t>Semantic Kernel Overview</a:t>
+              <a:rPr lang="en-IN" dirty="0" err="1"/>
+              <a:t>CrewAI</a:t>
+            </a:r>
+            <a:r>
+              <a:rPr lang="en-IN" dirty="0"/>
+              <a:t> Use Cases</a:t>
             </a:r>
           </a:p>
         </p:txBody>
       </p:sp>
       <p:sp>
         <p:nvSpPr>
-          <p:cNvPr id="3" name="Content Placeholder 2"/>
+          <p:cNvPr id="3" name="Content Placeholder 2">
+            <a:extLst>
+              <a:ext uri="{FF2B5EF4-FFF2-40B4-BE49-F238E27FC236}">
+                <a16:creationId xmlns:a16="http://schemas.microsoft.com/office/drawing/2014/main" id="{B7D90097-40EC-F734-0057-56061F7098C9}"/>
+              </a:ext>
+            </a:extLst>
+          </p:cNvPr>
           <p:cNvSpPr>
             <a:spLocks noGrp="1"/>
           </p:cNvSpPr>
@@ -18136,49 +20254,51 @@
           <a:lstStyle/>
           <a:p>
             <a:r>
+              <a:rPr lang="en-IN" b="1" dirty="0"/>
+              <a:t>Data Engineering Scenarios</a:t>
+            </a:r>
+          </a:p>
+          <a:p>
+            <a:r>
               <a:rPr lang="en-IN" dirty="0"/>
-              <a:t>Microsoft enterprise orchestration SDK.</a:t>
-            </a:r>
-          </a:p>
-          <a:p>
-            <a:r>
-              <a:rPr lang="en-IN" b="1" dirty="0"/>
-              <a:t>Features</a:t>
+              <a:t>Data quality agents </a:t>
             </a:r>
           </a:p>
           <a:p>
             <a:r>
               <a:rPr lang="en-IN" dirty="0"/>
-              <a:t>Prompt orchestration </a:t>
+              <a:t>Metadata extraction </a:t>
             </a:r>
           </a:p>
           <a:p>
             <a:r>
               <a:rPr lang="en-IN" dirty="0"/>
-              <a:t>Memory plugins </a:t>
+              <a:t>Documentation generation </a:t>
             </a:r>
           </a:p>
           <a:p>
             <a:r>
               <a:rPr lang="en-IN" dirty="0"/>
-              <a:t>AI planners </a:t>
+              <a:t>Incident investigation </a:t>
             </a:r>
           </a:p>
           <a:p>
             <a:r>
               <a:rPr lang="en-IN" dirty="0"/>
-              <a:t>Enterprise integration </a:t>
-            </a:r>
-          </a:p>
-          <a:p>
-            <a:r>
-              <a:rPr lang="en-IN" dirty="0"/>
-              <a:t>Multi-model support</a:t>
-            </a:r>
+              <a:t>Pipeline monitoring</a:t>
+            </a:r>
+          </a:p>
+          <a:p>
+            <a:endParaRPr lang="en-IN" dirty="0"/>
           </a:p>
         </p:txBody>
       </p:sp>
     </p:spTree>
+    <p:extLst>
+      <p:ext uri="{BB962C8B-B14F-4D97-AF65-F5344CB8AC3E}">
+        <p14:creationId xmlns:p14="http://schemas.microsoft.com/office/powerpoint/2010/main" val="465707496"/>
+      </p:ext>
+    </p:extLst>
   </p:cSld>
   <p:clrMapOvr>
     <a:masterClrMapping/>
@@ -18219,7 +20339,7 @@
           <a:lstStyle/>
           <a:p>
             <a:r>
-              <a:t>n8n for No-Code Agent Flows</a:t>
+              <a:t>AutoGen Overview</a:t>
             </a:r>
           </a:p>
         </p:txBody>
@@ -18236,84 +20356,32 @@
         </p:nvSpPr>
         <p:spPr/>
         <p:txBody>
-          <a:bodyPr>
-            <a:normAutofit lnSpcReduction="10000"/>
-          </a:bodyPr>
+          <a:bodyPr/>
           <a:lstStyle/>
           <a:p>
             <a:r>
-              <a:rPr lang="en-US" dirty="0"/>
-              <a:t>n8n enables visual orchestration of:</a:t>
-            </a:r>
-          </a:p>
-          <a:p>
-            <a:pPr lvl="1"/>
-            <a:r>
-              <a:rPr lang="en-US" dirty="0"/>
-              <a:t>AI agents </a:t>
-            </a:r>
-          </a:p>
-          <a:p>
-            <a:pPr lvl="1"/>
-            <a:r>
-              <a:rPr lang="en-US" dirty="0"/>
-              <a:t>APIs </a:t>
-            </a:r>
-          </a:p>
-          <a:p>
-            <a:pPr lvl="1"/>
-            <a:r>
-              <a:rPr lang="en-US" dirty="0"/>
-              <a:t>Databases </a:t>
-            </a:r>
-          </a:p>
-          <a:p>
-            <a:pPr lvl="1"/>
-            <a:r>
-              <a:rPr lang="en-US" dirty="0"/>
-              <a:t>Alerts </a:t>
-            </a:r>
-          </a:p>
-          <a:p>
-            <a:pPr lvl="1"/>
-            <a:r>
-              <a:rPr lang="en-US" dirty="0"/>
-              <a:t>Schedulers</a:t>
-            </a:r>
-          </a:p>
-          <a:p>
-            <a:r>
-              <a:rPr dirty="0"/>
-              <a:t>Visual workflow automation platform</a:t>
-            </a:r>
-          </a:p>
-          <a:p>
-            <a:r>
-              <a:rPr dirty="0"/>
-              <a:t>Integrates AI agents with APIs and databases</a:t>
-            </a:r>
-          </a:p>
-          <a:p>
-            <a:r>
-              <a:rPr dirty="0"/>
-              <a:t>Useful for low-code orchestration</a:t>
-            </a:r>
-          </a:p>
-          <a:p>
-            <a:r>
-              <a:rPr dirty="0"/>
-              <a:t>Supports triggers, schedulers, and connectors</a:t>
-            </a:r>
-          </a:p>
-          <a:p>
-            <a:r>
-              <a:rPr dirty="0"/>
-              <a:t>Can integrate with Snowflake, Slack, Teams, and APIs</a:t>
-            </a:r>
-            <a:endParaRPr lang="en-US" dirty="0"/>
-          </a:p>
-          <a:p>
-            <a:endParaRPr dirty="0"/>
+              <a:t>Microsoft framework for multi-agent conversations</a:t>
+            </a:r>
+          </a:p>
+          <a:p>
+            <a:r>
+              <a:t>Agents communicate autonomously</a:t>
+            </a:r>
+          </a:p>
+          <a:p>
+            <a:r>
+              <a:t>Supports humans-in-the-loop</a:t>
+            </a:r>
+          </a:p>
+          <a:p>
+            <a:r>
+              <a:t>Useful for enterprise workflow automation</a:t>
+            </a:r>
+          </a:p>
+          <a:p>
+            <a:r>
+              <a:t>Supports coding, debugging, and task orchestration</a:t>
+            </a:r>
           </a:p>
         </p:txBody>
       </p:sp>
@@ -18344,13 +20412,7 @@
       </p:grpSpPr>
       <p:sp>
         <p:nvSpPr>
-          <p:cNvPr id="2" name="Title 1">
-            <a:extLst>
-              <a:ext uri="{FF2B5EF4-FFF2-40B4-BE49-F238E27FC236}">
-                <a16:creationId xmlns:a16="http://schemas.microsoft.com/office/drawing/2014/main" id="{7CBC30EB-C80C-7A47-8DDE-42DD5FB9FEB8}"/>
-              </a:ext>
-            </a:extLst>
-          </p:cNvPr>
+          <p:cNvPr id="2" name="Title 1"/>
           <p:cNvSpPr>
             <a:spLocks noGrp="1"/>
           </p:cNvSpPr>
@@ -18364,21 +20426,14 @@
           <a:lstStyle/>
           <a:p>
             <a:r>
-              <a:rPr lang="en-IN" dirty="0"/>
-              <a:t>Enterprise AI Agent Stack</a:t>
+              <a:t>Semantic Kernel Overview</a:t>
             </a:r>
           </a:p>
         </p:txBody>
       </p:sp>
       <p:sp>
         <p:nvSpPr>
-          <p:cNvPr id="3" name="Content Placeholder 2">
-            <a:extLst>
-              <a:ext uri="{FF2B5EF4-FFF2-40B4-BE49-F238E27FC236}">
-                <a16:creationId xmlns:a16="http://schemas.microsoft.com/office/drawing/2014/main" id="{D89CDCD3-BA00-E312-0F0A-DBD118C5E9B6}"/>
-              </a:ext>
-            </a:extLst>
-          </p:cNvPr>
+          <p:cNvPr id="3" name="Content Placeholder 2"/>
           <p:cNvSpPr>
             <a:spLocks noGrp="1"/>
           </p:cNvSpPr>
@@ -18392,63 +20447,49 @@
           <a:lstStyle/>
           <a:p>
             <a:r>
+              <a:rPr lang="en-IN" dirty="0"/>
+              <a:t>Microsoft enterprise orchestration SDK.</a:t>
+            </a:r>
+          </a:p>
+          <a:p>
+            <a:r>
               <a:rPr lang="en-IN" b="1" dirty="0"/>
-              <a:t>Typical Architecture</a:t>
+              <a:t>Features</a:t>
             </a:r>
           </a:p>
           <a:p>
             <a:r>
               <a:rPr lang="en-IN" dirty="0"/>
-              <a:t>User → API → Agent Framework → LLM → Tools → Database</a:t>
-            </a:r>
-          </a:p>
-          <a:p>
-            <a:r>
-              <a:rPr lang="en-IN" b="1" dirty="0"/>
-              <a:t>Supporting Components</a:t>
+              <a:t>Prompt orchestration </a:t>
             </a:r>
           </a:p>
           <a:p>
             <a:r>
               <a:rPr lang="en-IN" dirty="0"/>
-              <a:t>Vector DB </a:t>
+              <a:t>Memory plugins </a:t>
             </a:r>
           </a:p>
           <a:p>
             <a:r>
               <a:rPr lang="en-IN" dirty="0"/>
-              <a:t>Logging </a:t>
+              <a:t>AI planners </a:t>
             </a:r>
           </a:p>
           <a:p>
             <a:r>
               <a:rPr lang="en-IN" dirty="0"/>
-              <a:t>Monitoring </a:t>
+              <a:t>Enterprise integration </a:t>
             </a:r>
           </a:p>
           <a:p>
             <a:r>
               <a:rPr lang="en-IN" dirty="0"/>
-              <a:t>Governance </a:t>
-            </a:r>
-          </a:p>
-          <a:p>
-            <a:r>
-              <a:rPr lang="en-IN" dirty="0"/>
-              <a:t>RBAC</a:t>
-            </a:r>
-          </a:p>
-          <a:p>
-            <a:endParaRPr lang="en-IN" dirty="0"/>
+              <a:t>Multi-model support</a:t>
+            </a:r>
           </a:p>
         </p:txBody>
       </p:sp>
     </p:spTree>
-    <p:extLst>
-      <p:ext uri="{BB962C8B-B14F-4D97-AF65-F5344CB8AC3E}">
-        <p14:creationId xmlns:p14="http://schemas.microsoft.com/office/powerpoint/2010/main" val="942493749"/>
-      </p:ext>
-    </p:extLst>
   </p:cSld>
   <p:clrMapOvr>
     <a:masterClrMapping/>
@@ -18489,7 +20530,7 @@
           <a:lstStyle/>
           <a:p>
             <a:r>
-              <a:t>LangGraph SQL Review Agent – Architecture</a:t>
+              <a:t>n8n for No-Code Agent Flows</a:t>
             </a:r>
           </a:p>
         </p:txBody>
@@ -18506,32 +20547,84 @@
         </p:nvSpPr>
         <p:spPr/>
         <p:txBody>
-          <a:bodyPr/>
+          <a:bodyPr>
+            <a:normAutofit lnSpcReduction="10000"/>
+          </a:bodyPr>
           <a:lstStyle/>
           <a:p>
             <a:r>
-              <a:t>Agent 1: Generate SQL from natural language</a:t>
-            </a:r>
-          </a:p>
-          <a:p>
-            <a:r>
-              <a:t>Agent 2: Review and optimise generated SQL</a:t>
-            </a:r>
-          </a:p>
-          <a:p>
-            <a:r>
-              <a:t>Shared memory stores conversation state</a:t>
-            </a:r>
-          </a:p>
-          <a:p>
-            <a:r>
-              <a:t>Snowflake MCP server used for execution</a:t>
-            </a:r>
-          </a:p>
-          <a:p>
-            <a:r>
-              <a:t>Reasoning logs captured for observability</a:t>
-            </a:r>
+              <a:rPr lang="en-US" dirty="0"/>
+              <a:t>n8n enables visual orchestration of:</a:t>
+            </a:r>
+          </a:p>
+          <a:p>
+            <a:pPr lvl="1"/>
+            <a:r>
+              <a:rPr lang="en-US" dirty="0"/>
+              <a:t>AI agents </a:t>
+            </a:r>
+          </a:p>
+          <a:p>
+            <a:pPr lvl="1"/>
+            <a:r>
+              <a:rPr lang="en-US" dirty="0"/>
+              <a:t>APIs </a:t>
+            </a:r>
+          </a:p>
+          <a:p>
+            <a:pPr lvl="1"/>
+            <a:r>
+              <a:rPr lang="en-US" dirty="0"/>
+              <a:t>Databases </a:t>
+            </a:r>
+          </a:p>
+          <a:p>
+            <a:pPr lvl="1"/>
+            <a:r>
+              <a:rPr lang="en-US" dirty="0"/>
+              <a:t>Alerts </a:t>
+            </a:r>
+          </a:p>
+          <a:p>
+            <a:pPr lvl="1"/>
+            <a:r>
+              <a:rPr lang="en-US" dirty="0"/>
+              <a:t>Schedulers</a:t>
+            </a:r>
+          </a:p>
+          <a:p>
+            <a:r>
+              <a:rPr dirty="0"/>
+              <a:t>Visual workflow automation platform</a:t>
+            </a:r>
+          </a:p>
+          <a:p>
+            <a:r>
+              <a:rPr dirty="0"/>
+              <a:t>Integrates AI agents with APIs and databases</a:t>
+            </a:r>
+          </a:p>
+          <a:p>
+            <a:r>
+              <a:rPr dirty="0"/>
+              <a:t>Useful for low-code orchestration</a:t>
+            </a:r>
+          </a:p>
+          <a:p>
+            <a:r>
+              <a:rPr dirty="0"/>
+              <a:t>Supports triggers, schedulers, and connectors</a:t>
+            </a:r>
+          </a:p>
+          <a:p>
+            <a:r>
+              <a:rPr dirty="0"/>
+              <a:t>Can integrate with Snowflake, Slack, Teams, and APIs</a:t>
+            </a:r>
+            <a:endParaRPr lang="en-US" dirty="0"/>
+          </a:p>
+          <a:p>
+            <a:endParaRPr dirty="0"/>
           </a:p>
         </p:txBody>
       </p:sp>
@@ -18562,7 +20655,13 @@
       </p:grpSpPr>
       <p:sp>
         <p:nvSpPr>
-          <p:cNvPr id="2" name="Title 1"/>
+          <p:cNvPr id="2" name="Title 1">
+            <a:extLst>
+              <a:ext uri="{FF2B5EF4-FFF2-40B4-BE49-F238E27FC236}">
+                <a16:creationId xmlns:a16="http://schemas.microsoft.com/office/drawing/2014/main" id="{7CBC30EB-C80C-7A47-8DDE-42DD5FB9FEB8}"/>
+              </a:ext>
+            </a:extLst>
+          </p:cNvPr>
           <p:cNvSpPr>
             <a:spLocks noGrp="1"/>
           </p:cNvSpPr>
@@ -18576,14 +20675,21 @@
           <a:lstStyle/>
           <a:p>
             <a:r>
-              <a:t>Hands-On Workflow Steps</a:t>
+              <a:rPr lang="en-IN" dirty="0"/>
+              <a:t>Enterprise AI Agent Stack</a:t>
             </a:r>
           </a:p>
         </p:txBody>
       </p:sp>
       <p:sp>
         <p:nvSpPr>
-          <p:cNvPr id="3" name="Content Placeholder 2"/>
+          <p:cNvPr id="3" name="Content Placeholder 2">
+            <a:extLst>
+              <a:ext uri="{FF2B5EF4-FFF2-40B4-BE49-F238E27FC236}">
+                <a16:creationId xmlns:a16="http://schemas.microsoft.com/office/drawing/2014/main" id="{D89CDCD3-BA00-E312-0F0A-DBD118C5E9B6}"/>
+              </a:ext>
+            </a:extLst>
+          </p:cNvPr>
           <p:cNvSpPr>
             <a:spLocks noGrp="1"/>
           </p:cNvSpPr>
@@ -18597,32 +20703,63 @@
           <a:lstStyle/>
           <a:p>
             <a:r>
-              <a:t>User submits natural language request</a:t>
-            </a:r>
-          </a:p>
-          <a:p>
-            <a:r>
-              <a:t>SQL Generation Agent creates initial query</a:t>
-            </a:r>
-          </a:p>
-          <a:p>
-            <a:r>
-              <a:t>Review Agent validates syntax and optimises query</a:t>
-            </a:r>
-          </a:p>
-          <a:p>
-            <a:r>
-              <a:t>Snowflake MCP executes validated query</a:t>
-            </a:r>
-          </a:p>
-          <a:p>
-            <a:r>
-              <a:t>Logs stored for monitoring and debugging</a:t>
-            </a:r>
+              <a:rPr lang="en-IN" b="1" dirty="0"/>
+              <a:t>Typical Architecture</a:t>
+            </a:r>
+          </a:p>
+          <a:p>
+            <a:r>
+              <a:rPr lang="en-IN" dirty="0"/>
+              <a:t>User → API → Agent Framework → LLM → Tools → Database</a:t>
+            </a:r>
+          </a:p>
+          <a:p>
+            <a:r>
+              <a:rPr lang="en-IN" b="1" dirty="0"/>
+              <a:t>Supporting Components</a:t>
+            </a:r>
+          </a:p>
+          <a:p>
+            <a:r>
+              <a:rPr lang="en-IN" dirty="0"/>
+              <a:t>Vector DB </a:t>
+            </a:r>
+          </a:p>
+          <a:p>
+            <a:r>
+              <a:rPr lang="en-IN" dirty="0"/>
+              <a:t>Logging </a:t>
+            </a:r>
+          </a:p>
+          <a:p>
+            <a:r>
+              <a:rPr lang="en-IN" dirty="0"/>
+              <a:t>Monitoring </a:t>
+            </a:r>
+          </a:p>
+          <a:p>
+            <a:r>
+              <a:rPr lang="en-IN" dirty="0"/>
+              <a:t>Governance </a:t>
+            </a:r>
+          </a:p>
+          <a:p>
+            <a:r>
+              <a:rPr lang="en-IN" dirty="0"/>
+              <a:t>RBAC</a:t>
+            </a:r>
+          </a:p>
+          <a:p>
+            <a:endParaRPr lang="en-IN" dirty="0"/>
           </a:p>
         </p:txBody>
       </p:sp>
     </p:spTree>
+    <p:extLst>
+      <p:ext uri="{BB962C8B-B14F-4D97-AF65-F5344CB8AC3E}">
+        <p14:creationId xmlns:p14="http://schemas.microsoft.com/office/powerpoint/2010/main" val="942493749"/>
+      </p:ext>
+    </p:extLst>
   </p:cSld>
   <p:clrMapOvr>
     <a:masterClrMapping/>
@@ -18663,7 +20800,7 @@
           <a:lstStyle/>
           <a:p>
             <a:r>
-              <a:t>Snowflake MCP Integration</a:t>
+              <a:t>LangGraph SQL Review Agent – Architecture</a:t>
             </a:r>
           </a:p>
         </p:txBody>
@@ -18684,27 +20821,27 @@
           <a:lstStyle/>
           <a:p>
             <a:r>
-              <a:t>Connect LangGraph agents with Snowflake</a:t>
-            </a:r>
-          </a:p>
-          <a:p>
-            <a:r>
-              <a:t>Use connectors and MCP tools for execution</a:t>
-            </a:r>
-          </a:p>
-          <a:p>
-            <a:r>
-              <a:t>Secure credential handling with secrets management</a:t>
-            </a:r>
-          </a:p>
-          <a:p>
-            <a:r>
-              <a:t>Enable metadata access for schema-aware SQL generation</a:t>
-            </a:r>
-          </a:p>
-          <a:p>
-            <a:r>
-              <a:t>Track query performance and execution logs</a:t>
+              <a:t>Agent 1: Generate SQL from natural language</a:t>
+            </a:r>
+          </a:p>
+          <a:p>
+            <a:r>
+              <a:t>Agent 2: Review and optimise generated SQL</a:t>
+            </a:r>
+          </a:p>
+          <a:p>
+            <a:r>
+              <a:t>Shared memory stores conversation state</a:t>
+            </a:r>
+          </a:p>
+          <a:p>
+            <a:r>
+              <a:t>Snowflake MCP server used for execution</a:t>
+            </a:r>
+          </a:p>
+          <a:p>
+            <a:r>
+              <a:t>Reasoning logs captured for observability</a:t>
             </a:r>
           </a:p>
         </p:txBody>
@@ -18736,13 +20873,7 @@
       </p:grpSpPr>
       <p:sp>
         <p:nvSpPr>
-          <p:cNvPr id="2" name="Title 1">
-            <a:extLst>
-              <a:ext uri="{FF2B5EF4-FFF2-40B4-BE49-F238E27FC236}">
-                <a16:creationId xmlns:a16="http://schemas.microsoft.com/office/drawing/2014/main" id="{C6345F80-6502-C980-D876-0D14DC90B4D7}"/>
-              </a:ext>
-            </a:extLst>
-          </p:cNvPr>
+          <p:cNvPr id="2" name="Title 1"/>
           <p:cNvSpPr>
             <a:spLocks noGrp="1"/>
           </p:cNvSpPr>
@@ -18756,21 +20887,14 @@
           <a:lstStyle/>
           <a:p>
             <a:r>
-              <a:rPr lang="en-IN" dirty="0"/>
-              <a:t>Logging &amp; Observability</a:t>
+              <a:t>Hands-On Workflow Steps</a:t>
             </a:r>
           </a:p>
         </p:txBody>
       </p:sp>
       <p:sp>
         <p:nvSpPr>
-          <p:cNvPr id="3" name="Content Placeholder 2">
-            <a:extLst>
-              <a:ext uri="{FF2B5EF4-FFF2-40B4-BE49-F238E27FC236}">
-                <a16:creationId xmlns:a16="http://schemas.microsoft.com/office/drawing/2014/main" id="{16DDA9CF-A1B5-F378-228D-9EAD5D36CA59}"/>
-              </a:ext>
-            </a:extLst>
-          </p:cNvPr>
+          <p:cNvPr id="3" name="Content Placeholder 2"/>
           <p:cNvSpPr>
             <a:spLocks noGrp="1"/>
           </p:cNvSpPr>
@@ -18780,96 +20904,36 @@
         </p:nvSpPr>
         <p:spPr/>
         <p:txBody>
-          <a:bodyPr>
-            <a:normAutofit/>
-          </a:bodyPr>
+          <a:bodyPr/>
           <a:lstStyle/>
           <a:p>
             <a:r>
-              <a:rPr lang="en-US" b="1" dirty="0"/>
-              <a:t>What to Log?</a:t>
-            </a:r>
-          </a:p>
-          <a:p>
-            <a:pPr lvl="1"/>
-            <a:r>
-              <a:rPr lang="en-US" dirty="0"/>
-              <a:t>User prompts </a:t>
-            </a:r>
-          </a:p>
-          <a:p>
-            <a:pPr lvl="1"/>
-            <a:r>
-              <a:rPr lang="en-US" dirty="0"/>
-              <a:t>Reasoning traces </a:t>
-            </a:r>
-          </a:p>
-          <a:p>
-            <a:pPr lvl="1"/>
-            <a:r>
-              <a:rPr lang="en-US" dirty="0"/>
-              <a:t>SQL versions </a:t>
-            </a:r>
-          </a:p>
-          <a:p>
-            <a:pPr lvl="1"/>
-            <a:r>
-              <a:rPr lang="en-US" dirty="0"/>
-              <a:t>Agent decisions </a:t>
-            </a:r>
-          </a:p>
-          <a:p>
-            <a:pPr lvl="1"/>
-            <a:r>
-              <a:rPr lang="en-US" dirty="0"/>
-              <a:t>Execution results </a:t>
-            </a:r>
-          </a:p>
-          <a:p>
-            <a:r>
-              <a:rPr lang="en-US" b="1" dirty="0"/>
-              <a:t>Benefits</a:t>
-            </a:r>
-          </a:p>
-          <a:p>
-            <a:pPr lvl="1"/>
-            <a:r>
-              <a:rPr lang="en-US" dirty="0"/>
-              <a:t>Auditability </a:t>
-            </a:r>
-          </a:p>
-          <a:p>
-            <a:pPr lvl="1"/>
-            <a:r>
-              <a:rPr lang="en-US" dirty="0"/>
-              <a:t>Debugging </a:t>
-            </a:r>
-          </a:p>
-          <a:p>
-            <a:pPr lvl="1"/>
-            <a:r>
-              <a:rPr lang="en-US" dirty="0"/>
-              <a:t>Governance </a:t>
-            </a:r>
-          </a:p>
-          <a:p>
-            <a:pPr lvl="1"/>
-            <a:r>
-              <a:rPr lang="en-US" dirty="0"/>
-              <a:t>Performance monitoring</a:t>
-            </a:r>
-          </a:p>
-          <a:p>
-            <a:endParaRPr lang="en-IN" dirty="0"/>
+              <a:t>User submits natural language request</a:t>
+            </a:r>
+          </a:p>
+          <a:p>
+            <a:r>
+              <a:t>SQL Generation Agent creates initial query</a:t>
+            </a:r>
+          </a:p>
+          <a:p>
+            <a:r>
+              <a:t>Review Agent validates syntax and optimises query</a:t>
+            </a:r>
+          </a:p>
+          <a:p>
+            <a:r>
+              <a:t>Snowflake MCP executes validated query</a:t>
+            </a:r>
+          </a:p>
+          <a:p>
+            <a:r>
+              <a:t>Logs stored for monitoring and debugging</a:t>
+            </a:r>
           </a:p>
         </p:txBody>
       </p:sp>
     </p:spTree>
-    <p:extLst>
-      <p:ext uri="{BB962C8B-B14F-4D97-AF65-F5344CB8AC3E}">
-        <p14:creationId xmlns:p14="http://schemas.microsoft.com/office/powerpoint/2010/main" val="3557474462"/>
-      </p:ext>
-    </p:extLst>
   </p:cSld>
   <p:clrMapOvr>
     <a:masterClrMapping/>
@@ -19061,7 +21125,7 @@
           <a:lstStyle/>
           <a:p>
             <a:r>
-              <a:t>Reasoning and Observability</a:t>
+              <a:t>Snowflake MCP Integration</a:t>
             </a:r>
           </a:p>
         </p:txBody>
@@ -19082,27 +21146,27 @@
           <a:lstStyle/>
           <a:p>
             <a:r>
-              <a:t>Capture CoT reasoning steps</a:t>
-            </a:r>
-          </a:p>
-          <a:p>
-            <a:r>
-              <a:t>Store intermediate decisions</a:t>
-            </a:r>
-          </a:p>
-          <a:p>
-            <a:r>
-              <a:t>Use tracing frameworks for debugging</a:t>
-            </a:r>
-          </a:p>
-          <a:p>
-            <a:r>
-              <a:t>Monitor latency, retries, and failures</a:t>
-            </a:r>
-          </a:p>
-          <a:p>
-            <a:r>
-              <a:t>Improve trust and governance in AI workflows</a:t>
+              <a:t>Connect LangGraph agents with Snowflake</a:t>
+            </a:r>
+          </a:p>
+          <a:p>
+            <a:r>
+              <a:t>Use connectors and MCP tools for execution</a:t>
+            </a:r>
+          </a:p>
+          <a:p>
+            <a:r>
+              <a:t>Secure credential handling with secrets management</a:t>
+            </a:r>
+          </a:p>
+          <a:p>
+            <a:r>
+              <a:t>Enable metadata access for schema-aware SQL generation</a:t>
+            </a:r>
+          </a:p>
+          <a:p>
+            <a:r>
+              <a:t>Track query performance and execution logs</a:t>
             </a:r>
           </a:p>
         </p:txBody>
@@ -19134,7 +21198,13 @@
       </p:grpSpPr>
       <p:sp>
         <p:nvSpPr>
-          <p:cNvPr id="2" name="Title 1"/>
+          <p:cNvPr id="2" name="Title 1">
+            <a:extLst>
+              <a:ext uri="{FF2B5EF4-FFF2-40B4-BE49-F238E27FC236}">
+                <a16:creationId xmlns:a16="http://schemas.microsoft.com/office/drawing/2014/main" id="{C6345F80-6502-C980-D876-0D14DC90B4D7}"/>
+              </a:ext>
+            </a:extLst>
+          </p:cNvPr>
           <p:cNvSpPr>
             <a:spLocks noGrp="1"/>
           </p:cNvSpPr>
@@ -19148,14 +21218,21 @@
           <a:lstStyle/>
           <a:p>
             <a:r>
-              <a:t>Enterprise Use Cases</a:t>
+              <a:rPr lang="en-IN" dirty="0"/>
+              <a:t>Logging &amp; Observability</a:t>
             </a:r>
           </a:p>
         </p:txBody>
       </p:sp>
       <p:sp>
         <p:nvSpPr>
-          <p:cNvPr id="3" name="Content Placeholder 2"/>
+          <p:cNvPr id="3" name="Content Placeholder 2">
+            <a:extLst>
+              <a:ext uri="{FF2B5EF4-FFF2-40B4-BE49-F238E27FC236}">
+                <a16:creationId xmlns:a16="http://schemas.microsoft.com/office/drawing/2014/main" id="{16DDA9CF-A1B5-F378-228D-9EAD5D36CA59}"/>
+              </a:ext>
+            </a:extLst>
+          </p:cNvPr>
           <p:cNvSpPr>
             <a:spLocks noGrp="1"/>
           </p:cNvSpPr>
@@ -19165,36 +21242,96 @@
         </p:nvSpPr>
         <p:spPr/>
         <p:txBody>
-          <a:bodyPr/>
+          <a:bodyPr>
+            <a:normAutofit/>
+          </a:bodyPr>
           <a:lstStyle/>
           <a:p>
             <a:r>
-              <a:t>Automated SQL optimisation</a:t>
-            </a:r>
-          </a:p>
-          <a:p>
-            <a:r>
-              <a:t>Data quality validation agents</a:t>
-            </a:r>
-          </a:p>
-          <a:p>
-            <a:r>
-              <a:t>Metadata enrichment workflows</a:t>
-            </a:r>
-          </a:p>
-          <a:p>
-            <a:r>
-              <a:t>AI-powered lineage analysis</a:t>
-            </a:r>
-          </a:p>
-          <a:p>
-            <a:r>
-              <a:t>Autonomous incident response in DE pipelines</a:t>
-            </a:r>
+              <a:rPr lang="en-US" b="1" dirty="0"/>
+              <a:t>What to Log?</a:t>
+            </a:r>
+          </a:p>
+          <a:p>
+            <a:pPr lvl="1"/>
+            <a:r>
+              <a:rPr lang="en-US" dirty="0"/>
+              <a:t>User prompts </a:t>
+            </a:r>
+          </a:p>
+          <a:p>
+            <a:pPr lvl="1"/>
+            <a:r>
+              <a:rPr lang="en-US" dirty="0"/>
+              <a:t>Reasoning traces </a:t>
+            </a:r>
+          </a:p>
+          <a:p>
+            <a:pPr lvl="1"/>
+            <a:r>
+              <a:rPr lang="en-US" dirty="0"/>
+              <a:t>SQL versions </a:t>
+            </a:r>
+          </a:p>
+          <a:p>
+            <a:pPr lvl="1"/>
+            <a:r>
+              <a:rPr lang="en-US" dirty="0"/>
+              <a:t>Agent decisions </a:t>
+            </a:r>
+          </a:p>
+          <a:p>
+            <a:pPr lvl="1"/>
+            <a:r>
+              <a:rPr lang="en-US" dirty="0"/>
+              <a:t>Execution results </a:t>
+            </a:r>
+          </a:p>
+          <a:p>
+            <a:r>
+              <a:rPr lang="en-US" b="1" dirty="0"/>
+              <a:t>Benefits</a:t>
+            </a:r>
+          </a:p>
+          <a:p>
+            <a:pPr lvl="1"/>
+            <a:r>
+              <a:rPr lang="en-US" dirty="0"/>
+              <a:t>Auditability </a:t>
+            </a:r>
+          </a:p>
+          <a:p>
+            <a:pPr lvl="1"/>
+            <a:r>
+              <a:rPr lang="en-US" dirty="0"/>
+              <a:t>Debugging </a:t>
+            </a:r>
+          </a:p>
+          <a:p>
+            <a:pPr lvl="1"/>
+            <a:r>
+              <a:rPr lang="en-US" dirty="0"/>
+              <a:t>Governance </a:t>
+            </a:r>
+          </a:p>
+          <a:p>
+            <a:pPr lvl="1"/>
+            <a:r>
+              <a:rPr lang="en-US" dirty="0"/>
+              <a:t>Performance monitoring</a:t>
+            </a:r>
+          </a:p>
+          <a:p>
+            <a:endParaRPr lang="en-IN" dirty="0"/>
           </a:p>
         </p:txBody>
       </p:sp>
     </p:spTree>
+    <p:extLst>
+      <p:ext uri="{BB962C8B-B14F-4D97-AF65-F5344CB8AC3E}">
+        <p14:creationId xmlns:p14="http://schemas.microsoft.com/office/powerpoint/2010/main" val="3557474462"/>
+      </p:ext>
+    </p:extLst>
   </p:cSld>
   <p:clrMapOvr>
     <a:masterClrMapping/>
@@ -19235,7 +21372,7 @@
           <a:lstStyle/>
           <a:p>
             <a:r>
-              <a:t>Challenges and Best Practices</a:t>
+              <a:t>Reasoning and Observability</a:t>
             </a:r>
           </a:p>
         </p:txBody>
@@ -19256,27 +21393,27 @@
           <a:lstStyle/>
           <a:p>
             <a:r>
-              <a:t>Avoid hallucinated SQL and unsafe queries</a:t>
-            </a:r>
-          </a:p>
-          <a:p>
-            <a:r>
-              <a:t>Use guardrails and validation layers</a:t>
-            </a:r>
-          </a:p>
-          <a:p>
-            <a:r>
-              <a:t>Implement RBAC and governance</a:t>
-            </a:r>
-          </a:p>
-          <a:p>
-            <a:r>
-              <a:t>Track costs and token usage</a:t>
-            </a:r>
-          </a:p>
-          <a:p>
-            <a:r>
-              <a:t>Ensure reproducibility and auditability</a:t>
+              <a:t>Capture CoT reasoning steps</a:t>
+            </a:r>
+          </a:p>
+          <a:p>
+            <a:r>
+              <a:t>Store intermediate decisions</a:t>
+            </a:r>
+          </a:p>
+          <a:p>
+            <a:r>
+              <a:t>Use tracing frameworks for debugging</a:t>
+            </a:r>
+          </a:p>
+          <a:p>
+            <a:r>
+              <a:t>Monitor latency, retries, and failures</a:t>
+            </a:r>
+          </a:p>
+          <a:p>
+            <a:r>
+              <a:t>Improve trust and governance in AI workflows</a:t>
             </a:r>
           </a:p>
         </p:txBody>
@@ -19322,7 +21459,7 @@
           <a:lstStyle/>
           <a:p>
             <a:r>
-              <a:t>Future of Agentic AI in Data Engineering</a:t>
+              <a:t>Enterprise Use Cases</a:t>
             </a:r>
           </a:p>
         </p:txBody>
@@ -19343,27 +21480,27 @@
           <a:lstStyle/>
           <a:p>
             <a:r>
-              <a:t>Autonomous pipeline remediation</a:t>
-            </a:r>
-          </a:p>
-          <a:p>
-            <a:r>
-              <a:t>Self-healing data platforms</a:t>
-            </a:r>
-          </a:p>
-          <a:p>
-            <a:r>
-              <a:t>AI-assisted governance and compliance</a:t>
-            </a:r>
-          </a:p>
-          <a:p>
-            <a:r>
-              <a:t>Collaborative multi-agent ecosystems</a:t>
-            </a:r>
-          </a:p>
-          <a:p>
-            <a:r>
-              <a:t>Integration with lakehouse and streaming architectures</a:t>
+              <a:t>Automated SQL optimisation</a:t>
+            </a:r>
+          </a:p>
+          <a:p>
+            <a:r>
+              <a:t>Data quality validation agents</a:t>
+            </a:r>
+          </a:p>
+          <a:p>
+            <a:r>
+              <a:t>Metadata enrichment workflows</a:t>
+            </a:r>
+          </a:p>
+          <a:p>
+            <a:r>
+              <a:t>AI-powered lineage analysis</a:t>
+            </a:r>
+          </a:p>
+          <a:p>
+            <a:r>
+              <a:t>Autonomous incident response in DE pipelines</a:t>
             </a:r>
           </a:p>
         </p:txBody>
@@ -19409,7 +21546,7 @@
           <a:lstStyle/>
           <a:p>
             <a:r>
-              <a:t>Lab Exercise: Build LangGraph SQL Review Agent</a:t>
+              <a:t>Challenges and Best Practices</a:t>
             </a:r>
           </a:p>
         </p:txBody>
@@ -19430,27 +21567,27 @@
           <a:lstStyle/>
           <a:p>
             <a:r>
-              <a:t>Create a 2-agent LangGraph pipeline</a:t>
-            </a:r>
-          </a:p>
-          <a:p>
-            <a:r>
-              <a:t>Generate SQL from natural language</a:t>
-            </a:r>
-          </a:p>
-          <a:p>
-            <a:r>
-              <a:t>Review and optimise SQL queries</a:t>
-            </a:r>
-          </a:p>
-          <a:p>
-            <a:r>
-              <a:t>Integrate with Snowflake MCP server</a:t>
-            </a:r>
-          </a:p>
-          <a:p>
-            <a:r>
-              <a:t>Log all reasoning and execution steps</a:t>
+              <a:t>Avoid hallucinated SQL and unsafe queries</a:t>
+            </a:r>
+          </a:p>
+          <a:p>
+            <a:r>
+              <a:t>Use guardrails and validation layers</a:t>
+            </a:r>
+          </a:p>
+          <a:p>
+            <a:r>
+              <a:t>Implement RBAC and governance</a:t>
+            </a:r>
+          </a:p>
+          <a:p>
+            <a:r>
+              <a:t>Track costs and token usage</a:t>
+            </a:r>
+          </a:p>
+          <a:p>
+            <a:r>
+              <a:t>Ensure reproducibility and auditability</a:t>
             </a:r>
           </a:p>
         </p:txBody>
@@ -19496,7 +21633,7 @@
           <a:lstStyle/>
           <a:p>
             <a:r>
-              <a:t>Suggested Folder Structure</a:t>
+              <a:t>Future of Agentic AI in Data Engineering</a:t>
             </a:r>
           </a:p>
         </p:txBody>
@@ -19517,27 +21654,27 @@
           <a:lstStyle/>
           <a:p>
             <a:r>
-              <a:t>/agents – SQL generator and reviewer agents</a:t>
-            </a:r>
-          </a:p>
-          <a:p>
-            <a:r>
-              <a:t>/tools – Snowflake connectors and MCP tools</a:t>
-            </a:r>
-          </a:p>
-          <a:p>
-            <a:r>
-              <a:t>/memory – conversation and vector storage</a:t>
-            </a:r>
-          </a:p>
-          <a:p>
-            <a:r>
-              <a:t>/logs – reasoning and execution logs</a:t>
-            </a:r>
-          </a:p>
-          <a:p>
-            <a:r>
-              <a:t>/notebooks – experimentation and demos</a:t>
+              <a:t>Autonomous pipeline remediation</a:t>
+            </a:r>
+          </a:p>
+          <a:p>
+            <a:r>
+              <a:t>Self-healing data platforms</a:t>
+            </a:r>
+          </a:p>
+          <a:p>
+            <a:r>
+              <a:t>AI-assisted governance and compliance</a:t>
+            </a:r>
+          </a:p>
+          <a:p>
+            <a:r>
+              <a:t>Collaborative multi-agent ecosystems</a:t>
+            </a:r>
+          </a:p>
+          <a:p>
+            <a:r>
+              <a:t>Integration with lakehouse and streaming architectures</a:t>
             </a:r>
           </a:p>
         </p:txBody>
@@ -19551,6 +21688,180 @@
 </file>
 
 <file path=ppt/slides/slide36.xml><?xml version="1.0" encoding="utf-8"?>
+<p:sld xmlns:a="http://schemas.openxmlformats.org/drawingml/2006/main" xmlns:r="http://schemas.openxmlformats.org/officeDocument/2006/relationships" xmlns:p="http://schemas.openxmlformats.org/presentationml/2006/main">
+  <p:cSld>
+    <p:spTree>
+      <p:nvGrpSpPr>
+        <p:cNvPr id="1" name=""/>
+        <p:cNvGrpSpPr/>
+        <p:nvPr/>
+      </p:nvGrpSpPr>
+      <p:grpSpPr>
+        <a:xfrm>
+          <a:off x="0" y="0"/>
+          <a:ext cx="0" cy="0"/>
+          <a:chOff x="0" y="0"/>
+          <a:chExt cx="0" cy="0"/>
+        </a:xfrm>
+      </p:grpSpPr>
+      <p:sp>
+        <p:nvSpPr>
+          <p:cNvPr id="2" name="Title 1"/>
+          <p:cNvSpPr>
+            <a:spLocks noGrp="1"/>
+          </p:cNvSpPr>
+          <p:nvPr>
+            <p:ph type="title"/>
+          </p:nvPr>
+        </p:nvSpPr>
+        <p:spPr/>
+        <p:txBody>
+          <a:bodyPr/>
+          <a:lstStyle/>
+          <a:p>
+            <a:r>
+              <a:t>Lab Exercise: Build LangGraph SQL Review Agent</a:t>
+            </a:r>
+          </a:p>
+        </p:txBody>
+      </p:sp>
+      <p:sp>
+        <p:nvSpPr>
+          <p:cNvPr id="3" name="Content Placeholder 2"/>
+          <p:cNvSpPr>
+            <a:spLocks noGrp="1"/>
+          </p:cNvSpPr>
+          <p:nvPr>
+            <p:ph idx="1"/>
+          </p:nvPr>
+        </p:nvSpPr>
+        <p:spPr/>
+        <p:txBody>
+          <a:bodyPr/>
+          <a:lstStyle/>
+          <a:p>
+            <a:r>
+              <a:t>Create a 2-agent LangGraph pipeline</a:t>
+            </a:r>
+          </a:p>
+          <a:p>
+            <a:r>
+              <a:t>Generate SQL from natural language</a:t>
+            </a:r>
+          </a:p>
+          <a:p>
+            <a:r>
+              <a:t>Review and optimise SQL queries</a:t>
+            </a:r>
+          </a:p>
+          <a:p>
+            <a:r>
+              <a:t>Integrate with Snowflake MCP server</a:t>
+            </a:r>
+          </a:p>
+          <a:p>
+            <a:r>
+              <a:t>Log all reasoning and execution steps</a:t>
+            </a:r>
+          </a:p>
+        </p:txBody>
+      </p:sp>
+    </p:spTree>
+  </p:cSld>
+  <p:clrMapOvr>
+    <a:masterClrMapping/>
+  </p:clrMapOvr>
+</p:sld>
+</file>
+
+<file path=ppt/slides/slide37.xml><?xml version="1.0" encoding="utf-8"?>
+<p:sld xmlns:a="http://schemas.openxmlformats.org/drawingml/2006/main" xmlns:r="http://schemas.openxmlformats.org/officeDocument/2006/relationships" xmlns:p="http://schemas.openxmlformats.org/presentationml/2006/main">
+  <p:cSld>
+    <p:spTree>
+      <p:nvGrpSpPr>
+        <p:cNvPr id="1" name=""/>
+        <p:cNvGrpSpPr/>
+        <p:nvPr/>
+      </p:nvGrpSpPr>
+      <p:grpSpPr>
+        <a:xfrm>
+          <a:off x="0" y="0"/>
+          <a:ext cx="0" cy="0"/>
+          <a:chOff x="0" y="0"/>
+          <a:chExt cx="0" cy="0"/>
+        </a:xfrm>
+      </p:grpSpPr>
+      <p:sp>
+        <p:nvSpPr>
+          <p:cNvPr id="2" name="Title 1"/>
+          <p:cNvSpPr>
+            <a:spLocks noGrp="1"/>
+          </p:cNvSpPr>
+          <p:nvPr>
+            <p:ph type="title"/>
+          </p:nvPr>
+        </p:nvSpPr>
+        <p:spPr/>
+        <p:txBody>
+          <a:bodyPr/>
+          <a:lstStyle/>
+          <a:p>
+            <a:r>
+              <a:t>Suggested Folder Structure</a:t>
+            </a:r>
+          </a:p>
+        </p:txBody>
+      </p:sp>
+      <p:sp>
+        <p:nvSpPr>
+          <p:cNvPr id="3" name="Content Placeholder 2"/>
+          <p:cNvSpPr>
+            <a:spLocks noGrp="1"/>
+          </p:cNvSpPr>
+          <p:nvPr>
+            <p:ph idx="1"/>
+          </p:nvPr>
+        </p:nvSpPr>
+        <p:spPr/>
+        <p:txBody>
+          <a:bodyPr/>
+          <a:lstStyle/>
+          <a:p>
+            <a:r>
+              <a:t>/agents – SQL generator and reviewer agents</a:t>
+            </a:r>
+          </a:p>
+          <a:p>
+            <a:r>
+              <a:t>/tools – Snowflake connectors and MCP tools</a:t>
+            </a:r>
+          </a:p>
+          <a:p>
+            <a:r>
+              <a:t>/memory – conversation and vector storage</a:t>
+            </a:r>
+          </a:p>
+          <a:p>
+            <a:r>
+              <a:t>/logs – reasoning and execution logs</a:t>
+            </a:r>
+          </a:p>
+          <a:p>
+            <a:r>
+              <a:t>/notebooks – experimentation and demos</a:t>
+            </a:r>
+          </a:p>
+        </p:txBody>
+      </p:sp>
+    </p:spTree>
+  </p:cSld>
+  <p:clrMapOvr>
+    <a:masterClrMapping/>
+  </p:clrMapOvr>
+</p:sld>
+</file>
+
+<file path=ppt/slides/slide38.xml><?xml version="1.0" encoding="utf-8"?>
 <p:sld xmlns:a="http://schemas.openxmlformats.org/drawingml/2006/main" xmlns:r="http://schemas.openxmlformats.org/officeDocument/2006/relationships" xmlns:p="http://schemas.openxmlformats.org/presentationml/2006/main">
   <p:cSld>
     <p:spTree>

--- a/Week-3/Day-1/Agentic_AI_Foundations_Data_Engineers.pptx
+++ b/Week-3/Day-1/Agentic_AI_Foundations_Data_Engineers.pptx
@@ -23,26 +23,27 @@
     <p:sldId id="293" r:id="rId17"/>
     <p:sldId id="287" r:id="rId18"/>
     <p:sldId id="263" r:id="rId19"/>
-    <p:sldId id="264" r:id="rId20"/>
-    <p:sldId id="288" r:id="rId21"/>
-    <p:sldId id="289" r:id="rId22"/>
-    <p:sldId id="265" r:id="rId23"/>
-    <p:sldId id="290" r:id="rId24"/>
-    <p:sldId id="266" r:id="rId25"/>
-    <p:sldId id="267" r:id="rId26"/>
-    <p:sldId id="268" r:id="rId27"/>
-    <p:sldId id="291" r:id="rId28"/>
-    <p:sldId id="269" r:id="rId29"/>
-    <p:sldId id="270" r:id="rId30"/>
-    <p:sldId id="271" r:id="rId31"/>
-    <p:sldId id="292" r:id="rId32"/>
-    <p:sldId id="272" r:id="rId33"/>
-    <p:sldId id="273" r:id="rId34"/>
-    <p:sldId id="274" r:id="rId35"/>
-    <p:sldId id="275" r:id="rId36"/>
-    <p:sldId id="276" r:id="rId37"/>
-    <p:sldId id="277" r:id="rId38"/>
-    <p:sldId id="278" r:id="rId39"/>
+    <p:sldId id="295" r:id="rId20"/>
+    <p:sldId id="264" r:id="rId21"/>
+    <p:sldId id="288" r:id="rId22"/>
+    <p:sldId id="289" r:id="rId23"/>
+    <p:sldId id="265" r:id="rId24"/>
+    <p:sldId id="290" r:id="rId25"/>
+    <p:sldId id="266" r:id="rId26"/>
+    <p:sldId id="267" r:id="rId27"/>
+    <p:sldId id="268" r:id="rId28"/>
+    <p:sldId id="291" r:id="rId29"/>
+    <p:sldId id="269" r:id="rId30"/>
+    <p:sldId id="270" r:id="rId31"/>
+    <p:sldId id="271" r:id="rId32"/>
+    <p:sldId id="292" r:id="rId33"/>
+    <p:sldId id="272" r:id="rId34"/>
+    <p:sldId id="273" r:id="rId35"/>
+    <p:sldId id="274" r:id="rId36"/>
+    <p:sldId id="275" r:id="rId37"/>
+    <p:sldId id="276" r:id="rId38"/>
+    <p:sldId id="277" r:id="rId39"/>
+    <p:sldId id="278" r:id="rId40"/>
   </p:sldIdLst>
   <p:sldSz cx="9144000" cy="6858000" type="screen4x3"/>
   <p:notesSz cx="6858000" cy="9144000"/>
@@ -19536,6 +19537,7 @@
           <a:lstStyle/>
           <a:p>
             <a:r>
+              <a:rPr dirty="0"/>
               <a:t>Multi-Agent Architectures</a:t>
             </a:r>
           </a:p>
@@ -19557,27 +19559,40 @@
           <a:lstStyle/>
           <a:p>
             <a:r>
+              <a:rPr dirty="0"/>
               <a:t>Supervisor Model: coordinator manages worker agents</a:t>
             </a:r>
           </a:p>
           <a:p>
             <a:r>
+              <a:rPr dirty="0"/>
               <a:t>Swarm Model: agents collaborate dynamically</a:t>
             </a:r>
           </a:p>
           <a:p>
             <a:r>
+              <a:rPr dirty="0"/>
               <a:t>Sequential Pipeline: output of one agent feeds another</a:t>
             </a:r>
           </a:p>
           <a:p>
             <a:r>
+              <a:rPr dirty="0"/>
               <a:t>Hierarchical patterns improve scalability</a:t>
             </a:r>
           </a:p>
           <a:p>
             <a:r>
-              <a:t>Useful for ingestion, validation, optimisation, governance</a:t>
+              <a:rPr dirty="0"/>
+              <a:t>Useful for ingestion, validation, </a:t>
+            </a:r>
+            <a:r>
+              <a:rPr dirty="0" err="1"/>
+              <a:t>optimisation</a:t>
+            </a:r>
+            <a:r>
+              <a:rPr dirty="0"/>
+              <a:t>, governance</a:t>
             </a:r>
           </a:p>
         </p:txBody>
@@ -19609,7 +19624,13 @@
       </p:grpSpPr>
       <p:sp>
         <p:nvSpPr>
-          <p:cNvPr id="2" name="Title 1"/>
+          <p:cNvPr id="2" name="Title 1">
+            <a:extLst>
+              <a:ext uri="{FF2B5EF4-FFF2-40B4-BE49-F238E27FC236}">
+                <a16:creationId xmlns:a16="http://schemas.microsoft.com/office/drawing/2014/main" id="{7417355B-D06D-B060-B599-754F10CBD2AE}"/>
+              </a:ext>
+            </a:extLst>
+          </p:cNvPr>
           <p:cNvSpPr>
             <a:spLocks noGrp="1"/>
           </p:cNvSpPr>
@@ -19623,78 +19644,1027 @@
           <a:lstStyle/>
           <a:p>
             <a:r>
-              <a:t>LangGraph Overview</a:t>
+              <a:rPr lang="en-IN" dirty="0"/>
+              <a:t>Architectures</a:t>
             </a:r>
           </a:p>
         </p:txBody>
       </p:sp>
-      <p:sp>
-        <p:nvSpPr>
-          <p:cNvPr id="3" name="Content Placeholder 2"/>
-          <p:cNvSpPr>
-            <a:spLocks noGrp="1"/>
-          </p:cNvSpPr>
+      <p:graphicFrame>
+        <p:nvGraphicFramePr>
+          <p:cNvPr id="5" name="Content Placeholder 4">
+            <a:extLst>
+              <a:ext uri="{FF2B5EF4-FFF2-40B4-BE49-F238E27FC236}">
+                <a16:creationId xmlns:a16="http://schemas.microsoft.com/office/drawing/2014/main" id="{E0E68BF8-1DBE-1D15-6095-FA43367304AE}"/>
+              </a:ext>
+            </a:extLst>
+          </p:cNvPr>
+          <p:cNvGraphicFramePr>
+            <a:graphicFrameLocks noGrp="1"/>
+          </p:cNvGraphicFramePr>
           <p:nvPr>
             <p:ph idx="1"/>
           </p:nvPr>
-        </p:nvSpPr>
-        <p:spPr/>
-        <p:txBody>
-          <a:bodyPr/>
-          <a:lstStyle/>
-          <a:p>
-            <a:r>
-              <a:rPr lang="en-US" dirty="0"/>
-              <a:t>Stateful orchestration framework built on </a:t>
-            </a:r>
-            <a:r>
-              <a:rPr lang="en-US" dirty="0" err="1"/>
-              <a:t>LangChain</a:t>
-            </a:r>
-            <a:r>
-              <a:rPr lang="en-US" dirty="0"/>
-              <a:t>.</a:t>
-            </a:r>
-          </a:p>
-          <a:p>
-            <a:r>
-              <a:rPr lang="en-US" b="1" dirty="0"/>
-              <a:t>Features</a:t>
-            </a:r>
-          </a:p>
-          <a:p>
-            <a:r>
-              <a:rPr lang="en-US" dirty="0"/>
-              <a:t>Directed graphs </a:t>
-            </a:r>
-          </a:p>
-          <a:p>
-            <a:r>
-              <a:rPr lang="en-US" dirty="0"/>
-              <a:t>Stateful workflows </a:t>
-            </a:r>
-          </a:p>
-          <a:p>
-            <a:r>
-              <a:rPr lang="en-US" dirty="0"/>
-              <a:t>Loops &amp; branches </a:t>
-            </a:r>
-          </a:p>
-          <a:p>
-            <a:r>
-              <a:rPr lang="en-US" dirty="0"/>
-              <a:t>Persistent memory </a:t>
-            </a:r>
-          </a:p>
-          <a:p>
-            <a:r>
-              <a:rPr lang="en-US" dirty="0"/>
-              <a:t>Human-in-loop support</a:t>
-            </a:r>
-          </a:p>
-        </p:txBody>
-      </p:sp>
+        </p:nvGraphicFramePr>
+        <p:xfrm>
+          <a:off x="768349" y="3314065"/>
+          <a:ext cx="7289802" cy="1966595"/>
+        </p:xfrm>
+        <a:graphic>
+          <a:graphicData uri="http://schemas.openxmlformats.org/drawingml/2006/table">
+            <a:tbl>
+              <a:tblPr firstRow="1" firstCol="1" bandRow="1">
+                <a:tableStyleId>{5C22544A-7EE6-4342-B048-85BDC9FD1C3A}</a:tableStyleId>
+              </a:tblPr>
+              <a:tblGrid>
+                <a:gridCol w="1214967">
+                  <a:extLst>
+                    <a:ext uri="{9D8B030D-6E8A-4147-A177-3AD203B41FA5}">
+                      <a16:colId xmlns:a16="http://schemas.microsoft.com/office/drawing/2014/main" val="4189861224"/>
+                    </a:ext>
+                  </a:extLst>
+                </a:gridCol>
+                <a:gridCol w="1214967">
+                  <a:extLst>
+                    <a:ext uri="{9D8B030D-6E8A-4147-A177-3AD203B41FA5}">
+                      <a16:colId xmlns:a16="http://schemas.microsoft.com/office/drawing/2014/main" val="2645683424"/>
+                    </a:ext>
+                  </a:extLst>
+                </a:gridCol>
+                <a:gridCol w="1214967">
+                  <a:extLst>
+                    <a:ext uri="{9D8B030D-6E8A-4147-A177-3AD203B41FA5}">
+                      <a16:colId xmlns:a16="http://schemas.microsoft.com/office/drawing/2014/main" val="3459964131"/>
+                    </a:ext>
+                  </a:extLst>
+                </a:gridCol>
+                <a:gridCol w="1214967">
+                  <a:extLst>
+                    <a:ext uri="{9D8B030D-6E8A-4147-A177-3AD203B41FA5}">
+                      <a16:colId xmlns:a16="http://schemas.microsoft.com/office/drawing/2014/main" val="954880506"/>
+                    </a:ext>
+                  </a:extLst>
+                </a:gridCol>
+                <a:gridCol w="1214967">
+                  <a:extLst>
+                    <a:ext uri="{9D8B030D-6E8A-4147-A177-3AD203B41FA5}">
+                      <a16:colId xmlns:a16="http://schemas.microsoft.com/office/drawing/2014/main" val="2409011858"/>
+                    </a:ext>
+                  </a:extLst>
+                </a:gridCol>
+                <a:gridCol w="1214967">
+                  <a:extLst>
+                    <a:ext uri="{9D8B030D-6E8A-4147-A177-3AD203B41FA5}">
+                      <a16:colId xmlns:a16="http://schemas.microsoft.com/office/drawing/2014/main" val="2288564274"/>
+                    </a:ext>
+                  </a:extLst>
+                </a:gridCol>
+              </a:tblGrid>
+              <a:tr h="200533">
+                <a:tc>
+                  <a:txBody>
+                    <a:bodyPr/>
+                    <a:lstStyle/>
+                    <a:p>
+                      <a:pPr>
+                        <a:lnSpc>
+                          <a:spcPct val="115000"/>
+                        </a:lnSpc>
+                        <a:spcAft>
+                          <a:spcPts val="1000"/>
+                        </a:spcAft>
+                        <a:buNone/>
+                      </a:pPr>
+                      <a:r>
+                        <a:rPr lang="en-IN" sz="1100">
+                          <a:effectLst/>
+                        </a:rPr>
+                        <a:t>Pattern</a:t>
+                      </a:r>
+                      <a:endParaRPr lang="en-IN" sz="1100">
+                        <a:effectLst/>
+                        <a:latin typeface="Calibri" panose="020F0502020204030204" pitchFamily="34" charset="0"/>
+                        <a:ea typeface="Calibri" panose="020F0502020204030204" pitchFamily="34" charset="0"/>
+                        <a:cs typeface="Times New Roman" panose="02020603050405020304" pitchFamily="18" charset="0"/>
+                      </a:endParaRPr>
+                    </a:p>
+                  </a:txBody>
+                  <a:tcPr marL="9525" marR="9525" marT="9525" marB="9525" anchor="ctr"/>
+                </a:tc>
+                <a:tc>
+                  <a:txBody>
+                    <a:bodyPr/>
+                    <a:lstStyle/>
+                    <a:p>
+                      <a:pPr>
+                        <a:lnSpc>
+                          <a:spcPct val="115000"/>
+                        </a:lnSpc>
+                        <a:spcAft>
+                          <a:spcPts val="1000"/>
+                        </a:spcAft>
+                        <a:buNone/>
+                      </a:pPr>
+                      <a:r>
+                        <a:rPr lang="en-IN" sz="1100">
+                          <a:effectLst/>
+                        </a:rPr>
+                        <a:t>Coordination</a:t>
+                      </a:r>
+                      <a:endParaRPr lang="en-IN" sz="1100">
+                        <a:effectLst/>
+                        <a:latin typeface="Calibri" panose="020F0502020204030204" pitchFamily="34" charset="0"/>
+                        <a:ea typeface="Calibri" panose="020F0502020204030204" pitchFamily="34" charset="0"/>
+                        <a:cs typeface="Times New Roman" panose="02020603050405020304" pitchFamily="18" charset="0"/>
+                      </a:endParaRPr>
+                    </a:p>
+                  </a:txBody>
+                  <a:tcPr marL="9525" marR="9525" marT="9525" marB="9525" anchor="ctr"/>
+                </a:tc>
+                <a:tc>
+                  <a:txBody>
+                    <a:bodyPr/>
+                    <a:lstStyle/>
+                    <a:p>
+                      <a:pPr>
+                        <a:lnSpc>
+                          <a:spcPct val="115000"/>
+                        </a:lnSpc>
+                        <a:spcAft>
+                          <a:spcPts val="1000"/>
+                        </a:spcAft>
+                        <a:buNone/>
+                      </a:pPr>
+                      <a:r>
+                        <a:rPr lang="en-IN" sz="1100">
+                          <a:effectLst/>
+                        </a:rPr>
+                        <a:t>Scalability</a:t>
+                      </a:r>
+                      <a:endParaRPr lang="en-IN" sz="1100">
+                        <a:effectLst/>
+                        <a:latin typeface="Calibri" panose="020F0502020204030204" pitchFamily="34" charset="0"/>
+                        <a:ea typeface="Calibri" panose="020F0502020204030204" pitchFamily="34" charset="0"/>
+                        <a:cs typeface="Times New Roman" panose="02020603050405020304" pitchFamily="18" charset="0"/>
+                      </a:endParaRPr>
+                    </a:p>
+                  </a:txBody>
+                  <a:tcPr marL="9525" marR="9525" marT="9525" marB="9525" anchor="ctr"/>
+                </a:tc>
+                <a:tc>
+                  <a:txBody>
+                    <a:bodyPr/>
+                    <a:lstStyle/>
+                    <a:p>
+                      <a:pPr>
+                        <a:lnSpc>
+                          <a:spcPct val="115000"/>
+                        </a:lnSpc>
+                        <a:spcAft>
+                          <a:spcPts val="1000"/>
+                        </a:spcAft>
+                        <a:buNone/>
+                      </a:pPr>
+                      <a:r>
+                        <a:rPr lang="en-IN" sz="1100">
+                          <a:effectLst/>
+                        </a:rPr>
+                        <a:t>Flexibility</a:t>
+                      </a:r>
+                      <a:endParaRPr lang="en-IN" sz="1100">
+                        <a:effectLst/>
+                        <a:latin typeface="Calibri" panose="020F0502020204030204" pitchFamily="34" charset="0"/>
+                        <a:ea typeface="Calibri" panose="020F0502020204030204" pitchFamily="34" charset="0"/>
+                        <a:cs typeface="Times New Roman" panose="02020603050405020304" pitchFamily="18" charset="0"/>
+                      </a:endParaRPr>
+                    </a:p>
+                  </a:txBody>
+                  <a:tcPr marL="9525" marR="9525" marT="9525" marB="9525" anchor="ctr"/>
+                </a:tc>
+                <a:tc>
+                  <a:txBody>
+                    <a:bodyPr/>
+                    <a:lstStyle/>
+                    <a:p>
+                      <a:pPr>
+                        <a:lnSpc>
+                          <a:spcPct val="115000"/>
+                        </a:lnSpc>
+                        <a:spcAft>
+                          <a:spcPts val="1000"/>
+                        </a:spcAft>
+                        <a:buNone/>
+                      </a:pPr>
+                      <a:r>
+                        <a:rPr lang="en-IN" sz="1100">
+                          <a:effectLst/>
+                        </a:rPr>
+                        <a:t>Governance</a:t>
+                      </a:r>
+                      <a:endParaRPr lang="en-IN" sz="1100">
+                        <a:effectLst/>
+                        <a:latin typeface="Calibri" panose="020F0502020204030204" pitchFamily="34" charset="0"/>
+                        <a:ea typeface="Calibri" panose="020F0502020204030204" pitchFamily="34" charset="0"/>
+                        <a:cs typeface="Times New Roman" panose="02020603050405020304" pitchFamily="18" charset="0"/>
+                      </a:endParaRPr>
+                    </a:p>
+                  </a:txBody>
+                  <a:tcPr marL="9525" marR="9525" marT="9525" marB="9525" anchor="ctr"/>
+                </a:tc>
+                <a:tc>
+                  <a:txBody>
+                    <a:bodyPr/>
+                    <a:lstStyle/>
+                    <a:p>
+                      <a:pPr>
+                        <a:lnSpc>
+                          <a:spcPct val="115000"/>
+                        </a:lnSpc>
+                        <a:spcAft>
+                          <a:spcPts val="1000"/>
+                        </a:spcAft>
+                        <a:buNone/>
+                      </a:pPr>
+                      <a:r>
+                        <a:rPr lang="en-IN" sz="1100">
+                          <a:effectLst/>
+                        </a:rPr>
+                        <a:t>Best For</a:t>
+                      </a:r>
+                      <a:endParaRPr lang="en-IN" sz="1100">
+                        <a:effectLst/>
+                        <a:latin typeface="Calibri" panose="020F0502020204030204" pitchFamily="34" charset="0"/>
+                        <a:ea typeface="Calibri" panose="020F0502020204030204" pitchFamily="34" charset="0"/>
+                        <a:cs typeface="Times New Roman" panose="02020603050405020304" pitchFamily="18" charset="0"/>
+                      </a:endParaRPr>
+                    </a:p>
+                  </a:txBody>
+                  <a:tcPr marL="9525" marR="9525" marT="9525" marB="9525" anchor="ctr"/>
+                </a:tc>
+                <a:extLst>
+                  <a:ext uri="{0D108BD9-81ED-4DB2-BD59-A6C34878D82A}">
+                    <a16:rowId xmlns:a16="http://schemas.microsoft.com/office/drawing/2014/main" val="352542279"/>
+                  </a:ext>
+                </a:extLst>
+              </a:tr>
+              <a:tr h="586105">
+                <a:tc>
+                  <a:txBody>
+                    <a:bodyPr/>
+                    <a:lstStyle/>
+                    <a:p>
+                      <a:pPr>
+                        <a:lnSpc>
+                          <a:spcPct val="115000"/>
+                        </a:lnSpc>
+                        <a:spcAft>
+                          <a:spcPts val="1000"/>
+                        </a:spcAft>
+                        <a:buNone/>
+                      </a:pPr>
+                      <a:r>
+                        <a:rPr lang="en-IN" sz="1100">
+                          <a:effectLst/>
+                        </a:rPr>
+                        <a:t>Supervisor</a:t>
+                      </a:r>
+                      <a:endParaRPr lang="en-IN" sz="1100">
+                        <a:effectLst/>
+                        <a:latin typeface="Calibri" panose="020F0502020204030204" pitchFamily="34" charset="0"/>
+                        <a:ea typeface="Calibri" panose="020F0502020204030204" pitchFamily="34" charset="0"/>
+                        <a:cs typeface="Times New Roman" panose="02020603050405020304" pitchFamily="18" charset="0"/>
+                      </a:endParaRPr>
+                    </a:p>
+                  </a:txBody>
+                  <a:tcPr marL="9525" marR="9525" marT="9525" marB="9525" anchor="ctr"/>
+                </a:tc>
+                <a:tc>
+                  <a:txBody>
+                    <a:bodyPr/>
+                    <a:lstStyle/>
+                    <a:p>
+                      <a:pPr>
+                        <a:lnSpc>
+                          <a:spcPct val="115000"/>
+                        </a:lnSpc>
+                        <a:spcAft>
+                          <a:spcPts val="1000"/>
+                        </a:spcAft>
+                        <a:buNone/>
+                      </a:pPr>
+                      <a:r>
+                        <a:rPr lang="en-IN" sz="1100">
+                          <a:effectLst/>
+                        </a:rPr>
+                        <a:t>Centralized</a:t>
+                      </a:r>
+                      <a:endParaRPr lang="en-IN" sz="1100">
+                        <a:effectLst/>
+                        <a:latin typeface="Calibri" panose="020F0502020204030204" pitchFamily="34" charset="0"/>
+                        <a:ea typeface="Calibri" panose="020F0502020204030204" pitchFamily="34" charset="0"/>
+                        <a:cs typeface="Times New Roman" panose="02020603050405020304" pitchFamily="18" charset="0"/>
+                      </a:endParaRPr>
+                    </a:p>
+                  </a:txBody>
+                  <a:tcPr marL="9525" marR="9525" marT="9525" marB="9525" anchor="ctr"/>
+                </a:tc>
+                <a:tc>
+                  <a:txBody>
+                    <a:bodyPr/>
+                    <a:lstStyle/>
+                    <a:p>
+                      <a:pPr>
+                        <a:lnSpc>
+                          <a:spcPct val="115000"/>
+                        </a:lnSpc>
+                        <a:spcAft>
+                          <a:spcPts val="1000"/>
+                        </a:spcAft>
+                        <a:buNone/>
+                      </a:pPr>
+                      <a:r>
+                        <a:rPr lang="en-IN" sz="1100">
+                          <a:effectLst/>
+                        </a:rPr>
+                        <a:t>Medium</a:t>
+                      </a:r>
+                      <a:endParaRPr lang="en-IN" sz="1100">
+                        <a:effectLst/>
+                        <a:latin typeface="Calibri" panose="020F0502020204030204" pitchFamily="34" charset="0"/>
+                        <a:ea typeface="Calibri" panose="020F0502020204030204" pitchFamily="34" charset="0"/>
+                        <a:cs typeface="Times New Roman" panose="02020603050405020304" pitchFamily="18" charset="0"/>
+                      </a:endParaRPr>
+                    </a:p>
+                  </a:txBody>
+                  <a:tcPr marL="9525" marR="9525" marT="9525" marB="9525" anchor="ctr"/>
+                </a:tc>
+                <a:tc>
+                  <a:txBody>
+                    <a:bodyPr/>
+                    <a:lstStyle/>
+                    <a:p>
+                      <a:pPr>
+                        <a:lnSpc>
+                          <a:spcPct val="115000"/>
+                        </a:lnSpc>
+                        <a:spcAft>
+                          <a:spcPts val="1000"/>
+                        </a:spcAft>
+                        <a:buNone/>
+                      </a:pPr>
+                      <a:r>
+                        <a:rPr lang="en-IN" sz="1100">
+                          <a:effectLst/>
+                        </a:rPr>
+                        <a:t>Medium</a:t>
+                      </a:r>
+                      <a:endParaRPr lang="en-IN" sz="1100">
+                        <a:effectLst/>
+                        <a:latin typeface="Calibri" panose="020F0502020204030204" pitchFamily="34" charset="0"/>
+                        <a:ea typeface="Calibri" panose="020F0502020204030204" pitchFamily="34" charset="0"/>
+                        <a:cs typeface="Times New Roman" panose="02020603050405020304" pitchFamily="18" charset="0"/>
+                      </a:endParaRPr>
+                    </a:p>
+                  </a:txBody>
+                  <a:tcPr marL="9525" marR="9525" marT="9525" marB="9525" anchor="ctr"/>
+                </a:tc>
+                <a:tc>
+                  <a:txBody>
+                    <a:bodyPr/>
+                    <a:lstStyle/>
+                    <a:p>
+                      <a:pPr>
+                        <a:lnSpc>
+                          <a:spcPct val="115000"/>
+                        </a:lnSpc>
+                        <a:spcAft>
+                          <a:spcPts val="1000"/>
+                        </a:spcAft>
+                        <a:buNone/>
+                      </a:pPr>
+                      <a:r>
+                        <a:rPr lang="en-IN" sz="1100">
+                          <a:effectLst/>
+                        </a:rPr>
+                        <a:t>Strong</a:t>
+                      </a:r>
+                      <a:endParaRPr lang="en-IN" sz="1100">
+                        <a:effectLst/>
+                        <a:latin typeface="Calibri" panose="020F0502020204030204" pitchFamily="34" charset="0"/>
+                        <a:ea typeface="Calibri" panose="020F0502020204030204" pitchFamily="34" charset="0"/>
+                        <a:cs typeface="Times New Roman" panose="02020603050405020304" pitchFamily="18" charset="0"/>
+                      </a:endParaRPr>
+                    </a:p>
+                  </a:txBody>
+                  <a:tcPr marL="9525" marR="9525" marT="9525" marB="9525" anchor="ctr"/>
+                </a:tc>
+                <a:tc>
+                  <a:txBody>
+                    <a:bodyPr/>
+                    <a:lstStyle/>
+                    <a:p>
+                      <a:pPr>
+                        <a:lnSpc>
+                          <a:spcPct val="115000"/>
+                        </a:lnSpc>
+                        <a:spcAft>
+                          <a:spcPts val="1000"/>
+                        </a:spcAft>
+                        <a:buNone/>
+                      </a:pPr>
+                      <a:r>
+                        <a:rPr lang="en-IN" sz="1100">
+                          <a:effectLst/>
+                        </a:rPr>
+                        <a:t>Controlled enterprise workflows</a:t>
+                      </a:r>
+                      <a:endParaRPr lang="en-IN" sz="1100">
+                        <a:effectLst/>
+                        <a:latin typeface="Calibri" panose="020F0502020204030204" pitchFamily="34" charset="0"/>
+                        <a:ea typeface="Calibri" panose="020F0502020204030204" pitchFamily="34" charset="0"/>
+                        <a:cs typeface="Times New Roman" panose="02020603050405020304" pitchFamily="18" charset="0"/>
+                      </a:endParaRPr>
+                    </a:p>
+                  </a:txBody>
+                  <a:tcPr marL="9525" marR="9525" marT="9525" marB="9525" anchor="ctr"/>
+                </a:tc>
+                <a:extLst>
+                  <a:ext uri="{0D108BD9-81ED-4DB2-BD59-A6C34878D82A}">
+                    <a16:rowId xmlns:a16="http://schemas.microsoft.com/office/drawing/2014/main" val="622086549"/>
+                  </a:ext>
+                </a:extLst>
+              </a:tr>
+              <a:tr h="393319">
+                <a:tc>
+                  <a:txBody>
+                    <a:bodyPr/>
+                    <a:lstStyle/>
+                    <a:p>
+                      <a:pPr>
+                        <a:lnSpc>
+                          <a:spcPct val="115000"/>
+                        </a:lnSpc>
+                        <a:spcAft>
+                          <a:spcPts val="1000"/>
+                        </a:spcAft>
+                        <a:buNone/>
+                      </a:pPr>
+                      <a:r>
+                        <a:rPr lang="en-IN" sz="1100">
+                          <a:effectLst/>
+                        </a:rPr>
+                        <a:t>Swarm</a:t>
+                      </a:r>
+                      <a:endParaRPr lang="en-IN" sz="1100">
+                        <a:effectLst/>
+                        <a:latin typeface="Calibri" panose="020F0502020204030204" pitchFamily="34" charset="0"/>
+                        <a:ea typeface="Calibri" panose="020F0502020204030204" pitchFamily="34" charset="0"/>
+                        <a:cs typeface="Times New Roman" panose="02020603050405020304" pitchFamily="18" charset="0"/>
+                      </a:endParaRPr>
+                    </a:p>
+                  </a:txBody>
+                  <a:tcPr marL="9525" marR="9525" marT="9525" marB="9525" anchor="ctr"/>
+                </a:tc>
+                <a:tc>
+                  <a:txBody>
+                    <a:bodyPr/>
+                    <a:lstStyle/>
+                    <a:p>
+                      <a:pPr>
+                        <a:lnSpc>
+                          <a:spcPct val="115000"/>
+                        </a:lnSpc>
+                        <a:spcAft>
+                          <a:spcPts val="1000"/>
+                        </a:spcAft>
+                        <a:buNone/>
+                      </a:pPr>
+                      <a:r>
+                        <a:rPr lang="en-IN" sz="1100">
+                          <a:effectLst/>
+                        </a:rPr>
+                        <a:t>Decentralized</a:t>
+                      </a:r>
+                      <a:endParaRPr lang="en-IN" sz="1100">
+                        <a:effectLst/>
+                        <a:latin typeface="Calibri" panose="020F0502020204030204" pitchFamily="34" charset="0"/>
+                        <a:ea typeface="Calibri" panose="020F0502020204030204" pitchFamily="34" charset="0"/>
+                        <a:cs typeface="Times New Roman" panose="02020603050405020304" pitchFamily="18" charset="0"/>
+                      </a:endParaRPr>
+                    </a:p>
+                  </a:txBody>
+                  <a:tcPr marL="9525" marR="9525" marT="9525" marB="9525" anchor="ctr"/>
+                </a:tc>
+                <a:tc>
+                  <a:txBody>
+                    <a:bodyPr/>
+                    <a:lstStyle/>
+                    <a:p>
+                      <a:pPr>
+                        <a:lnSpc>
+                          <a:spcPct val="115000"/>
+                        </a:lnSpc>
+                        <a:spcAft>
+                          <a:spcPts val="1000"/>
+                        </a:spcAft>
+                        <a:buNone/>
+                      </a:pPr>
+                      <a:r>
+                        <a:rPr lang="en-IN" sz="1100">
+                          <a:effectLst/>
+                        </a:rPr>
+                        <a:t>Very High</a:t>
+                      </a:r>
+                      <a:endParaRPr lang="en-IN" sz="1100">
+                        <a:effectLst/>
+                        <a:latin typeface="Calibri" panose="020F0502020204030204" pitchFamily="34" charset="0"/>
+                        <a:ea typeface="Calibri" panose="020F0502020204030204" pitchFamily="34" charset="0"/>
+                        <a:cs typeface="Times New Roman" panose="02020603050405020304" pitchFamily="18" charset="0"/>
+                      </a:endParaRPr>
+                    </a:p>
+                  </a:txBody>
+                  <a:tcPr marL="9525" marR="9525" marT="9525" marB="9525" anchor="ctr"/>
+                </a:tc>
+                <a:tc>
+                  <a:txBody>
+                    <a:bodyPr/>
+                    <a:lstStyle/>
+                    <a:p>
+                      <a:pPr>
+                        <a:lnSpc>
+                          <a:spcPct val="115000"/>
+                        </a:lnSpc>
+                        <a:spcAft>
+                          <a:spcPts val="1000"/>
+                        </a:spcAft>
+                        <a:buNone/>
+                      </a:pPr>
+                      <a:r>
+                        <a:rPr lang="en-IN" sz="1100">
+                          <a:effectLst/>
+                        </a:rPr>
+                        <a:t>Very High</a:t>
+                      </a:r>
+                      <a:endParaRPr lang="en-IN" sz="1100">
+                        <a:effectLst/>
+                        <a:latin typeface="Calibri" panose="020F0502020204030204" pitchFamily="34" charset="0"/>
+                        <a:ea typeface="Calibri" panose="020F0502020204030204" pitchFamily="34" charset="0"/>
+                        <a:cs typeface="Times New Roman" panose="02020603050405020304" pitchFamily="18" charset="0"/>
+                      </a:endParaRPr>
+                    </a:p>
+                  </a:txBody>
+                  <a:tcPr marL="9525" marR="9525" marT="9525" marB="9525" anchor="ctr"/>
+                </a:tc>
+                <a:tc>
+                  <a:txBody>
+                    <a:bodyPr/>
+                    <a:lstStyle/>
+                    <a:p>
+                      <a:pPr>
+                        <a:lnSpc>
+                          <a:spcPct val="115000"/>
+                        </a:lnSpc>
+                        <a:spcAft>
+                          <a:spcPts val="1000"/>
+                        </a:spcAft>
+                        <a:buNone/>
+                      </a:pPr>
+                      <a:r>
+                        <a:rPr lang="en-IN" sz="1100">
+                          <a:effectLst/>
+                        </a:rPr>
+                        <a:t>Moderate</a:t>
+                      </a:r>
+                      <a:endParaRPr lang="en-IN" sz="1100">
+                        <a:effectLst/>
+                        <a:latin typeface="Calibri" panose="020F0502020204030204" pitchFamily="34" charset="0"/>
+                        <a:ea typeface="Calibri" panose="020F0502020204030204" pitchFamily="34" charset="0"/>
+                        <a:cs typeface="Times New Roman" panose="02020603050405020304" pitchFamily="18" charset="0"/>
+                      </a:endParaRPr>
+                    </a:p>
+                  </a:txBody>
+                  <a:tcPr marL="9525" marR="9525" marT="9525" marB="9525" anchor="ctr"/>
+                </a:tc>
+                <a:tc>
+                  <a:txBody>
+                    <a:bodyPr/>
+                    <a:lstStyle/>
+                    <a:p>
+                      <a:pPr>
+                        <a:lnSpc>
+                          <a:spcPct val="115000"/>
+                        </a:lnSpc>
+                        <a:spcAft>
+                          <a:spcPts val="1000"/>
+                        </a:spcAft>
+                        <a:buNone/>
+                      </a:pPr>
+                      <a:r>
+                        <a:rPr lang="en-IN" sz="1100">
+                          <a:effectLst/>
+                        </a:rPr>
+                        <a:t>Autonomous collaboration</a:t>
+                      </a:r>
+                      <a:endParaRPr lang="en-IN" sz="1100">
+                        <a:effectLst/>
+                        <a:latin typeface="Calibri" panose="020F0502020204030204" pitchFamily="34" charset="0"/>
+                        <a:ea typeface="Calibri" panose="020F0502020204030204" pitchFamily="34" charset="0"/>
+                        <a:cs typeface="Times New Roman" panose="02020603050405020304" pitchFamily="18" charset="0"/>
+                      </a:endParaRPr>
+                    </a:p>
+                  </a:txBody>
+                  <a:tcPr marL="9525" marR="9525" marT="9525" marB="9525" anchor="ctr"/>
+                </a:tc>
+                <a:extLst>
+                  <a:ext uri="{0D108BD9-81ED-4DB2-BD59-A6C34878D82A}">
+                    <a16:rowId xmlns:a16="http://schemas.microsoft.com/office/drawing/2014/main" val="3123787467"/>
+                  </a:ext>
+                </a:extLst>
+              </a:tr>
+              <a:tr h="393319">
+                <a:tc>
+                  <a:txBody>
+                    <a:bodyPr/>
+                    <a:lstStyle/>
+                    <a:p>
+                      <a:pPr>
+                        <a:lnSpc>
+                          <a:spcPct val="115000"/>
+                        </a:lnSpc>
+                        <a:spcAft>
+                          <a:spcPts val="1000"/>
+                        </a:spcAft>
+                        <a:buNone/>
+                      </a:pPr>
+                      <a:r>
+                        <a:rPr lang="en-IN" sz="1100">
+                          <a:effectLst/>
+                        </a:rPr>
+                        <a:t>Sequential Pipeline</a:t>
+                      </a:r>
+                      <a:endParaRPr lang="en-IN" sz="1100">
+                        <a:effectLst/>
+                        <a:latin typeface="Calibri" panose="020F0502020204030204" pitchFamily="34" charset="0"/>
+                        <a:ea typeface="Calibri" panose="020F0502020204030204" pitchFamily="34" charset="0"/>
+                        <a:cs typeface="Times New Roman" panose="02020603050405020304" pitchFamily="18" charset="0"/>
+                      </a:endParaRPr>
+                    </a:p>
+                  </a:txBody>
+                  <a:tcPr marL="9525" marR="9525" marT="9525" marB="9525" anchor="ctr"/>
+                </a:tc>
+                <a:tc>
+                  <a:txBody>
+                    <a:bodyPr/>
+                    <a:lstStyle/>
+                    <a:p>
+                      <a:pPr>
+                        <a:lnSpc>
+                          <a:spcPct val="115000"/>
+                        </a:lnSpc>
+                        <a:spcAft>
+                          <a:spcPts val="1000"/>
+                        </a:spcAft>
+                        <a:buNone/>
+                      </a:pPr>
+                      <a:r>
+                        <a:rPr lang="en-IN" sz="1100">
+                          <a:effectLst/>
+                        </a:rPr>
+                        <a:t>Linear</a:t>
+                      </a:r>
+                      <a:endParaRPr lang="en-IN" sz="1100">
+                        <a:effectLst/>
+                        <a:latin typeface="Calibri" panose="020F0502020204030204" pitchFamily="34" charset="0"/>
+                        <a:ea typeface="Calibri" panose="020F0502020204030204" pitchFamily="34" charset="0"/>
+                        <a:cs typeface="Times New Roman" panose="02020603050405020304" pitchFamily="18" charset="0"/>
+                      </a:endParaRPr>
+                    </a:p>
+                  </a:txBody>
+                  <a:tcPr marL="9525" marR="9525" marT="9525" marB="9525" anchor="ctr"/>
+                </a:tc>
+                <a:tc>
+                  <a:txBody>
+                    <a:bodyPr/>
+                    <a:lstStyle/>
+                    <a:p>
+                      <a:pPr>
+                        <a:lnSpc>
+                          <a:spcPct val="115000"/>
+                        </a:lnSpc>
+                        <a:spcAft>
+                          <a:spcPts val="1000"/>
+                        </a:spcAft>
+                        <a:buNone/>
+                      </a:pPr>
+                      <a:r>
+                        <a:rPr lang="en-IN" sz="1100">
+                          <a:effectLst/>
+                        </a:rPr>
+                        <a:t>Medium</a:t>
+                      </a:r>
+                      <a:endParaRPr lang="en-IN" sz="1100">
+                        <a:effectLst/>
+                        <a:latin typeface="Calibri" panose="020F0502020204030204" pitchFamily="34" charset="0"/>
+                        <a:ea typeface="Calibri" panose="020F0502020204030204" pitchFamily="34" charset="0"/>
+                        <a:cs typeface="Times New Roman" panose="02020603050405020304" pitchFamily="18" charset="0"/>
+                      </a:endParaRPr>
+                    </a:p>
+                  </a:txBody>
+                  <a:tcPr marL="9525" marR="9525" marT="9525" marB="9525" anchor="ctr"/>
+                </a:tc>
+                <a:tc>
+                  <a:txBody>
+                    <a:bodyPr/>
+                    <a:lstStyle/>
+                    <a:p>
+                      <a:pPr>
+                        <a:lnSpc>
+                          <a:spcPct val="115000"/>
+                        </a:lnSpc>
+                        <a:spcAft>
+                          <a:spcPts val="1000"/>
+                        </a:spcAft>
+                        <a:buNone/>
+                      </a:pPr>
+                      <a:r>
+                        <a:rPr lang="en-IN" sz="1100">
+                          <a:effectLst/>
+                        </a:rPr>
+                        <a:t>Low</a:t>
+                      </a:r>
+                      <a:endParaRPr lang="en-IN" sz="1100">
+                        <a:effectLst/>
+                        <a:latin typeface="Calibri" panose="020F0502020204030204" pitchFamily="34" charset="0"/>
+                        <a:ea typeface="Calibri" panose="020F0502020204030204" pitchFamily="34" charset="0"/>
+                        <a:cs typeface="Times New Roman" panose="02020603050405020304" pitchFamily="18" charset="0"/>
+                      </a:endParaRPr>
+                    </a:p>
+                  </a:txBody>
+                  <a:tcPr marL="9525" marR="9525" marT="9525" marB="9525" anchor="ctr"/>
+                </a:tc>
+                <a:tc>
+                  <a:txBody>
+                    <a:bodyPr/>
+                    <a:lstStyle/>
+                    <a:p>
+                      <a:pPr>
+                        <a:lnSpc>
+                          <a:spcPct val="115000"/>
+                        </a:lnSpc>
+                        <a:spcAft>
+                          <a:spcPts val="1000"/>
+                        </a:spcAft>
+                        <a:buNone/>
+                      </a:pPr>
+                      <a:r>
+                        <a:rPr lang="en-IN" sz="1100">
+                          <a:effectLst/>
+                        </a:rPr>
+                        <a:t>Strong</a:t>
+                      </a:r>
+                      <a:endParaRPr lang="en-IN" sz="1100">
+                        <a:effectLst/>
+                        <a:latin typeface="Calibri" panose="020F0502020204030204" pitchFamily="34" charset="0"/>
+                        <a:ea typeface="Calibri" panose="020F0502020204030204" pitchFamily="34" charset="0"/>
+                        <a:cs typeface="Times New Roman" panose="02020603050405020304" pitchFamily="18" charset="0"/>
+                      </a:endParaRPr>
+                    </a:p>
+                  </a:txBody>
+                  <a:tcPr marL="9525" marR="9525" marT="9525" marB="9525" anchor="ctr"/>
+                </a:tc>
+                <a:tc>
+                  <a:txBody>
+                    <a:bodyPr/>
+                    <a:lstStyle/>
+                    <a:p>
+                      <a:pPr>
+                        <a:lnSpc>
+                          <a:spcPct val="115000"/>
+                        </a:lnSpc>
+                        <a:spcAft>
+                          <a:spcPts val="1000"/>
+                        </a:spcAft>
+                        <a:buNone/>
+                      </a:pPr>
+                      <a:r>
+                        <a:rPr lang="en-IN" sz="1100">
+                          <a:effectLst/>
+                        </a:rPr>
+                        <a:t>ETL and processing pipelines</a:t>
+                      </a:r>
+                      <a:endParaRPr lang="en-IN" sz="1100">
+                        <a:effectLst/>
+                        <a:latin typeface="Calibri" panose="020F0502020204030204" pitchFamily="34" charset="0"/>
+                        <a:ea typeface="Calibri" panose="020F0502020204030204" pitchFamily="34" charset="0"/>
+                        <a:cs typeface="Times New Roman" panose="02020603050405020304" pitchFamily="18" charset="0"/>
+                      </a:endParaRPr>
+                    </a:p>
+                  </a:txBody>
+                  <a:tcPr marL="9525" marR="9525" marT="9525" marB="9525" anchor="ctr"/>
+                </a:tc>
+                <a:extLst>
+                  <a:ext uri="{0D108BD9-81ED-4DB2-BD59-A6C34878D82A}">
+                    <a16:rowId xmlns:a16="http://schemas.microsoft.com/office/drawing/2014/main" val="4230094215"/>
+                  </a:ext>
+                </a:extLst>
+              </a:tr>
+              <a:tr h="393319">
+                <a:tc>
+                  <a:txBody>
+                    <a:bodyPr/>
+                    <a:lstStyle/>
+                    <a:p>
+                      <a:pPr>
+                        <a:lnSpc>
+                          <a:spcPct val="115000"/>
+                        </a:lnSpc>
+                        <a:spcAft>
+                          <a:spcPts val="1000"/>
+                        </a:spcAft>
+                        <a:buNone/>
+                      </a:pPr>
+                      <a:r>
+                        <a:rPr lang="en-IN" sz="1100">
+                          <a:effectLst/>
+                        </a:rPr>
+                        <a:t>Hierarchical</a:t>
+                      </a:r>
+                      <a:endParaRPr lang="en-IN" sz="1100">
+                        <a:effectLst/>
+                        <a:latin typeface="Calibri" panose="020F0502020204030204" pitchFamily="34" charset="0"/>
+                        <a:ea typeface="Calibri" panose="020F0502020204030204" pitchFamily="34" charset="0"/>
+                        <a:cs typeface="Times New Roman" panose="02020603050405020304" pitchFamily="18" charset="0"/>
+                      </a:endParaRPr>
+                    </a:p>
+                  </a:txBody>
+                  <a:tcPr marL="9525" marR="9525" marT="9525" marB="9525" anchor="ctr"/>
+                </a:tc>
+                <a:tc>
+                  <a:txBody>
+                    <a:bodyPr/>
+                    <a:lstStyle/>
+                    <a:p>
+                      <a:pPr>
+                        <a:lnSpc>
+                          <a:spcPct val="115000"/>
+                        </a:lnSpc>
+                        <a:spcAft>
+                          <a:spcPts val="1000"/>
+                        </a:spcAft>
+                        <a:buNone/>
+                      </a:pPr>
+                      <a:r>
+                        <a:rPr lang="en-IN" sz="1100">
+                          <a:effectLst/>
+                        </a:rPr>
+                        <a:t>Multi-layered</a:t>
+                      </a:r>
+                      <a:endParaRPr lang="en-IN" sz="1100">
+                        <a:effectLst/>
+                        <a:latin typeface="Calibri" panose="020F0502020204030204" pitchFamily="34" charset="0"/>
+                        <a:ea typeface="Calibri" panose="020F0502020204030204" pitchFamily="34" charset="0"/>
+                        <a:cs typeface="Times New Roman" panose="02020603050405020304" pitchFamily="18" charset="0"/>
+                      </a:endParaRPr>
+                    </a:p>
+                  </a:txBody>
+                  <a:tcPr marL="9525" marR="9525" marT="9525" marB="9525" anchor="ctr"/>
+                </a:tc>
+                <a:tc>
+                  <a:txBody>
+                    <a:bodyPr/>
+                    <a:lstStyle/>
+                    <a:p>
+                      <a:pPr>
+                        <a:lnSpc>
+                          <a:spcPct val="115000"/>
+                        </a:lnSpc>
+                        <a:spcAft>
+                          <a:spcPts val="1000"/>
+                        </a:spcAft>
+                        <a:buNone/>
+                      </a:pPr>
+                      <a:r>
+                        <a:rPr lang="en-IN" sz="1100">
+                          <a:effectLst/>
+                        </a:rPr>
+                        <a:t>Very High</a:t>
+                      </a:r>
+                      <a:endParaRPr lang="en-IN" sz="1100">
+                        <a:effectLst/>
+                        <a:latin typeface="Calibri" panose="020F0502020204030204" pitchFamily="34" charset="0"/>
+                        <a:ea typeface="Calibri" panose="020F0502020204030204" pitchFamily="34" charset="0"/>
+                        <a:cs typeface="Times New Roman" panose="02020603050405020304" pitchFamily="18" charset="0"/>
+                      </a:endParaRPr>
+                    </a:p>
+                  </a:txBody>
+                  <a:tcPr marL="9525" marR="9525" marT="9525" marB="9525" anchor="ctr"/>
+                </a:tc>
+                <a:tc>
+                  <a:txBody>
+                    <a:bodyPr/>
+                    <a:lstStyle/>
+                    <a:p>
+                      <a:pPr>
+                        <a:lnSpc>
+                          <a:spcPct val="115000"/>
+                        </a:lnSpc>
+                        <a:spcAft>
+                          <a:spcPts val="1000"/>
+                        </a:spcAft>
+                        <a:buNone/>
+                      </a:pPr>
+                      <a:r>
+                        <a:rPr lang="en-IN" sz="1100">
+                          <a:effectLst/>
+                        </a:rPr>
+                        <a:t>High</a:t>
+                      </a:r>
+                      <a:endParaRPr lang="en-IN" sz="1100">
+                        <a:effectLst/>
+                        <a:latin typeface="Calibri" panose="020F0502020204030204" pitchFamily="34" charset="0"/>
+                        <a:ea typeface="Calibri" panose="020F0502020204030204" pitchFamily="34" charset="0"/>
+                        <a:cs typeface="Times New Roman" panose="02020603050405020304" pitchFamily="18" charset="0"/>
+                      </a:endParaRPr>
+                    </a:p>
+                  </a:txBody>
+                  <a:tcPr marL="9525" marR="9525" marT="9525" marB="9525" anchor="ctr"/>
+                </a:tc>
+                <a:tc>
+                  <a:txBody>
+                    <a:bodyPr/>
+                    <a:lstStyle/>
+                    <a:p>
+                      <a:pPr>
+                        <a:lnSpc>
+                          <a:spcPct val="115000"/>
+                        </a:lnSpc>
+                        <a:spcAft>
+                          <a:spcPts val="1000"/>
+                        </a:spcAft>
+                        <a:buNone/>
+                      </a:pPr>
+                      <a:r>
+                        <a:rPr lang="en-IN" sz="1100">
+                          <a:effectLst/>
+                        </a:rPr>
+                        <a:t>Very Strong</a:t>
+                      </a:r>
+                      <a:endParaRPr lang="en-IN" sz="1100">
+                        <a:effectLst/>
+                        <a:latin typeface="Calibri" panose="020F0502020204030204" pitchFamily="34" charset="0"/>
+                        <a:ea typeface="Calibri" panose="020F0502020204030204" pitchFamily="34" charset="0"/>
+                        <a:cs typeface="Times New Roman" panose="02020603050405020304" pitchFamily="18" charset="0"/>
+                      </a:endParaRPr>
+                    </a:p>
+                  </a:txBody>
+                  <a:tcPr marL="9525" marR="9525" marT="9525" marB="9525" anchor="ctr"/>
+                </a:tc>
+                <a:tc>
+                  <a:txBody>
+                    <a:bodyPr/>
+                    <a:lstStyle/>
+                    <a:p>
+                      <a:pPr>
+                        <a:lnSpc>
+                          <a:spcPct val="115000"/>
+                        </a:lnSpc>
+                        <a:spcAft>
+                          <a:spcPts val="1000"/>
+                        </a:spcAft>
+                        <a:buNone/>
+                      </a:pPr>
+                      <a:r>
+                        <a:rPr lang="en-IN" sz="1100" dirty="0">
+                          <a:effectLst/>
+                        </a:rPr>
+                        <a:t>Large enterprise ecosystems</a:t>
+                      </a:r>
+                      <a:endParaRPr lang="en-IN" sz="1100" dirty="0">
+                        <a:effectLst/>
+                        <a:latin typeface="Calibri" panose="020F0502020204030204" pitchFamily="34" charset="0"/>
+                        <a:ea typeface="Calibri" panose="020F0502020204030204" pitchFamily="34" charset="0"/>
+                        <a:cs typeface="Times New Roman" panose="02020603050405020304" pitchFamily="18" charset="0"/>
+                      </a:endParaRPr>
+                    </a:p>
+                  </a:txBody>
+                  <a:tcPr marL="9525" marR="9525" marT="9525" marB="9525" anchor="ctr"/>
+                </a:tc>
+                <a:extLst>
+                  <a:ext uri="{0D108BD9-81ED-4DB2-BD59-A6C34878D82A}">
+                    <a16:rowId xmlns:a16="http://schemas.microsoft.com/office/drawing/2014/main" val="700152674"/>
+                  </a:ext>
+                </a:extLst>
+              </a:tr>
+            </a:tbl>
+          </a:graphicData>
+        </a:graphic>
+      </p:graphicFrame>
     </p:spTree>
+    <p:extLst>
+      <p:ext uri="{BB962C8B-B14F-4D97-AF65-F5344CB8AC3E}">
+        <p14:creationId xmlns:p14="http://schemas.microsoft.com/office/powerpoint/2010/main" val="2087729572"/>
+      </p:ext>
+    </p:extLst>
   </p:cSld>
   <p:clrMapOvr>
     <a:masterClrMapping/>
@@ -19803,6 +20773,123 @@
       </p:grpSpPr>
       <p:sp>
         <p:nvSpPr>
+          <p:cNvPr id="2" name="Title 1"/>
+          <p:cNvSpPr>
+            <a:spLocks noGrp="1"/>
+          </p:cNvSpPr>
+          <p:nvPr>
+            <p:ph type="title"/>
+          </p:nvPr>
+        </p:nvSpPr>
+        <p:spPr/>
+        <p:txBody>
+          <a:bodyPr/>
+          <a:lstStyle/>
+          <a:p>
+            <a:r>
+              <a:rPr dirty="0" err="1"/>
+              <a:t>LangGraph</a:t>
+            </a:r>
+            <a:r>
+              <a:rPr dirty="0"/>
+              <a:t> Overview</a:t>
+            </a:r>
+          </a:p>
+        </p:txBody>
+      </p:sp>
+      <p:sp>
+        <p:nvSpPr>
+          <p:cNvPr id="3" name="Content Placeholder 2"/>
+          <p:cNvSpPr>
+            <a:spLocks noGrp="1"/>
+          </p:cNvSpPr>
+          <p:nvPr>
+            <p:ph idx="1"/>
+          </p:nvPr>
+        </p:nvSpPr>
+        <p:spPr/>
+        <p:txBody>
+          <a:bodyPr/>
+          <a:lstStyle/>
+          <a:p>
+            <a:r>
+              <a:rPr lang="en-US" dirty="0"/>
+              <a:t>Stateful orchestration framework built on </a:t>
+            </a:r>
+            <a:r>
+              <a:rPr lang="en-US" dirty="0" err="1"/>
+              <a:t>LangChain</a:t>
+            </a:r>
+            <a:r>
+              <a:rPr lang="en-US" dirty="0"/>
+              <a:t>.</a:t>
+            </a:r>
+          </a:p>
+          <a:p>
+            <a:r>
+              <a:rPr lang="en-US" b="1" dirty="0"/>
+              <a:t>Features</a:t>
+            </a:r>
+          </a:p>
+          <a:p>
+            <a:r>
+              <a:rPr lang="en-US" dirty="0"/>
+              <a:t>Directed graphs </a:t>
+            </a:r>
+          </a:p>
+          <a:p>
+            <a:r>
+              <a:rPr lang="en-US" dirty="0"/>
+              <a:t>Stateful workflows </a:t>
+            </a:r>
+          </a:p>
+          <a:p>
+            <a:r>
+              <a:rPr lang="en-US" dirty="0"/>
+              <a:t>Loops &amp; branches </a:t>
+            </a:r>
+          </a:p>
+          <a:p>
+            <a:r>
+              <a:rPr lang="en-US" dirty="0"/>
+              <a:t>Persistent memory </a:t>
+            </a:r>
+          </a:p>
+          <a:p>
+            <a:r>
+              <a:rPr lang="en-US" dirty="0"/>
+              <a:t>Human-in-loop support</a:t>
+            </a:r>
+          </a:p>
+        </p:txBody>
+      </p:sp>
+    </p:spTree>
+  </p:cSld>
+  <p:clrMapOvr>
+    <a:masterClrMapping/>
+  </p:clrMapOvr>
+</p:sld>
+</file>
+
+<file path=ppt/slides/slide21.xml><?xml version="1.0" encoding="utf-8"?>
+<p:sld xmlns:a="http://schemas.openxmlformats.org/drawingml/2006/main" xmlns:r="http://schemas.openxmlformats.org/officeDocument/2006/relationships" xmlns:p="http://schemas.openxmlformats.org/presentationml/2006/main">
+  <p:cSld>
+    <p:spTree>
+      <p:nvGrpSpPr>
+        <p:cNvPr id="1" name=""/>
+        <p:cNvGrpSpPr/>
+        <p:nvPr/>
+      </p:nvGrpSpPr>
+      <p:grpSpPr>
+        <a:xfrm>
+          <a:off x="0" y="0"/>
+          <a:ext cx="0" cy="0"/>
+          <a:chOff x="0" y="0"/>
+          <a:chExt cx="0" cy="0"/>
+        </a:xfrm>
+      </p:grpSpPr>
+      <p:sp>
+        <p:nvSpPr>
           <p:cNvPr id="2" name="Title 1">
             <a:extLst>
               <a:ext uri="{FF2B5EF4-FFF2-40B4-BE49-F238E27FC236}">
@@ -19938,7 +21025,7 @@
 </p:sld>
 </file>
 
-<file path=ppt/slides/slide21.xml><?xml version="1.0" encoding="utf-8"?>
+<file path=ppt/slides/slide22.xml><?xml version="1.0" encoding="utf-8"?>
 <p:sld xmlns:a="http://schemas.openxmlformats.org/drawingml/2006/main" xmlns:r="http://schemas.openxmlformats.org/officeDocument/2006/relationships" xmlns:p="http://schemas.openxmlformats.org/presentationml/2006/main">
   <p:cSld>
     <p:spTree>
@@ -20079,7 +21166,7 @@
 </p:sld>
 </file>
 
-<file path=ppt/slides/slide22.xml><?xml version="1.0" encoding="utf-8"?>
+<file path=ppt/slides/slide23.xml><?xml version="1.0" encoding="utf-8"?>
 <p:sld xmlns:a="http://schemas.openxmlformats.org/drawingml/2006/main" xmlns:r="http://schemas.openxmlformats.org/officeDocument/2006/relationships" xmlns:p="http://schemas.openxmlformats.org/presentationml/2006/main">
   <p:cSld>
     <p:spTree>
@@ -20183,7 +21270,7 @@
 </p:sld>
 </file>
 
-<file path=ppt/slides/slide23.xml><?xml version="1.0" encoding="utf-8"?>
+<file path=ppt/slides/slide24.xml><?xml version="1.0" encoding="utf-8"?>
 <p:sld xmlns:a="http://schemas.openxmlformats.org/drawingml/2006/main" xmlns:r="http://schemas.openxmlformats.org/officeDocument/2006/relationships" xmlns:p="http://schemas.openxmlformats.org/presentationml/2006/main">
   <p:cSld>
     <p:spTree>
@@ -20299,93 +21386,6 @@
         <p14:creationId xmlns:p14="http://schemas.microsoft.com/office/powerpoint/2010/main" val="465707496"/>
       </p:ext>
     </p:extLst>
-  </p:cSld>
-  <p:clrMapOvr>
-    <a:masterClrMapping/>
-  </p:clrMapOvr>
-</p:sld>
-</file>
-
-<file path=ppt/slides/slide24.xml><?xml version="1.0" encoding="utf-8"?>
-<p:sld xmlns:a="http://schemas.openxmlformats.org/drawingml/2006/main" xmlns:r="http://schemas.openxmlformats.org/officeDocument/2006/relationships" xmlns:p="http://schemas.openxmlformats.org/presentationml/2006/main">
-  <p:cSld>
-    <p:spTree>
-      <p:nvGrpSpPr>
-        <p:cNvPr id="1" name=""/>
-        <p:cNvGrpSpPr/>
-        <p:nvPr/>
-      </p:nvGrpSpPr>
-      <p:grpSpPr>
-        <a:xfrm>
-          <a:off x="0" y="0"/>
-          <a:ext cx="0" cy="0"/>
-          <a:chOff x="0" y="0"/>
-          <a:chExt cx="0" cy="0"/>
-        </a:xfrm>
-      </p:grpSpPr>
-      <p:sp>
-        <p:nvSpPr>
-          <p:cNvPr id="2" name="Title 1"/>
-          <p:cNvSpPr>
-            <a:spLocks noGrp="1"/>
-          </p:cNvSpPr>
-          <p:nvPr>
-            <p:ph type="title"/>
-          </p:nvPr>
-        </p:nvSpPr>
-        <p:spPr/>
-        <p:txBody>
-          <a:bodyPr/>
-          <a:lstStyle/>
-          <a:p>
-            <a:r>
-              <a:t>AutoGen Overview</a:t>
-            </a:r>
-          </a:p>
-        </p:txBody>
-      </p:sp>
-      <p:sp>
-        <p:nvSpPr>
-          <p:cNvPr id="3" name="Content Placeholder 2"/>
-          <p:cNvSpPr>
-            <a:spLocks noGrp="1"/>
-          </p:cNvSpPr>
-          <p:nvPr>
-            <p:ph idx="1"/>
-          </p:nvPr>
-        </p:nvSpPr>
-        <p:spPr/>
-        <p:txBody>
-          <a:bodyPr/>
-          <a:lstStyle/>
-          <a:p>
-            <a:r>
-              <a:t>Microsoft framework for multi-agent conversations</a:t>
-            </a:r>
-          </a:p>
-          <a:p>
-            <a:r>
-              <a:t>Agents communicate autonomously</a:t>
-            </a:r>
-          </a:p>
-          <a:p>
-            <a:r>
-              <a:t>Supports humans-in-the-loop</a:t>
-            </a:r>
-          </a:p>
-          <a:p>
-            <a:r>
-              <a:t>Useful for enterprise workflow automation</a:t>
-            </a:r>
-          </a:p>
-          <a:p>
-            <a:r>
-              <a:t>Supports coding, debugging, and task orchestration</a:t>
-            </a:r>
-          </a:p>
-        </p:txBody>
-      </p:sp>
-    </p:spTree>
   </p:cSld>
   <p:clrMapOvr>
     <a:masterClrMapping/>
@@ -20426,7 +21426,7 @@
           <a:lstStyle/>
           <a:p>
             <a:r>
-              <a:t>Semantic Kernel Overview</a:t>
+              <a:t>AutoGen Overview</a:t>
             </a:r>
           </a:p>
         </p:txBody>
@@ -20447,44 +21447,27 @@
           <a:lstStyle/>
           <a:p>
             <a:r>
-              <a:rPr lang="en-IN" dirty="0"/>
-              <a:t>Microsoft enterprise orchestration SDK.</a:t>
-            </a:r>
-          </a:p>
-          <a:p>
-            <a:r>
-              <a:rPr lang="en-IN" b="1" dirty="0"/>
-              <a:t>Features</a:t>
-            </a:r>
-          </a:p>
-          <a:p>
-            <a:r>
-              <a:rPr lang="en-IN" dirty="0"/>
-              <a:t>Prompt orchestration </a:t>
-            </a:r>
-          </a:p>
-          <a:p>
-            <a:r>
-              <a:rPr lang="en-IN" dirty="0"/>
-              <a:t>Memory plugins </a:t>
-            </a:r>
-          </a:p>
-          <a:p>
-            <a:r>
-              <a:rPr lang="en-IN" dirty="0"/>
-              <a:t>AI planners </a:t>
-            </a:r>
-          </a:p>
-          <a:p>
-            <a:r>
-              <a:rPr lang="en-IN" dirty="0"/>
-              <a:t>Enterprise integration </a:t>
-            </a:r>
-          </a:p>
-          <a:p>
-            <a:r>
-              <a:rPr lang="en-IN" dirty="0"/>
-              <a:t>Multi-model support</a:t>
+              <a:t>Microsoft framework for multi-agent conversations</a:t>
+            </a:r>
+          </a:p>
+          <a:p>
+            <a:r>
+              <a:t>Agents communicate autonomously</a:t>
+            </a:r>
+          </a:p>
+          <a:p>
+            <a:r>
+              <a:t>Supports humans-in-the-loop</a:t>
+            </a:r>
+          </a:p>
+          <a:p>
+            <a:r>
+              <a:t>Useful for enterprise workflow automation</a:t>
+            </a:r>
+          </a:p>
+          <a:p>
+            <a:r>
+              <a:t>Supports coding, debugging, and task orchestration</a:t>
             </a:r>
           </a:p>
         </p:txBody>
@@ -20530,6 +21513,110 @@
           <a:lstStyle/>
           <a:p>
             <a:r>
+              <a:t>Semantic Kernel Overview</a:t>
+            </a:r>
+          </a:p>
+        </p:txBody>
+      </p:sp>
+      <p:sp>
+        <p:nvSpPr>
+          <p:cNvPr id="3" name="Content Placeholder 2"/>
+          <p:cNvSpPr>
+            <a:spLocks noGrp="1"/>
+          </p:cNvSpPr>
+          <p:nvPr>
+            <p:ph idx="1"/>
+          </p:nvPr>
+        </p:nvSpPr>
+        <p:spPr/>
+        <p:txBody>
+          <a:bodyPr/>
+          <a:lstStyle/>
+          <a:p>
+            <a:r>
+              <a:rPr lang="en-IN" dirty="0"/>
+              <a:t>Microsoft enterprise orchestration SDK.</a:t>
+            </a:r>
+          </a:p>
+          <a:p>
+            <a:r>
+              <a:rPr lang="en-IN" b="1" dirty="0"/>
+              <a:t>Features</a:t>
+            </a:r>
+          </a:p>
+          <a:p>
+            <a:r>
+              <a:rPr lang="en-IN" dirty="0"/>
+              <a:t>Prompt orchestration </a:t>
+            </a:r>
+          </a:p>
+          <a:p>
+            <a:r>
+              <a:rPr lang="en-IN" dirty="0"/>
+              <a:t>Memory plugins </a:t>
+            </a:r>
+          </a:p>
+          <a:p>
+            <a:r>
+              <a:rPr lang="en-IN" dirty="0"/>
+              <a:t>AI planners </a:t>
+            </a:r>
+          </a:p>
+          <a:p>
+            <a:r>
+              <a:rPr lang="en-IN" dirty="0"/>
+              <a:t>Enterprise integration </a:t>
+            </a:r>
+          </a:p>
+          <a:p>
+            <a:r>
+              <a:rPr lang="en-IN" dirty="0"/>
+              <a:t>Multi-model support</a:t>
+            </a:r>
+          </a:p>
+        </p:txBody>
+      </p:sp>
+    </p:spTree>
+  </p:cSld>
+  <p:clrMapOvr>
+    <a:masterClrMapping/>
+  </p:clrMapOvr>
+</p:sld>
+</file>
+
+<file path=ppt/slides/slide27.xml><?xml version="1.0" encoding="utf-8"?>
+<p:sld xmlns:a="http://schemas.openxmlformats.org/drawingml/2006/main" xmlns:r="http://schemas.openxmlformats.org/officeDocument/2006/relationships" xmlns:p="http://schemas.openxmlformats.org/presentationml/2006/main">
+  <p:cSld>
+    <p:spTree>
+      <p:nvGrpSpPr>
+        <p:cNvPr id="1" name=""/>
+        <p:cNvGrpSpPr/>
+        <p:nvPr/>
+      </p:nvGrpSpPr>
+      <p:grpSpPr>
+        <a:xfrm>
+          <a:off x="0" y="0"/>
+          <a:ext cx="0" cy="0"/>
+          <a:chOff x="0" y="0"/>
+          <a:chExt cx="0" cy="0"/>
+        </a:xfrm>
+      </p:grpSpPr>
+      <p:sp>
+        <p:nvSpPr>
+          <p:cNvPr id="2" name="Title 1"/>
+          <p:cNvSpPr>
+            <a:spLocks noGrp="1"/>
+          </p:cNvSpPr>
+          <p:nvPr>
+            <p:ph type="title"/>
+          </p:nvPr>
+        </p:nvSpPr>
+        <p:spPr/>
+        <p:txBody>
+          <a:bodyPr/>
+          <a:lstStyle/>
+          <a:p>
+            <a:r>
               <a:t>n8n for No-Code Agent Flows</a:t>
             </a:r>
           </a:p>
@@ -20636,7 +21723,7 @@
 </p:sld>
 </file>
 
-<file path=ppt/slides/slide27.xml><?xml version="1.0" encoding="utf-8"?>
+<file path=ppt/slides/slide28.xml><?xml version="1.0" encoding="utf-8"?>
 <p:sld xmlns:a="http://schemas.openxmlformats.org/drawingml/2006/main" xmlns:r="http://schemas.openxmlformats.org/officeDocument/2006/relationships" xmlns:p="http://schemas.openxmlformats.org/presentationml/2006/main">
   <p:cSld>
     <p:spTree>
@@ -20760,93 +21847,6 @@
         <p14:creationId xmlns:p14="http://schemas.microsoft.com/office/powerpoint/2010/main" val="942493749"/>
       </p:ext>
     </p:extLst>
-  </p:cSld>
-  <p:clrMapOvr>
-    <a:masterClrMapping/>
-  </p:clrMapOvr>
-</p:sld>
-</file>
-
-<file path=ppt/slides/slide28.xml><?xml version="1.0" encoding="utf-8"?>
-<p:sld xmlns:a="http://schemas.openxmlformats.org/drawingml/2006/main" xmlns:r="http://schemas.openxmlformats.org/officeDocument/2006/relationships" xmlns:p="http://schemas.openxmlformats.org/presentationml/2006/main">
-  <p:cSld>
-    <p:spTree>
-      <p:nvGrpSpPr>
-        <p:cNvPr id="1" name=""/>
-        <p:cNvGrpSpPr/>
-        <p:nvPr/>
-      </p:nvGrpSpPr>
-      <p:grpSpPr>
-        <a:xfrm>
-          <a:off x="0" y="0"/>
-          <a:ext cx="0" cy="0"/>
-          <a:chOff x="0" y="0"/>
-          <a:chExt cx="0" cy="0"/>
-        </a:xfrm>
-      </p:grpSpPr>
-      <p:sp>
-        <p:nvSpPr>
-          <p:cNvPr id="2" name="Title 1"/>
-          <p:cNvSpPr>
-            <a:spLocks noGrp="1"/>
-          </p:cNvSpPr>
-          <p:nvPr>
-            <p:ph type="title"/>
-          </p:nvPr>
-        </p:nvSpPr>
-        <p:spPr/>
-        <p:txBody>
-          <a:bodyPr/>
-          <a:lstStyle/>
-          <a:p>
-            <a:r>
-              <a:t>LangGraph SQL Review Agent – Architecture</a:t>
-            </a:r>
-          </a:p>
-        </p:txBody>
-      </p:sp>
-      <p:sp>
-        <p:nvSpPr>
-          <p:cNvPr id="3" name="Content Placeholder 2"/>
-          <p:cNvSpPr>
-            <a:spLocks noGrp="1"/>
-          </p:cNvSpPr>
-          <p:nvPr>
-            <p:ph idx="1"/>
-          </p:nvPr>
-        </p:nvSpPr>
-        <p:spPr/>
-        <p:txBody>
-          <a:bodyPr/>
-          <a:lstStyle/>
-          <a:p>
-            <a:r>
-              <a:t>Agent 1: Generate SQL from natural language</a:t>
-            </a:r>
-          </a:p>
-          <a:p>
-            <a:r>
-              <a:t>Agent 2: Review and optimise generated SQL</a:t>
-            </a:r>
-          </a:p>
-          <a:p>
-            <a:r>
-              <a:t>Shared memory stores conversation state</a:t>
-            </a:r>
-          </a:p>
-          <a:p>
-            <a:r>
-              <a:t>Snowflake MCP server used for execution</a:t>
-            </a:r>
-          </a:p>
-          <a:p>
-            <a:r>
-              <a:t>Reasoning logs captured for observability</a:t>
-            </a:r>
-          </a:p>
-        </p:txBody>
-      </p:sp>
-    </p:spTree>
   </p:cSld>
   <p:clrMapOvr>
     <a:masterClrMapping/>
@@ -20887,7 +21887,7 @@
           <a:lstStyle/>
           <a:p>
             <a:r>
-              <a:t>Hands-On Workflow Steps</a:t>
+              <a:t>LangGraph SQL Review Agent – Architecture</a:t>
             </a:r>
           </a:p>
         </p:txBody>
@@ -20908,27 +21908,27 @@
           <a:lstStyle/>
           <a:p>
             <a:r>
-              <a:t>User submits natural language request</a:t>
-            </a:r>
-          </a:p>
-          <a:p>
-            <a:r>
-              <a:t>SQL Generation Agent creates initial query</a:t>
-            </a:r>
-          </a:p>
-          <a:p>
-            <a:r>
-              <a:t>Review Agent validates syntax and optimises query</a:t>
-            </a:r>
-          </a:p>
-          <a:p>
-            <a:r>
-              <a:t>Snowflake MCP executes validated query</a:t>
-            </a:r>
-          </a:p>
-          <a:p>
-            <a:r>
-              <a:t>Logs stored for monitoring and debugging</a:t>
+              <a:t>Agent 1: Generate SQL from natural language</a:t>
+            </a:r>
+          </a:p>
+          <a:p>
+            <a:r>
+              <a:t>Agent 2: Review and optimise generated SQL</a:t>
+            </a:r>
+          </a:p>
+          <a:p>
+            <a:r>
+              <a:t>Shared memory stores conversation state</a:t>
+            </a:r>
+          </a:p>
+          <a:p>
+            <a:r>
+              <a:t>Snowflake MCP server used for execution</a:t>
+            </a:r>
+          </a:p>
+          <a:p>
+            <a:r>
+              <a:t>Reasoning logs captured for observability</a:t>
             </a:r>
           </a:p>
         </p:txBody>
@@ -21125,7 +22125,7 @@
           <a:lstStyle/>
           <a:p>
             <a:r>
-              <a:t>Snowflake MCP Integration</a:t>
+              <a:t>Hands-On Workflow Steps</a:t>
             </a:r>
           </a:p>
         </p:txBody>
@@ -21146,27 +22146,27 @@
           <a:lstStyle/>
           <a:p>
             <a:r>
-              <a:t>Connect LangGraph agents with Snowflake</a:t>
-            </a:r>
-          </a:p>
-          <a:p>
-            <a:r>
-              <a:t>Use connectors and MCP tools for execution</a:t>
-            </a:r>
-          </a:p>
-          <a:p>
-            <a:r>
-              <a:t>Secure credential handling with secrets management</a:t>
-            </a:r>
-          </a:p>
-          <a:p>
-            <a:r>
-              <a:t>Enable metadata access for schema-aware SQL generation</a:t>
-            </a:r>
-          </a:p>
-          <a:p>
-            <a:r>
-              <a:t>Track query performance and execution logs</a:t>
+              <a:t>User submits natural language request</a:t>
+            </a:r>
+          </a:p>
+          <a:p>
+            <a:r>
+              <a:t>SQL Generation Agent creates initial query</a:t>
+            </a:r>
+          </a:p>
+          <a:p>
+            <a:r>
+              <a:t>Review Agent validates syntax and optimises query</a:t>
+            </a:r>
+          </a:p>
+          <a:p>
+            <a:r>
+              <a:t>Snowflake MCP executes validated query</a:t>
+            </a:r>
+          </a:p>
+          <a:p>
+            <a:r>
+              <a:t>Logs stored for monitoring and debugging</a:t>
             </a:r>
           </a:p>
         </p:txBody>
@@ -21180,6 +22180,93 @@
 </file>
 
 <file path=ppt/slides/slide31.xml><?xml version="1.0" encoding="utf-8"?>
+<p:sld xmlns:a="http://schemas.openxmlformats.org/drawingml/2006/main" xmlns:r="http://schemas.openxmlformats.org/officeDocument/2006/relationships" xmlns:p="http://schemas.openxmlformats.org/presentationml/2006/main">
+  <p:cSld>
+    <p:spTree>
+      <p:nvGrpSpPr>
+        <p:cNvPr id="1" name=""/>
+        <p:cNvGrpSpPr/>
+        <p:nvPr/>
+      </p:nvGrpSpPr>
+      <p:grpSpPr>
+        <a:xfrm>
+          <a:off x="0" y="0"/>
+          <a:ext cx="0" cy="0"/>
+          <a:chOff x="0" y="0"/>
+          <a:chExt cx="0" cy="0"/>
+        </a:xfrm>
+      </p:grpSpPr>
+      <p:sp>
+        <p:nvSpPr>
+          <p:cNvPr id="2" name="Title 1"/>
+          <p:cNvSpPr>
+            <a:spLocks noGrp="1"/>
+          </p:cNvSpPr>
+          <p:nvPr>
+            <p:ph type="title"/>
+          </p:nvPr>
+        </p:nvSpPr>
+        <p:spPr/>
+        <p:txBody>
+          <a:bodyPr/>
+          <a:lstStyle/>
+          <a:p>
+            <a:r>
+              <a:t>Snowflake MCP Integration</a:t>
+            </a:r>
+          </a:p>
+        </p:txBody>
+      </p:sp>
+      <p:sp>
+        <p:nvSpPr>
+          <p:cNvPr id="3" name="Content Placeholder 2"/>
+          <p:cNvSpPr>
+            <a:spLocks noGrp="1"/>
+          </p:cNvSpPr>
+          <p:nvPr>
+            <p:ph idx="1"/>
+          </p:nvPr>
+        </p:nvSpPr>
+        <p:spPr/>
+        <p:txBody>
+          <a:bodyPr/>
+          <a:lstStyle/>
+          <a:p>
+            <a:r>
+              <a:t>Connect LangGraph agents with Snowflake</a:t>
+            </a:r>
+          </a:p>
+          <a:p>
+            <a:r>
+              <a:t>Use connectors and MCP tools for execution</a:t>
+            </a:r>
+          </a:p>
+          <a:p>
+            <a:r>
+              <a:t>Secure credential handling with secrets management</a:t>
+            </a:r>
+          </a:p>
+          <a:p>
+            <a:r>
+              <a:t>Enable metadata access for schema-aware SQL generation</a:t>
+            </a:r>
+          </a:p>
+          <a:p>
+            <a:r>
+              <a:t>Track query performance and execution logs</a:t>
+            </a:r>
+          </a:p>
+        </p:txBody>
+      </p:sp>
+    </p:spTree>
+  </p:cSld>
+  <p:clrMapOvr>
+    <a:masterClrMapping/>
+  </p:clrMapOvr>
+</p:sld>
+</file>
+
+<file path=ppt/slides/slide32.xml><?xml version="1.0" encoding="utf-8"?>
 <p:sld xmlns:a="http://schemas.openxmlformats.org/drawingml/2006/main" xmlns:r="http://schemas.openxmlformats.org/officeDocument/2006/relationships" xmlns:p="http://schemas.openxmlformats.org/presentationml/2006/main">
   <p:cSld>
     <p:spTree>
@@ -21332,93 +22419,6 @@
         <p14:creationId xmlns:p14="http://schemas.microsoft.com/office/powerpoint/2010/main" val="3557474462"/>
       </p:ext>
     </p:extLst>
-  </p:cSld>
-  <p:clrMapOvr>
-    <a:masterClrMapping/>
-  </p:clrMapOvr>
-</p:sld>
-</file>
-
-<file path=ppt/slides/slide32.xml><?xml version="1.0" encoding="utf-8"?>
-<p:sld xmlns:a="http://schemas.openxmlformats.org/drawingml/2006/main" xmlns:r="http://schemas.openxmlformats.org/officeDocument/2006/relationships" xmlns:p="http://schemas.openxmlformats.org/presentationml/2006/main">
-  <p:cSld>
-    <p:spTree>
-      <p:nvGrpSpPr>
-        <p:cNvPr id="1" name=""/>
-        <p:cNvGrpSpPr/>
-        <p:nvPr/>
-      </p:nvGrpSpPr>
-      <p:grpSpPr>
-        <a:xfrm>
-          <a:off x="0" y="0"/>
-          <a:ext cx="0" cy="0"/>
-          <a:chOff x="0" y="0"/>
-          <a:chExt cx="0" cy="0"/>
-        </a:xfrm>
-      </p:grpSpPr>
-      <p:sp>
-        <p:nvSpPr>
-          <p:cNvPr id="2" name="Title 1"/>
-          <p:cNvSpPr>
-            <a:spLocks noGrp="1"/>
-          </p:cNvSpPr>
-          <p:nvPr>
-            <p:ph type="title"/>
-          </p:nvPr>
-        </p:nvSpPr>
-        <p:spPr/>
-        <p:txBody>
-          <a:bodyPr/>
-          <a:lstStyle/>
-          <a:p>
-            <a:r>
-              <a:t>Reasoning and Observability</a:t>
-            </a:r>
-          </a:p>
-        </p:txBody>
-      </p:sp>
-      <p:sp>
-        <p:nvSpPr>
-          <p:cNvPr id="3" name="Content Placeholder 2"/>
-          <p:cNvSpPr>
-            <a:spLocks noGrp="1"/>
-          </p:cNvSpPr>
-          <p:nvPr>
-            <p:ph idx="1"/>
-          </p:nvPr>
-        </p:nvSpPr>
-        <p:spPr/>
-        <p:txBody>
-          <a:bodyPr/>
-          <a:lstStyle/>
-          <a:p>
-            <a:r>
-              <a:t>Capture CoT reasoning steps</a:t>
-            </a:r>
-          </a:p>
-          <a:p>
-            <a:r>
-              <a:t>Store intermediate decisions</a:t>
-            </a:r>
-          </a:p>
-          <a:p>
-            <a:r>
-              <a:t>Use tracing frameworks for debugging</a:t>
-            </a:r>
-          </a:p>
-          <a:p>
-            <a:r>
-              <a:t>Monitor latency, retries, and failures</a:t>
-            </a:r>
-          </a:p>
-          <a:p>
-            <a:r>
-              <a:t>Improve trust and governance in AI workflows</a:t>
-            </a:r>
-          </a:p>
-        </p:txBody>
-      </p:sp>
-    </p:spTree>
   </p:cSld>
   <p:clrMapOvr>
     <a:masterClrMapping/>
@@ -21459,7 +22459,7 @@
           <a:lstStyle/>
           <a:p>
             <a:r>
-              <a:t>Enterprise Use Cases</a:t>
+              <a:t>Reasoning and Observability</a:t>
             </a:r>
           </a:p>
         </p:txBody>
@@ -21480,27 +22480,27 @@
           <a:lstStyle/>
           <a:p>
             <a:r>
-              <a:t>Automated SQL optimisation</a:t>
-            </a:r>
-          </a:p>
-          <a:p>
-            <a:r>
-              <a:t>Data quality validation agents</a:t>
-            </a:r>
-          </a:p>
-          <a:p>
-            <a:r>
-              <a:t>Metadata enrichment workflows</a:t>
-            </a:r>
-          </a:p>
-          <a:p>
-            <a:r>
-              <a:t>AI-powered lineage analysis</a:t>
-            </a:r>
-          </a:p>
-          <a:p>
-            <a:r>
-              <a:t>Autonomous incident response in DE pipelines</a:t>
+              <a:t>Capture CoT reasoning steps</a:t>
+            </a:r>
+          </a:p>
+          <a:p>
+            <a:r>
+              <a:t>Store intermediate decisions</a:t>
+            </a:r>
+          </a:p>
+          <a:p>
+            <a:r>
+              <a:t>Use tracing frameworks for debugging</a:t>
+            </a:r>
+          </a:p>
+          <a:p>
+            <a:r>
+              <a:t>Monitor latency, retries, and failures</a:t>
+            </a:r>
+          </a:p>
+          <a:p>
+            <a:r>
+              <a:t>Improve trust and governance in AI workflows</a:t>
             </a:r>
           </a:p>
         </p:txBody>
@@ -21546,7 +22546,7 @@
           <a:lstStyle/>
           <a:p>
             <a:r>
-              <a:t>Challenges and Best Practices</a:t>
+              <a:t>Enterprise Use Cases</a:t>
             </a:r>
           </a:p>
         </p:txBody>
@@ -21567,27 +22567,27 @@
           <a:lstStyle/>
           <a:p>
             <a:r>
-              <a:t>Avoid hallucinated SQL and unsafe queries</a:t>
-            </a:r>
-          </a:p>
-          <a:p>
-            <a:r>
-              <a:t>Use guardrails and validation layers</a:t>
-            </a:r>
-          </a:p>
-          <a:p>
-            <a:r>
-              <a:t>Implement RBAC and governance</a:t>
-            </a:r>
-          </a:p>
-          <a:p>
-            <a:r>
-              <a:t>Track costs and token usage</a:t>
-            </a:r>
-          </a:p>
-          <a:p>
-            <a:r>
-              <a:t>Ensure reproducibility and auditability</a:t>
+              <a:t>Automated SQL optimisation</a:t>
+            </a:r>
+          </a:p>
+          <a:p>
+            <a:r>
+              <a:t>Data quality validation agents</a:t>
+            </a:r>
+          </a:p>
+          <a:p>
+            <a:r>
+              <a:t>Metadata enrichment workflows</a:t>
+            </a:r>
+          </a:p>
+          <a:p>
+            <a:r>
+              <a:t>AI-powered lineage analysis</a:t>
+            </a:r>
+          </a:p>
+          <a:p>
+            <a:r>
+              <a:t>Autonomous incident response in DE pipelines</a:t>
             </a:r>
           </a:p>
         </p:txBody>
@@ -21633,7 +22633,7 @@
           <a:lstStyle/>
           <a:p>
             <a:r>
-              <a:t>Future of Agentic AI in Data Engineering</a:t>
+              <a:t>Challenges and Best Practices</a:t>
             </a:r>
           </a:p>
         </p:txBody>
@@ -21654,27 +22654,27 @@
           <a:lstStyle/>
           <a:p>
             <a:r>
-              <a:t>Autonomous pipeline remediation</a:t>
-            </a:r>
-          </a:p>
-          <a:p>
-            <a:r>
-              <a:t>Self-healing data platforms</a:t>
-            </a:r>
-          </a:p>
-          <a:p>
-            <a:r>
-              <a:t>AI-assisted governance and compliance</a:t>
-            </a:r>
-          </a:p>
-          <a:p>
-            <a:r>
-              <a:t>Collaborative multi-agent ecosystems</a:t>
-            </a:r>
-          </a:p>
-          <a:p>
-            <a:r>
-              <a:t>Integration with lakehouse and streaming architectures</a:t>
+              <a:t>Avoid hallucinated SQL and unsafe queries</a:t>
+            </a:r>
+          </a:p>
+          <a:p>
+            <a:r>
+              <a:t>Use guardrails and validation layers</a:t>
+            </a:r>
+          </a:p>
+          <a:p>
+            <a:r>
+              <a:t>Implement RBAC and governance</a:t>
+            </a:r>
+          </a:p>
+          <a:p>
+            <a:r>
+              <a:t>Track costs and token usage</a:t>
+            </a:r>
+          </a:p>
+          <a:p>
+            <a:r>
+              <a:t>Ensure reproducibility and auditability</a:t>
             </a:r>
           </a:p>
         </p:txBody>
@@ -21720,7 +22720,7 @@
           <a:lstStyle/>
           <a:p>
             <a:r>
-              <a:t>Lab Exercise: Build LangGraph SQL Review Agent</a:t>
+              <a:t>Future of Agentic AI in Data Engineering</a:t>
             </a:r>
           </a:p>
         </p:txBody>
@@ -21741,27 +22741,27 @@
           <a:lstStyle/>
           <a:p>
             <a:r>
-              <a:t>Create a 2-agent LangGraph pipeline</a:t>
-            </a:r>
-          </a:p>
-          <a:p>
-            <a:r>
-              <a:t>Generate SQL from natural language</a:t>
-            </a:r>
-          </a:p>
-          <a:p>
-            <a:r>
-              <a:t>Review and optimise SQL queries</a:t>
-            </a:r>
-          </a:p>
-          <a:p>
-            <a:r>
-              <a:t>Integrate with Snowflake MCP server</a:t>
-            </a:r>
-          </a:p>
-          <a:p>
-            <a:r>
-              <a:t>Log all reasoning and execution steps</a:t>
+              <a:t>Autonomous pipeline remediation</a:t>
+            </a:r>
+          </a:p>
+          <a:p>
+            <a:r>
+              <a:t>Self-healing data platforms</a:t>
+            </a:r>
+          </a:p>
+          <a:p>
+            <a:r>
+              <a:t>AI-assisted governance and compliance</a:t>
+            </a:r>
+          </a:p>
+          <a:p>
+            <a:r>
+              <a:t>Collaborative multi-agent ecosystems</a:t>
+            </a:r>
+          </a:p>
+          <a:p>
+            <a:r>
+              <a:t>Integration with lakehouse and streaming architectures</a:t>
             </a:r>
           </a:p>
         </p:txBody>
@@ -21807,7 +22807,7 @@
           <a:lstStyle/>
           <a:p>
             <a:r>
-              <a:t>Suggested Folder Structure</a:t>
+              <a:t>Lab Exercise: Build LangGraph SQL Review Agent</a:t>
             </a:r>
           </a:p>
         </p:txBody>
@@ -21828,27 +22828,27 @@
           <a:lstStyle/>
           <a:p>
             <a:r>
-              <a:t>/agents – SQL generator and reviewer agents</a:t>
-            </a:r>
-          </a:p>
-          <a:p>
-            <a:r>
-              <a:t>/tools – Snowflake connectors and MCP tools</a:t>
-            </a:r>
-          </a:p>
-          <a:p>
-            <a:r>
-              <a:t>/memory – conversation and vector storage</a:t>
-            </a:r>
-          </a:p>
-          <a:p>
-            <a:r>
-              <a:t>/logs – reasoning and execution logs</a:t>
-            </a:r>
-          </a:p>
-          <a:p>
-            <a:r>
-              <a:t>/notebooks – experimentation and demos</a:t>
+              <a:t>Create a 2-agent LangGraph pipeline</a:t>
+            </a:r>
+          </a:p>
+          <a:p>
+            <a:r>
+              <a:t>Generate SQL from natural language</a:t>
+            </a:r>
+          </a:p>
+          <a:p>
+            <a:r>
+              <a:t>Review and optimise SQL queries</a:t>
+            </a:r>
+          </a:p>
+          <a:p>
+            <a:r>
+              <a:t>Integrate with Snowflake MCP server</a:t>
+            </a:r>
+          </a:p>
+          <a:p>
+            <a:r>
+              <a:t>Log all reasoning and execution steps</a:t>
             </a:r>
           </a:p>
         </p:txBody>
@@ -21862,6 +22862,93 @@
 </file>
 
 <file path=ppt/slides/slide38.xml><?xml version="1.0" encoding="utf-8"?>
+<p:sld xmlns:a="http://schemas.openxmlformats.org/drawingml/2006/main" xmlns:r="http://schemas.openxmlformats.org/officeDocument/2006/relationships" xmlns:p="http://schemas.openxmlformats.org/presentationml/2006/main">
+  <p:cSld>
+    <p:spTree>
+      <p:nvGrpSpPr>
+        <p:cNvPr id="1" name=""/>
+        <p:cNvGrpSpPr/>
+        <p:nvPr/>
+      </p:nvGrpSpPr>
+      <p:grpSpPr>
+        <a:xfrm>
+          <a:off x="0" y="0"/>
+          <a:ext cx="0" cy="0"/>
+          <a:chOff x="0" y="0"/>
+          <a:chExt cx="0" cy="0"/>
+        </a:xfrm>
+      </p:grpSpPr>
+      <p:sp>
+        <p:nvSpPr>
+          <p:cNvPr id="2" name="Title 1"/>
+          <p:cNvSpPr>
+            <a:spLocks noGrp="1"/>
+          </p:cNvSpPr>
+          <p:nvPr>
+            <p:ph type="title"/>
+          </p:nvPr>
+        </p:nvSpPr>
+        <p:spPr/>
+        <p:txBody>
+          <a:bodyPr/>
+          <a:lstStyle/>
+          <a:p>
+            <a:r>
+              <a:t>Suggested Folder Structure</a:t>
+            </a:r>
+          </a:p>
+        </p:txBody>
+      </p:sp>
+      <p:sp>
+        <p:nvSpPr>
+          <p:cNvPr id="3" name="Content Placeholder 2"/>
+          <p:cNvSpPr>
+            <a:spLocks noGrp="1"/>
+          </p:cNvSpPr>
+          <p:nvPr>
+            <p:ph idx="1"/>
+          </p:nvPr>
+        </p:nvSpPr>
+        <p:spPr/>
+        <p:txBody>
+          <a:bodyPr/>
+          <a:lstStyle/>
+          <a:p>
+            <a:r>
+              <a:t>/agents – SQL generator and reviewer agents</a:t>
+            </a:r>
+          </a:p>
+          <a:p>
+            <a:r>
+              <a:t>/tools – Snowflake connectors and MCP tools</a:t>
+            </a:r>
+          </a:p>
+          <a:p>
+            <a:r>
+              <a:t>/memory – conversation and vector storage</a:t>
+            </a:r>
+          </a:p>
+          <a:p>
+            <a:r>
+              <a:t>/logs – reasoning and execution logs</a:t>
+            </a:r>
+          </a:p>
+          <a:p>
+            <a:r>
+              <a:t>/notebooks – experimentation and demos</a:t>
+            </a:r>
+          </a:p>
+        </p:txBody>
+      </p:sp>
+    </p:spTree>
+  </p:cSld>
+  <p:clrMapOvr>
+    <a:masterClrMapping/>
+  </p:clrMapOvr>
+</p:sld>
+</file>
+
+<file path=ppt/slides/slide39.xml><?xml version="1.0" encoding="utf-8"?>
 <p:sld xmlns:a="http://schemas.openxmlformats.org/drawingml/2006/main" xmlns:r="http://schemas.openxmlformats.org/officeDocument/2006/relationships" xmlns:p="http://schemas.openxmlformats.org/presentationml/2006/main">
   <p:cSld>
     <p:spTree>
